--- a/SignalR/presentation/SignalR - More Than WebSocket.pptx
+++ b/SignalR/presentation/SignalR - More Than WebSocket.pptx
@@ -26691,7 +26691,7 @@
           <p:spPr>
             <a:xfrm>
               <a:off x="982218" y="5816600"/>
-              <a:ext cx="8640626" cy="322707"/>
+              <a:ext cx="9330275" cy="322707"/>
             </a:xfrm>
             <a:prstGeom prst="rect">
               <a:avLst/>
@@ -26783,7 +26783,7 @@
                   <a:ea typeface="+mn-ea"/>
                   <a:cs typeface="+mn-cs"/>
                 </a:rPr>
-                <a:t>onreconnected → banner hides</a:t>
+                <a:t>onreconnected → “Refresh your page”</a:t>
               </a:r>
             </a:p>
           </p:txBody>

--- a/SignalR/presentation/SignalR - More Than WebSocket.pptx
+++ b/SignalR/presentation/SignalR - More Than WebSocket.pptx
@@ -11892,7 +11892,7 @@
         <p:spPr>
           <a:xfrm>
             <a:off x="609600" y="3543300"/>
-            <a:ext cx="3009900" cy="762000"/>
+            <a:ext cx="4000500" cy="762000"/>
           </a:xfrm>
           <a:prstGeom prst="chevron">
             <a:avLst/>
@@ -11915,8 +11915,8 @@
         </p:nvSpPr>
         <p:spPr>
           <a:xfrm>
-            <a:off x="3238500" y="3543300"/>
-            <a:ext cx="3009900" cy="762000"/>
+            <a:off x="4229100" y="3543300"/>
+            <a:ext cx="4000500" cy="762000"/>
           </a:xfrm>
           <a:prstGeom prst="chevron">
             <a:avLst/>
@@ -11939,32 +11939,8 @@
         </p:nvSpPr>
         <p:spPr>
           <a:xfrm>
-            <a:off x="5867400" y="3543300"/>
-            <a:ext cx="3009900" cy="762000"/>
-          </a:xfrm>
-          <a:prstGeom prst="chevron">
-            <a:avLst/>
-          </a:prstGeom>
-          <a:solidFill>
-            <a:schemeClr val="lt2"/>
-          </a:solidFill>
-          <a:ln w="14288">
-            <a:solidFill>
-              <a:schemeClr val="accent2"/>
-            </a:solidFill>
-          </a:ln>
-        </p:spPr>
-      </p:sp>
-      <p:sp>
-        <p:nvSpPr>
-          <p:cNvPr id="10" name="Freeform 10"/>
-          <p:cNvSpPr/>
-          <p:nvPr/>
-        </p:nvSpPr>
-        <p:spPr>
-          <a:xfrm>
-            <a:off x="8496300" y="3543300"/>
-            <a:ext cx="3009900" cy="762000"/>
+            <a:off x="7848600" y="3543300"/>
+            <a:ext cx="3733800" cy="762000"/>
           </a:xfrm>
           <a:prstGeom prst="chevron">
             <a:avLst/>
@@ -11981,41 +11957,41 @@
       </p:sp>
       <p:grpSp>
         <p:nvGrpSpPr>
-          <p:cNvPr id="21" name="scene-labels"/>
+          <p:cNvPr id="18" name="scene-labels"/>
           <p:cNvGrpSpPr/>
           <p:nvPr/>
         </p:nvGrpSpPr>
         <p:grpSpPr>
           <a:xfrm>
-            <a:off x="1091030" y="3797300"/>
-            <a:ext cx="9599041" cy="991870"/>
-            <a:chOff x="1091030" y="3797300"/>
-            <a:chExt cx="9599041" cy="991870"/>
+            <a:off x="1586330" y="3797300"/>
+            <a:ext cx="8999202" cy="991870"/>
+            <a:chOff x="1586330" y="3797300"/>
+            <a:chExt cx="8999202" cy="991870"/>
           </a:xfrm>
         </p:grpSpPr>
         <p:grpSp>
           <p:nvGrpSpPr>
-            <p:cNvPr id="15" name="Group 15"/>
+            <p:cNvPr id="13" name="Group 13"/>
             <p:cNvGrpSpPr/>
             <p:nvPr/>
           </p:nvGrpSpPr>
           <p:grpSpPr>
             <a:xfrm>
-              <a:off x="1517988" y="3797300"/>
-              <a:ext cx="9172083" cy="322707"/>
-              <a:chOff x="1517988" y="3797300"/>
-              <a:chExt cx="9172083" cy="322707"/>
+              <a:off x="2013288" y="3797300"/>
+              <a:ext cx="8391033" cy="322707"/>
+              <a:chOff x="2013288" y="3797300"/>
+              <a:chExt cx="8391033" cy="322707"/>
             </a:xfrm>
           </p:grpSpPr>
           <p:sp>
             <p:nvSpPr>
-              <p:cNvPr id="11" name="TextBox 11"/>
+              <p:cNvPr id="10" name="TextBox 10"/>
               <p:cNvSpPr txBox="1"/>
               <p:nvPr/>
             </p:nvSpPr>
             <p:spPr>
               <a:xfrm>
-                <a:off x="1517988" y="3797300"/>
+                <a:off x="2013288" y="3797300"/>
                 <a:ext cx="1193123" cy="322707"/>
               </a:xfrm>
               <a:prstGeom prst="rect">
@@ -12049,13 +12025,13 @@
           </p:sp>
           <p:sp>
             <p:nvSpPr>
-              <p:cNvPr id="12" name="TextBox 12"/>
+              <p:cNvPr id="11" name="TextBox 11"/>
               <p:cNvSpPr txBox="1"/>
               <p:nvPr/>
             </p:nvSpPr>
             <p:spPr>
               <a:xfrm>
-                <a:off x="4402115" y="3797300"/>
+                <a:off x="5888015" y="3797300"/>
                 <a:ext cx="682670" cy="322707"/>
               </a:xfrm>
               <a:prstGeom prst="rect">
@@ -12089,53 +12065,13 @@
           </p:sp>
           <p:sp>
             <p:nvSpPr>
-              <p:cNvPr id="13" name="TextBox 13"/>
+              <p:cNvPr id="12" name="TextBox 12"/>
               <p:cNvSpPr txBox="1"/>
               <p:nvPr/>
             </p:nvSpPr>
             <p:spPr>
               <a:xfrm>
-                <a:off x="6775989" y="3797300"/>
-                <a:ext cx="1192723" cy="322707"/>
-              </a:xfrm>
-              <a:prstGeom prst="rect">
-                <a:avLst/>
-              </a:prstGeom>
-              <a:noFill/>
-              <a:ln>
-                <a:noFill/>
-              </a:ln>
-            </p:spPr>
-            <p:txBody>
-              <a:bodyPr wrap="none" lIns="0" tIns="0" rIns="0" bIns="0" anchor="t" anchorCtr="0">
-                <a:spAutoFit/>
-              </a:bodyPr>
-              <a:lstStyle/>
-              <a:p>
-                <a:pPr algn="ctr"/>
-                <a:r>
-                  <a:rPr lang="en" sz="1650" b="1" dirty="0">
-                    <a:solidFill>
-                      <a:schemeClr val="accent1"/>
-                    </a:solidFill>
-                    <a:latin typeface="+mn-lt"/>
-                    <a:ea typeface="+mn-ea"/>
-                    <a:cs typeface="+mn-cs"/>
-                  </a:rPr>
-                  <a:t>3 · Max bid</a:t>
-                </a:r>
-              </a:p>
-            </p:txBody>
-          </p:sp>
-          <p:sp>
-            <p:nvSpPr>
-              <p:cNvPr id="14" name="TextBox 14"/>
-              <p:cNvSpPr txBox="1"/>
-              <p:nvPr/>
-            </p:nvSpPr>
-            <p:spPr>
-              <a:xfrm>
-                <a:off x="9312428" y="3797300"/>
+                <a:off x="9026678" y="3797300"/>
                 <a:ext cx="1377643" cy="322707"/>
               </a:xfrm>
               <a:prstGeom prst="rect">
@@ -12162,7 +12098,7 @@
                     <a:ea typeface="+mn-ea"/>
                     <a:cs typeface="+mn-cs"/>
                   </a:rPr>
-                  <a:t>4 · Go offline</a:t>
+                  <a:t>3 · Go offline</a:t>
                 </a:r>
               </a:p>
             </p:txBody>
@@ -12170,27 +12106,27 @@
         </p:grpSp>
         <p:grpSp>
           <p:nvGrpSpPr>
-            <p:cNvPr id="20" name="Group 20"/>
+            <p:cNvPr id="17" name="Group 17"/>
             <p:cNvGrpSpPr/>
             <p:nvPr/>
           </p:nvGrpSpPr>
           <p:grpSpPr>
             <a:xfrm>
-              <a:off x="1091030" y="4495800"/>
-              <a:ext cx="9594195" cy="293370"/>
-              <a:chOff x="1091030" y="4495800"/>
-              <a:chExt cx="9594195" cy="293370"/>
+              <a:off x="1586330" y="4495800"/>
+              <a:ext cx="8999202" cy="293370"/>
+              <a:chOff x="1586330" y="4495800"/>
+              <a:chExt cx="8999202" cy="293370"/>
             </a:xfrm>
           </p:grpSpPr>
           <p:sp>
             <p:nvSpPr>
-              <p:cNvPr id="16" name="TextBox 16"/>
+              <p:cNvPr id="14" name="TextBox 14"/>
               <p:cNvSpPr txBox="1"/>
               <p:nvPr/>
             </p:nvSpPr>
             <p:spPr>
               <a:xfrm>
-                <a:off x="1091030" y="4495800"/>
+                <a:off x="1586330" y="4495800"/>
                 <a:ext cx="2047039" cy="293370"/>
               </a:xfrm>
               <a:prstGeom prst="rect">
@@ -12224,13 +12160,13 @@
           </p:sp>
           <p:sp>
             <p:nvSpPr>
-              <p:cNvPr id="17" name="TextBox 17"/>
+              <p:cNvPr id="15" name="TextBox 15"/>
               <p:cNvSpPr txBox="1"/>
               <p:nvPr/>
             </p:nvSpPr>
             <p:spPr>
               <a:xfrm>
-                <a:off x="3635678" y="4495800"/>
+                <a:off x="5121578" y="4495800"/>
                 <a:ext cx="2215543" cy="293370"/>
               </a:xfrm>
               <a:prstGeom prst="rect">
@@ -12264,14 +12200,14 @@
           </p:sp>
           <p:sp>
             <p:nvSpPr>
-              <p:cNvPr id="18" name="TextBox 18"/>
+              <p:cNvPr id="16" name="TextBox 16"/>
               <p:cNvSpPr txBox="1"/>
               <p:nvPr/>
             </p:nvSpPr>
             <p:spPr>
               <a:xfrm>
-                <a:off x="6357800" y="4495800"/>
-                <a:ext cx="2029101" cy="293370"/>
+                <a:off x="8845467" y="4495800"/>
+                <a:ext cx="1740065" cy="293370"/>
               </a:xfrm>
               <a:prstGeom prst="rect">
                 <a:avLst/>
@@ -12297,47 +12233,7 @@
                     <a:ea typeface="+mn-ea"/>
                     <a:cs typeface="+mn-cs"/>
                   </a:rPr>
-                  <a:t>Anna is outbid at once</a:t>
-                </a:r>
-              </a:p>
-            </p:txBody>
-          </p:sp>
-          <p:sp>
-            <p:nvSpPr>
-              <p:cNvPr id="19" name="TextBox 19"/>
-              <p:cNvSpPr txBox="1"/>
-              <p:nvPr/>
-            </p:nvSpPr>
-            <p:spPr>
-              <a:xfrm>
-                <a:off x="9317276" y="4495800"/>
-                <a:ext cx="1367949" cy="293370"/>
-              </a:xfrm>
-              <a:prstGeom prst="rect">
-                <a:avLst/>
-              </a:prstGeom>
-              <a:noFill/>
-              <a:ln>
-                <a:noFill/>
-              </a:ln>
-            </p:spPr>
-            <p:txBody>
-              <a:bodyPr wrap="none" lIns="0" tIns="0" rIns="0" bIns="0" anchor="t" anchorCtr="0">
-                <a:spAutoFit/>
-              </a:bodyPr>
-              <a:lstStyle/>
-              <a:p>
-                <a:pPr algn="ctr"/>
-                <a:r>
-                  <a:rPr lang="en" sz="1500" dirty="0">
-                    <a:solidFill>
-                      <a:schemeClr val="accent5"/>
-                    </a:solidFill>
-                    <a:latin typeface="+mn-lt"/>
-                    <a:ea typeface="+mn-ea"/>
-                    <a:cs typeface="+mn-cs"/>
-                  </a:rPr>
-                  <a:t>retry 0 · 2 · 10 s</a:t>
+                  <a:t>retry 0 · 2 · 10 · 30 s</a:t>
                 </a:r>
               </a:p>
             </p:txBody>
@@ -12346,7 +12242,7 @@
       </p:grpSp>
       <p:grpSp>
         <p:nvGrpSpPr>
-          <p:cNvPr id="28" name="demo-link"/>
+          <p:cNvPr id="25" name="demo-link"/>
           <p:cNvGrpSpPr/>
           <p:nvPr/>
         </p:nvGrpSpPr>
@@ -12360,7 +12256,7 @@
         </p:grpSpPr>
         <p:grpSp>
           <p:nvGrpSpPr>
-            <p:cNvPr id="25" name="Group 25"/>
+            <p:cNvPr id="22" name="Group 22"/>
             <p:cNvGrpSpPr/>
             <p:nvPr/>
           </p:nvGrpSpPr>
@@ -12374,7 +12270,7 @@
           </p:grpSpPr>
           <p:sp>
             <p:nvSpPr>
-              <p:cNvPr id="22" name="Freeform 22"/>
+              <p:cNvPr id="19" name="Freeform 19"/>
               <p:cNvSpPr/>
               <p:nvPr/>
             </p:nvSpPr>
@@ -12410,7 +12306,7 @@
           </p:sp>
           <p:sp>
             <p:nvSpPr>
-              <p:cNvPr id="23" name="Freeform 23"/>
+              <p:cNvPr id="20" name="Freeform 20"/>
               <p:cNvSpPr/>
               <p:nvPr/>
             </p:nvSpPr>
@@ -12475,7 +12371,7 @@
           </p:sp>
           <p:sp>
             <p:nvSpPr>
-              <p:cNvPr id="24" name="Freeform 24"/>
+              <p:cNvPr id="21" name="Freeform 21"/>
               <p:cNvSpPr/>
               <p:nvPr/>
             </p:nvSpPr>
@@ -12512,7 +12408,7 @@
         </p:grpSp>
         <p:sp>
           <p:nvSpPr>
-            <p:cNvPr id="26" name="TextBox 26"/>
+            <p:cNvPr id="23" name="TextBox 23"/>
             <p:cNvSpPr txBox="1"/>
             <p:nvPr/>
           </p:nvSpPr>
@@ -12552,7 +12448,7 @@
         </p:sp>
         <p:sp>
           <p:nvSpPr>
-            <p:cNvPr id="27" name="TextBox 27"/>
+            <p:cNvPr id="24" name="TextBox 24"/>
             <p:cNvSpPr txBox="1"/>
             <p:nvPr/>
           </p:nvSpPr>

--- a/SignalR/presentation/SignalR - More Than WebSocket.pptx
+++ b/SignalR/presentation/SignalR - More Than WebSocket.pptx
@@ -906,7 +906,7 @@
           <p:spPr>
             <a:xfrm>
               <a:off x="601218" y="5588000"/>
-              <a:ext cx="4513764" cy="322707"/>
+              <a:ext cx="3958739" cy="322707"/>
             </a:xfrm>
             <a:prstGeom prst="rect">
               <a:avLst/>
@@ -932,7 +932,7 @@
                   <a:ea typeface="+mn-ea"/>
                   <a:cs typeface="+mn-cs"/>
                 </a:rPr>
-                <a:t>Tavian Nguyen · Geronimo team · 23/10/2026</a:t>
+                <a:t>Tavian Nguyen · Geronimo · 23/10/2026</a:t>
               </a:r>
             </a:p>
           </p:txBody>
@@ -1658,10 +1658,10 @@
         </p:nvGrpSpPr>
         <p:grpSpPr>
           <a:xfrm>
-            <a:off x="590550" y="609600"/>
-            <a:ext cx="6221392" cy="1000125"/>
-            <a:chOff x="590550" y="609600"/>
-            <a:chExt cx="6221392" cy="1000125"/>
+            <a:off x="590550" y="571500"/>
+            <a:ext cx="6221392" cy="1038225"/>
+            <a:chOff x="590550" y="571500"/>
+            <a:chExt cx="6221392" cy="1038225"/>
           </a:xfrm>
         </p:grpSpPr>
         <p:sp>
@@ -1672,8 +1672,8 @@
           </p:nvSpPr>
           <p:spPr>
             <a:xfrm>
-              <a:off x="601980" y="609600"/>
-              <a:ext cx="4243498" cy="293370"/>
+              <a:off x="600456" y="571500"/>
+              <a:ext cx="5092197" cy="352044"/>
             </a:xfrm>
             <a:prstGeom prst="rect">
               <a:avLst/>
@@ -1691,7 +1691,7 @@
             <a:p>
               <a:pPr algn="l"/>
               <a:r>
-                <a:rPr lang="en" sz="1500" b="1" dirty="0">
+                <a:rPr lang="en" sz="1800" b="1" dirty="0">
                   <a:solidFill>
                     <a:schemeClr val="accent2"/>
                   </a:solidFill>
@@ -4259,10 +4259,10 @@
         </p:nvGrpSpPr>
         <p:grpSpPr>
           <a:xfrm>
-            <a:off x="590550" y="609600"/>
-            <a:ext cx="5098256" cy="1000125"/>
-            <a:chOff x="590550" y="609600"/>
-            <a:chExt cx="5098256" cy="1000125"/>
+            <a:off x="590550" y="571500"/>
+            <a:ext cx="5363166" cy="1038225"/>
+            <a:chOff x="590550" y="571500"/>
+            <a:chExt cx="5363166" cy="1038225"/>
           </a:xfrm>
         </p:grpSpPr>
         <p:sp>
@@ -4273,8 +4273,8 @@
           </p:nvSpPr>
           <p:spPr>
             <a:xfrm>
-              <a:off x="601980" y="609600"/>
-              <a:ext cx="4243498" cy="293370"/>
+              <a:off x="600456" y="571500"/>
+              <a:ext cx="5092197" cy="352044"/>
             </a:xfrm>
             <a:prstGeom prst="rect">
               <a:avLst/>
@@ -4292,7 +4292,7 @@
             <a:p>
               <a:pPr algn="l"/>
               <a:r>
-                <a:rPr lang="en" sz="1500" b="1" dirty="0">
+                <a:rPr lang="en" sz="1800" b="1" dirty="0">
                   <a:solidFill>
                     <a:schemeClr val="accent2"/>
                   </a:solidFill>
@@ -4314,7 +4314,7 @@
           <p:spPr>
             <a:xfrm>
               <a:off x="590550" y="876300"/>
-              <a:ext cx="5098256" cy="733425"/>
+              <a:ext cx="5363166" cy="733425"/>
             </a:xfrm>
             <a:prstGeom prst="rect">
               <a:avLst/>
@@ -4340,7 +4340,7 @@
                   <a:ea typeface="+mj-ea"/>
                   <a:cs typeface="+mj-cs"/>
                 </a:rPr>
-                <a:t>One line, every screen</a:t>
+                <a:t>One bid, two audiences</a:t>
               </a:r>
             </a:p>
           </p:txBody>
@@ -4348,16 +4348,16 @@
       </p:grpSp>
       <p:grpSp>
         <p:nvGrpSpPr>
-          <p:cNvPr id="17" name="geronimo-broadcast"/>
+          <p:cNvPr id="14" name="geronimo-broadcast"/>
           <p:cNvGrpSpPr/>
           <p:nvPr/>
         </p:nvGrpSpPr>
         <p:grpSpPr>
           <a:xfrm>
             <a:off x="609600" y="1866900"/>
-            <a:ext cx="3238500" cy="4305300"/>
+            <a:ext cx="3284506" cy="4305300"/>
             <a:chOff x="609600" y="1866900"/>
-            <a:chExt cx="3238500" cy="4305300"/>
+            <a:chExt cx="3284506" cy="4305300"/>
           </a:xfrm>
         </p:grpSpPr>
         <p:sp>
@@ -4395,7 +4395,7 @@
           <p:spPr>
             <a:xfrm>
               <a:off x="792480" y="1962150"/>
-              <a:ext cx="1597331" cy="293370"/>
+              <a:ext cx="1213021" cy="293370"/>
             </a:xfrm>
             <a:prstGeom prst="rect">
               <a:avLst/>
@@ -4421,75 +4421,35 @@
                   <a:ea typeface="+mn-ea"/>
                   <a:cs typeface="+mn-cs"/>
                 </a:rPr>
-                <a:t>Geronimo writes</a:t>
+                <a:t>Server sends</a:t>
               </a:r>
             </a:p>
           </p:txBody>
         </p:sp>
-        <p:sp>
-          <p:nvSpPr>
-            <p:cNvPr id="7" name="TextBox 7"/>
-            <p:cNvSpPr txBox="1"/>
-            <p:nvPr/>
-          </p:nvSpPr>
-          <p:spPr>
-            <a:xfrm>
-              <a:off x="792480" y="2241550"/>
-              <a:ext cx="2594800" cy="293370"/>
-            </a:xfrm>
-            <a:prstGeom prst="rect">
-              <a:avLst/>
-            </a:prstGeom>
-            <a:noFill/>
-            <a:ln>
-              <a:noFill/>
-            </a:ln>
-          </p:spPr>
-          <p:txBody>
-            <a:bodyPr wrap="none" lIns="0" tIns="0" rIns="0" bIns="0" anchor="t" anchorCtr="0">
-              <a:spAutoFit/>
-            </a:bodyPr>
-            <a:lstStyle/>
-            <a:p>
-              <a:pPr algn="l"/>
-              <a:r>
-                <a:rPr lang="en" sz="1500" dirty="0">
-                  <a:solidFill>
-                    <a:schemeClr val="accent5"/>
-                  </a:solidFill>
-                  <a:latin typeface="Consolas"/>
-                  <a:ea typeface="Consolas"/>
-                  <a:cs typeface="Consolas"/>
-                </a:rPr>
-                <a:t>BroadcastBidUpdateAsync</a:t>
-              </a:r>
-            </a:p>
-          </p:txBody>
-        </p:sp>
         <p:grpSp>
           <p:nvGrpSpPr>
-            <p:cNvPr id="14" name="Group 14"/>
+            <p:cNvPr id="13" name="Group 13"/>
             <p:cNvGrpSpPr/>
             <p:nvPr/>
           </p:nvGrpSpPr>
           <p:grpSpPr>
             <a:xfrm>
-              <a:off x="792480" y="2717800"/>
-              <a:ext cx="2820353" cy="2007870"/>
-              <a:chOff x="792480" y="2717800"/>
-              <a:chExt cx="2820353" cy="2007870"/>
+              <a:off x="791718" y="2692400"/>
+              <a:ext cx="3102388" cy="2037207"/>
+              <a:chOff x="791718" y="2692400"/>
+              <a:chExt cx="3102388" cy="2037207"/>
             </a:xfrm>
           </p:grpSpPr>
           <p:sp>
             <p:nvSpPr>
-              <p:cNvPr id="8" name="TextBox 8"/>
+              <p:cNvPr id="7" name="TextBox 7"/>
               <p:cNvSpPr txBox="1"/>
               <p:nvPr/>
             </p:nvSpPr>
             <p:spPr>
               <a:xfrm>
-                <a:off x="792480" y="2717800"/>
-                <a:ext cx="2487709" cy="293370"/>
+                <a:off x="791718" y="2692400"/>
+                <a:ext cx="2736480" cy="322707"/>
               </a:xfrm>
               <a:prstGeom prst="rect">
                 <a:avLst/>
@@ -4507,7 +4467,7 @@
               <a:p>
                 <a:pPr algn="l"/>
                 <a:r>
-                  <a:rPr lang="en" sz="1500" dirty="0">
+                  <a:rPr lang="en" sz="1650" dirty="0">
                     <a:solidFill>
                       <a:schemeClr val="accent1"/>
                     </a:solidFill>
@@ -4522,14 +4482,14 @@
           </p:sp>
           <p:sp>
             <p:nvSpPr>
-              <p:cNvPr id="9" name="TextBox 9"/>
+              <p:cNvPr id="8" name="TextBox 8"/>
               <p:cNvSpPr txBox="1"/>
               <p:nvPr/>
             </p:nvSpPr>
             <p:spPr>
               <a:xfrm>
-                <a:off x="982980" y="2984500"/>
-                <a:ext cx="2356961" cy="293370"/>
+                <a:off x="982218" y="2959100"/>
+                <a:ext cx="2228229" cy="322707"/>
               </a:xfrm>
               <a:prstGeom prst="rect">
                 <a:avLst/>
@@ -4547,7 +4507,7 @@
               <a:p>
                 <a:pPr algn="l"/>
                 <a:r>
-                  <a:rPr lang="en" sz="1500" dirty="0">
+                  <a:rPr lang="en" sz="1650" dirty="0">
                     <a:solidFill>
                       <a:schemeClr val="accent1"/>
                     </a:solidFill>
@@ -4555,21 +4515,21 @@
                     <a:ea typeface="Consolas"/>
                     <a:cs typeface="Consolas"/>
                   </a:rPr>
-                  <a:t>"updateItem", 9 args)</a:t>
+                  <a:t>"updateItem", ...)</a:t>
                 </a:r>
               </a:p>
             </p:txBody>
           </p:sp>
           <p:sp>
             <p:nvSpPr>
-              <p:cNvPr id="10" name="TextBox 10"/>
+              <p:cNvPr id="9" name="TextBox 9"/>
               <p:cNvSpPr txBox="1"/>
               <p:nvPr/>
             </p:nvSpPr>
             <p:spPr>
               <a:xfrm>
-                <a:off x="792480" y="3441700"/>
-                <a:ext cx="2487709" cy="293370"/>
+                <a:off x="791718" y="3416300"/>
+                <a:ext cx="2736480" cy="322707"/>
               </a:xfrm>
               <a:prstGeom prst="rect">
                 <a:avLst/>
@@ -4587,7 +4547,7 @@
               <a:p>
                 <a:pPr algn="l"/>
                 <a:r>
-                  <a:rPr lang="en" sz="1500" dirty="0">
+                  <a:rPr lang="en" sz="1650" dirty="0">
                     <a:solidFill>
                       <a:schemeClr val="accent1"/>
                     </a:solidFill>
@@ -4602,14 +4562,14 @@
           </p:sp>
           <p:sp>
             <p:nvSpPr>
-              <p:cNvPr id="11" name="TextBox 11"/>
+              <p:cNvPr id="10" name="TextBox 10"/>
               <p:cNvSpPr txBox="1"/>
               <p:nvPr/>
             </p:nvSpPr>
             <p:spPr>
               <a:xfrm>
-                <a:off x="982980" y="3708400"/>
-                <a:ext cx="2467813" cy="293370"/>
+                <a:off x="982218" y="3683000"/>
+                <a:ext cx="2349894" cy="322707"/>
               </a:xfrm>
               <a:prstGeom prst="rect">
                 <a:avLst/>
@@ -4627,7 +4587,7 @@
               <a:p>
                 <a:pPr algn="l"/>
                 <a:r>
-                  <a:rPr lang="en" sz="1500" dirty="0">
+                  <a:rPr lang="en" sz="1650" dirty="0">
                     <a:solidFill>
                       <a:schemeClr val="accent1"/>
                     </a:solidFill>
@@ -4635,21 +4595,21 @@
                     <a:ea typeface="Consolas"/>
                     <a:cs typeface="Consolas"/>
                   </a:rPr>
-                  <a:t>"updateEvent", 7 args)</a:t>
+                  <a:t>"updateEvent", ...)</a:t>
                 </a:r>
               </a:p>
             </p:txBody>
           </p:sp>
           <p:sp>
             <p:nvSpPr>
-              <p:cNvPr id="12" name="TextBox 12"/>
+              <p:cNvPr id="11" name="TextBox 11"/>
               <p:cNvSpPr txBox="1"/>
               <p:nvPr/>
             </p:nvSpPr>
             <p:spPr>
               <a:xfrm>
-                <a:off x="792480" y="4165600"/>
-                <a:ext cx="2820353" cy="293370"/>
+                <a:off x="791718" y="4140200"/>
+                <a:ext cx="3102388" cy="322707"/>
               </a:xfrm>
               <a:prstGeom prst="rect">
                 <a:avLst/>
@@ -4667,7 +4627,7 @@
               <a:p>
                 <a:pPr algn="l"/>
                 <a:r>
-                  <a:rPr lang="en" sz="1500" dirty="0">
+                  <a:rPr lang="en" sz="1650" dirty="0">
                     <a:solidFill>
                       <a:schemeClr val="accent1"/>
                     </a:solidFill>
@@ -4682,14 +4642,14 @@
           </p:sp>
           <p:sp>
             <p:nvSpPr>
-              <p:cNvPr id="13" name="TextBox 13"/>
+              <p:cNvPr id="12" name="TextBox 12"/>
               <p:cNvSpPr txBox="1"/>
               <p:nvPr/>
             </p:nvSpPr>
             <p:spPr>
               <a:xfrm>
-                <a:off x="982980" y="4432300"/>
-                <a:ext cx="2143784" cy="293370"/>
+                <a:off x="982218" y="4406900"/>
+                <a:ext cx="2358163" cy="322707"/>
               </a:xfrm>
               <a:prstGeom prst="rect">
                 <a:avLst/>
@@ -4707,7 +4667,7 @@
               <a:p>
                 <a:pPr algn="l"/>
                 <a:r>
-                  <a:rPr lang="en" sz="1500" dirty="0">
+                  <a:rPr lang="en" sz="1650" dirty="0">
                     <a:solidFill>
                       <a:schemeClr val="accent1"/>
                     </a:solidFill>
@@ -4721,143 +4681,10 @@
             </p:txBody>
           </p:sp>
         </p:grpSp>
-        <p:sp>
-          <p:nvSpPr>
-            <p:cNvPr id="15" name="Line 15"/>
-            <p:cNvSpPr/>
-            <p:nvPr/>
-          </p:nvSpPr>
-          <p:spPr>
-            <a:xfrm>
-              <a:off x="800100" y="4953000"/>
-              <a:ext cx="2857500" cy="9525"/>
-            </a:xfrm>
-            <a:custGeom>
-              <a:avLst/>
-              <a:gdLst/>
-              <a:ahLst/>
-              <a:cxnLst/>
-              <a:rect l="l" t="t" r="r" b="b"/>
-              <a:pathLst>
-                <a:path w="2857500" h="9525">
-                  <a:moveTo>
-                    <a:pt x="0" y="0"/>
-                  </a:moveTo>
-                  <a:lnTo>
-                    <a:pt x="2857500" y="0"/>
-                  </a:lnTo>
-                </a:path>
-              </a:pathLst>
-            </a:custGeom>
-            <a:noFill/>
-            <a:ln w="9525">
-              <a:solidFill>
-                <a:schemeClr val="accent6"/>
-              </a:solidFill>
-            </a:ln>
-          </p:spPr>
-        </p:sp>
-        <p:sp>
-          <p:nvSpPr>
-            <p:cNvPr id="16" name="TextBox 16"/>
-            <p:cNvSpPr txBox="1"/>
-            <p:nvPr/>
-          </p:nvSpPr>
-          <p:spPr>
-            <a:xfrm>
-              <a:off x="792480" y="5092700"/>
-              <a:ext cx="2595734" cy="826770"/>
-            </a:xfrm>
-            <a:prstGeom prst="rect">
-              <a:avLst/>
-            </a:prstGeom>
-            <a:noFill/>
-            <a:ln>
-              <a:noFill/>
-            </a:ln>
-          </p:spPr>
-          <p:txBody>
-            <a:bodyPr wrap="none" lIns="0" tIns="0" rIns="0" bIns="0" anchor="t" anchorCtr="0">
-              <a:spAutoFit/>
-            </a:bodyPr>
-            <a:lstStyle/>
-            <a:p>
-              <a:pPr algn="l">
-                <a:lnSpc>
-                  <a:spcPts val="2100"/>
-                </a:lnSpc>
-              </a:pPr>
-              <a:r>
-                <a:rPr lang="en" sz="1500" dirty="0">
-                  <a:solidFill>
-                    <a:schemeClr val="dk1"/>
-                  </a:solidFill>
-                  <a:latin typeface="+mn-lt"/>
-                  <a:ea typeface="+mn-ea"/>
-                  <a:cs typeface="+mn-cs"/>
-                </a:rPr>
-                <a:t xml:space="preserve">Winner = </a:t>
-              </a:r>
-              <a:r>
-                <a:rPr lang="en" sz="1500" b="1" dirty="0">
-                  <a:solidFill>
-                    <a:schemeClr val="accent1"/>
-                  </a:solidFill>
-                  <a:latin typeface="Consolas"/>
-                  <a:ea typeface="Consolas"/>
-                  <a:cs typeface="Consolas"/>
-                </a:rPr>
-                <a:t>HighBidUserId</a:t>
-              </a:r>
-              <a:br>
-                <a:rPr lang="en" sz="1500" b="1" dirty="0">
-                  <a:solidFill>
-                    <a:schemeClr val="accent1"/>
-                  </a:solidFill>
-                  <a:latin typeface="Consolas"/>
-                  <a:ea typeface="Consolas"/>
-                  <a:cs typeface="Consolas"/>
-                </a:rPr>
-              </a:br>
-              <a:r>
-                <a:rPr lang="en" sz="1500" dirty="0">
-                  <a:solidFill>
-                    <a:schemeClr val="dk1"/>
-                  </a:solidFill>
-                  <a:latin typeface="+mn-lt"/>
-                  <a:ea typeface="+mn-ea"/>
-                  <a:cs typeface="+mn-cs"/>
-                </a:rPr>
-                <a:t>not the person who clicked:</a:t>
-              </a:r>
-              <a:br>
-                <a:rPr lang="en" sz="1500" dirty="0">
-                  <a:solidFill>
-                    <a:schemeClr val="dk1"/>
-                  </a:solidFill>
-                  <a:latin typeface="+mn-lt"/>
-                  <a:ea typeface="+mn-ea"/>
-                  <a:cs typeface="+mn-cs"/>
-                </a:rPr>
-              </a:br>
-              <a:r>
-                <a:rPr lang="en" sz="1500" dirty="0">
-                  <a:solidFill>
-                    <a:schemeClr val="dk1"/>
-                  </a:solidFill>
-                  <a:latin typeface="+mn-lt"/>
-                  <a:ea typeface="+mn-ea"/>
-                  <a:cs typeface="+mn-cs"/>
-                </a:rPr>
-                <a:t>a rival max bid can win at once</a:t>
-              </a:r>
-            </a:p>
-          </p:txBody>
-        </p:sp>
       </p:grpSp>
       <p:grpSp>
         <p:nvGrpSpPr>
-          <p:cNvPr id="33" name="signalr-fanout"/>
+          <p:cNvPr id="29" name="signalr-fanout"/>
           <p:cNvGrpSpPr/>
           <p:nvPr/>
         </p:nvGrpSpPr>
@@ -4871,7 +4698,7 @@
         </p:grpSpPr>
         <p:sp>
           <p:nvSpPr>
-            <p:cNvPr id="18" name="Line 18"/>
+            <p:cNvPr id="15" name="Line 15"/>
             <p:cNvSpPr/>
             <p:nvPr/>
           </p:nvSpPr>
@@ -4894,7 +4721,7 @@
         </p:sp>
         <p:sp>
           <p:nvSpPr>
-            <p:cNvPr id="19" name="Rectangle 19"/>
+            <p:cNvPr id="16" name="Rectangle 16"/>
             <p:cNvSpPr/>
             <p:nvPr/>
           </p:nvSpPr>
@@ -4923,7 +4750,7 @@
         </p:sp>
         <p:sp>
           <p:nvSpPr>
-            <p:cNvPr id="20" name="TextBox 20"/>
+            <p:cNvPr id="17" name="TextBox 17"/>
             <p:cNvSpPr txBox="1"/>
             <p:nvPr/>
           </p:nvSpPr>
@@ -4963,7 +4790,7 @@
         </p:sp>
         <p:sp>
           <p:nvSpPr>
-            <p:cNvPr id="21" name="Rectangle 21"/>
+            <p:cNvPr id="18" name="Rectangle 18"/>
             <p:cNvSpPr/>
             <p:nvPr/>
           </p:nvSpPr>
@@ -4992,7 +4819,7 @@
         </p:sp>
         <p:sp>
           <p:nvSpPr>
-            <p:cNvPr id="22" name="TextBox 22"/>
+            <p:cNvPr id="19" name="TextBox 19"/>
             <p:cNvSpPr txBox="1"/>
             <p:nvPr/>
           </p:nvSpPr>
@@ -5032,14 +4859,14 @@
         </p:sp>
         <p:sp>
           <p:nvSpPr>
-            <p:cNvPr id="23" name="TextBox 23"/>
+            <p:cNvPr id="20" name="TextBox 20"/>
             <p:cNvSpPr txBox="1"/>
             <p:nvPr/>
           </p:nvSpPr>
           <p:spPr>
             <a:xfrm>
               <a:off x="4469130" y="2838450"/>
-              <a:ext cx="1932527" cy="541020"/>
+              <a:ext cx="2316929" cy="293370"/>
             </a:xfrm>
             <a:prstGeom prst="rect">
               <a:avLst/>
@@ -5055,11 +4882,7 @@
             </a:bodyPr>
             <a:lstStyle/>
             <a:p>
-              <a:pPr algn="l">
-                <a:lnSpc>
-                  <a:spcPts val="1950"/>
-                </a:lnSpc>
-              </a:pPr>
+              <a:pPr algn="l"/>
               <a:r>
                 <a:rPr lang="en" sz="1500" dirty="0">
                   <a:solidFill>
@@ -5069,35 +4892,14 @@
                   <a:ea typeface="+mn-ea"/>
                   <a:cs typeface="+mn-cs"/>
                 </a:rPr>
-                <a:t>serialize once, write to</a:t>
-              </a:r>
-              <a:br>
-                <a:rPr lang="en" sz="1500" dirty="0">
-                  <a:solidFill>
-                    <a:schemeClr val="dk1"/>
-                  </a:solidFill>
-                  <a:latin typeface="+mn-lt"/>
-                  <a:ea typeface="+mn-ea"/>
-                  <a:cs typeface="+mn-cs"/>
-                </a:rPr>
-              </a:br>
-              <a:r>
-                <a:rPr lang="en" sz="1500" dirty="0">
-                  <a:solidFill>
-                    <a:schemeClr val="dk1"/>
-                  </a:solidFill>
-                  <a:latin typeface="+mn-lt"/>
-                  <a:ea typeface="+mn-ea"/>
-                  <a:cs typeface="+mn-cs"/>
-                </a:rPr>
-                <a:t>every open connection</a:t>
+                <a:t>Send to connected clients</a:t>
               </a:r>
             </a:p>
           </p:txBody>
         </p:sp>
         <p:sp>
           <p:nvSpPr>
-            <p:cNvPr id="24" name="Line 24"/>
+            <p:cNvPr id="21" name="Line 21"/>
             <p:cNvSpPr/>
             <p:nvPr/>
           </p:nvSpPr>
@@ -5121,7 +4923,7 @@
         </p:sp>
         <p:sp>
           <p:nvSpPr>
-            <p:cNvPr id="25" name="Rectangle 25"/>
+            <p:cNvPr id="22" name="Rectangle 22"/>
             <p:cNvSpPr/>
             <p:nvPr/>
           </p:nvSpPr>
@@ -5150,7 +4952,7 @@
         </p:sp>
         <p:grpSp>
           <p:nvGrpSpPr>
-            <p:cNvPr id="29" name="Group 29"/>
+            <p:cNvPr id="26" name="Group 26"/>
             <p:cNvGrpSpPr/>
             <p:nvPr/>
           </p:nvGrpSpPr>
@@ -5164,7 +4966,7 @@
           </p:grpSpPr>
           <p:sp>
             <p:nvSpPr>
-              <p:cNvPr id="26" name="Freeform 26"/>
+              <p:cNvPr id="23" name="Freeform 23"/>
               <p:cNvSpPr/>
               <p:nvPr/>
             </p:nvSpPr>
@@ -5217,7 +5019,7 @@
           </p:sp>
           <p:sp>
             <p:nvSpPr>
-              <p:cNvPr id="27" name="Freeform 27"/>
+              <p:cNvPr id="24" name="Freeform 24"/>
               <p:cNvSpPr/>
               <p:nvPr/>
             </p:nvSpPr>
@@ -5266,7 +5068,7 @@
           </p:sp>
           <p:sp>
             <p:nvSpPr>
-              <p:cNvPr id="28" name="Freeform 28"/>
+              <p:cNvPr id="25" name="Freeform 25"/>
               <p:cNvSpPr/>
               <p:nvPr/>
             </p:nvSpPr>
@@ -5316,7 +5118,7 @@
         </p:grpSp>
         <p:sp>
           <p:nvSpPr>
-            <p:cNvPr id="30" name="TextBox 30"/>
+            <p:cNvPr id="27" name="TextBox 27"/>
             <p:cNvSpPr txBox="1"/>
             <p:nvPr/>
           </p:nvSpPr>
@@ -5356,7 +5158,7 @@
         </p:sp>
         <p:sp>
           <p:nvSpPr>
-            <p:cNvPr id="31" name="TextBox 31"/>
+            <p:cNvPr id="28" name="TextBox 28"/>
             <p:cNvSpPr txBox="1"/>
             <p:nvPr/>
           </p:nvSpPr>
@@ -5394,75 +5196,10 @@
             </a:p>
           </p:txBody>
         </p:sp>
-        <p:sp>
-          <p:nvSpPr>
-            <p:cNvPr id="32" name="TextBox 32"/>
-            <p:cNvSpPr txBox="1"/>
-            <p:nvPr/>
-          </p:nvSpPr>
-          <p:spPr>
-            <a:xfrm>
-              <a:off x="4297680" y="5549900"/>
-              <a:ext cx="2146725" cy="560070"/>
-            </a:xfrm>
-            <a:prstGeom prst="rect">
-              <a:avLst/>
-            </a:prstGeom>
-            <a:noFill/>
-            <a:ln>
-              <a:noFill/>
-            </a:ln>
-          </p:spPr>
-          <p:txBody>
-            <a:bodyPr wrap="none" lIns="0" tIns="0" rIns="0" bIns="0" anchor="t" anchorCtr="0">
-              <a:spAutoFit/>
-            </a:bodyPr>
-            <a:lstStyle/>
-            <a:p>
-              <a:pPr algn="l">
-                <a:lnSpc>
-                  <a:spcPts val="2100"/>
-                </a:lnSpc>
-              </a:pPr>
-              <a:r>
-                <a:rPr lang="en" sz="1500" dirty="0">
-                  <a:solidFill>
-                    <a:schemeClr val="accent5"/>
-                  </a:solidFill>
-                  <a:latin typeface="+mn-lt"/>
-                  <a:ea typeface="+mn-ea"/>
-                  <a:cs typeface="+mn-cs"/>
-                </a:rPr>
-                <a:t>Geronimo writes no loop,</a:t>
-              </a:r>
-              <a:br>
-                <a:rPr lang="en" sz="1500" dirty="0">
-                  <a:solidFill>
-                    <a:schemeClr val="accent5"/>
-                  </a:solidFill>
-                  <a:latin typeface="+mn-lt"/>
-                  <a:ea typeface="+mn-ea"/>
-                  <a:cs typeface="+mn-cs"/>
-                </a:rPr>
-              </a:br>
-              <a:r>
-                <a:rPr lang="en" sz="1500" dirty="0">
-                  <a:solidFill>
-                    <a:schemeClr val="accent5"/>
-                  </a:solidFill>
-                  <a:latin typeface="+mn-lt"/>
-                  <a:ea typeface="+mn-ea"/>
-                  <a:cs typeface="+mn-cs"/>
-                </a:rPr>
-                <a:t>no socket list</a:t>
-              </a:r>
-            </a:p>
-          </p:txBody>
-        </p:sp>
       </p:grpSp>
       <p:grpSp>
         <p:nvGrpSpPr>
-          <p:cNvPr id="37" name="edges"/>
+          <p:cNvPr id="33" name="edges"/>
           <p:cNvGrpSpPr/>
           <p:nvPr/>
         </p:nvGrpSpPr>
@@ -5476,7 +5213,7 @@
         </p:grpSpPr>
         <p:sp>
           <p:nvSpPr>
-            <p:cNvPr id="34" name="Line 34"/>
+            <p:cNvPr id="30" name="Line 30"/>
             <p:cNvSpPr/>
             <p:nvPr/>
           </p:nvSpPr>
@@ -5499,7 +5236,7 @@
         </p:sp>
         <p:sp>
           <p:nvSpPr>
-            <p:cNvPr id="35" name="Line 35"/>
+            <p:cNvPr id="31" name="Line 31"/>
             <p:cNvSpPr/>
             <p:nvPr/>
           </p:nvSpPr>
@@ -5522,7 +5259,7 @@
         </p:sp>
         <p:sp>
           <p:nvSpPr>
-            <p:cNvPr id="36" name="Line 36"/>
+            <p:cNvPr id="32" name="Line 32"/>
             <p:cNvSpPr/>
             <p:nvPr/>
           </p:nvSpPr>
@@ -5546,7 +5283,7 @@
       </p:grpSp>
       <p:grpSp>
         <p:nvGrpSpPr>
-          <p:cNvPr id="46" name="browser-anna"/>
+          <p:cNvPr id="41" name="browser-anna"/>
           <p:cNvGrpSpPr/>
           <p:nvPr/>
         </p:nvGrpSpPr>
@@ -5560,7 +5297,7 @@
         </p:grpSpPr>
         <p:sp>
           <p:nvSpPr>
-            <p:cNvPr id="38" name="Rectangle 38"/>
+            <p:cNvPr id="34" name="Rectangle 34"/>
             <p:cNvSpPr/>
             <p:nvPr/>
           </p:nvSpPr>
@@ -5586,7 +5323,7 @@
         </p:sp>
         <p:sp>
           <p:nvSpPr>
-            <p:cNvPr id="39" name="TextBox 39"/>
+            <p:cNvPr id="35" name="TextBox 35"/>
             <p:cNvSpPr txBox="1"/>
             <p:nvPr/>
           </p:nvSpPr>
@@ -5626,7 +5363,7 @@
         </p:sp>
         <p:sp>
           <p:nvSpPr>
-            <p:cNvPr id="40" name="TextBox 40"/>
+            <p:cNvPr id="36" name="TextBox 36"/>
             <p:cNvSpPr txBox="1"/>
             <p:nvPr/>
           </p:nvSpPr>
@@ -5666,28 +5403,28 @@
         </p:sp>
         <p:grpSp>
           <p:nvGrpSpPr>
-            <p:cNvPr id="43" name="Group 43"/>
+            <p:cNvPr id="39" name="Group 39"/>
             <p:cNvGrpSpPr/>
             <p:nvPr/>
           </p:nvGrpSpPr>
           <p:grpSpPr>
             <a:xfrm>
               <a:off x="7802880" y="2393950"/>
-              <a:ext cx="3030874" cy="617220"/>
+              <a:ext cx="3139044" cy="617220"/>
               <a:chOff x="7802880" y="2393950"/>
-              <a:chExt cx="3030874" cy="617220"/>
+              <a:chExt cx="3139044" cy="617220"/>
             </a:xfrm>
           </p:grpSpPr>
           <p:sp>
             <p:nvSpPr>
-              <p:cNvPr id="41" name="TextBox 41"/>
+              <p:cNvPr id="37" name="TextBox 37"/>
               <p:cNvSpPr txBox="1"/>
               <p:nvPr/>
             </p:nvSpPr>
             <p:spPr>
               <a:xfrm>
                 <a:off x="7802880" y="2393950"/>
-                <a:ext cx="2689591" cy="293370"/>
+                <a:ext cx="2466277" cy="293370"/>
               </a:xfrm>
               <a:prstGeom prst="rect">
                 <a:avLst/>
@@ -5713,21 +5450,21 @@
                     <a:ea typeface="Consolas"/>
                     <a:cs typeface="Consolas"/>
                   </a:rPr>
-                  <a:t>on("updateItem") → price</a:t>
+                  <a:t>updateItem → new price</a:t>
                 </a:r>
               </a:p>
             </p:txBody>
           </p:sp>
           <p:sp>
             <p:nvSpPr>
-              <p:cNvPr id="42" name="TextBox 42"/>
+              <p:cNvPr id="38" name="TextBox 38"/>
               <p:cNvSpPr txBox="1"/>
               <p:nvPr/>
             </p:nvSpPr>
             <p:spPr>
               <a:xfrm>
                 <a:off x="7802880" y="2717800"/>
-                <a:ext cx="3030874" cy="293370"/>
+                <a:ext cx="3139044" cy="293370"/>
               </a:xfrm>
               <a:prstGeom prst="rect">
                 <a:avLst/>
@@ -5753,7 +5490,7 @@
                     <a:ea typeface="Consolas"/>
                     <a:cs typeface="Consolas"/>
                   </a:rPr>
-                  <a:t>on("addBidSuccess") → toast</a:t>
+                  <a:t>addBidSuccess → confirmation</a:t>
                 </a:r>
               </a:p>
             </p:txBody>
@@ -5761,14 +5498,14 @@
         </p:grpSp>
         <p:sp>
           <p:nvSpPr>
-            <p:cNvPr id="44" name="TextBox 44"/>
+            <p:cNvPr id="40" name="TextBox 40"/>
             <p:cNvSpPr txBox="1"/>
             <p:nvPr/>
           </p:nvSpPr>
           <p:spPr>
             <a:xfrm>
               <a:off x="7802880" y="3105150"/>
-              <a:ext cx="1727893" cy="293370"/>
+              <a:ext cx="1238900" cy="293370"/>
             </a:xfrm>
             <a:prstGeom prst="rect">
               <a:avLst/>
@@ -5794,55 +5531,15 @@
                   <a:ea typeface="+mn-ea"/>
                   <a:cs typeface="+mn-cs"/>
                 </a:rPr>
-                <a:t>“You’re winning!”</a:t>
+                <a:t>Bid accepted</a:t>
               </a:r>
             </a:p>
           </p:txBody>
         </p:sp>
-        <p:sp>
-          <p:nvSpPr>
-            <p:cNvPr id="45" name="TextBox 45"/>
-            <p:cNvSpPr txBox="1"/>
-            <p:nvPr/>
-          </p:nvSpPr>
-          <p:spPr>
-            <a:xfrm>
-              <a:off x="7802880" y="3505200"/>
-              <a:ext cx="3116345" cy="293370"/>
-            </a:xfrm>
-            <a:prstGeom prst="rect">
-              <a:avLst/>
-            </a:prstGeom>
-            <a:noFill/>
-            <a:ln>
-              <a:noFill/>
-            </a:ln>
-          </p:spPr>
-          <p:txBody>
-            <a:bodyPr wrap="none" lIns="0" tIns="0" rIns="0" bIns="0" anchor="t" anchorCtr="0">
-              <a:spAutoFit/>
-            </a:bodyPr>
-            <a:lstStyle/>
-            <a:p>
-              <a:pPr algn="l"/>
-              <a:r>
-                <a:rPr lang="en" sz="1500" dirty="0">
-                  <a:solidFill>
-                    <a:schemeClr val="accent5"/>
-                  </a:solidFill>
-                  <a:latin typeface="+mn-lt"/>
-                  <a:ea typeface="+mn-ea"/>
-                  <a:cs typeface="+mn-cs"/>
-                </a:rPr>
-                <a:t>updateEvent → no handler, ignored</a:t>
-              </a:r>
-            </a:p>
-          </p:txBody>
-        </p:sp>
       </p:grpSp>
       <p:grpSp>
         <p:nvGrpSpPr>
-          <p:cNvPr id="54" name="browser-ben"/>
+          <p:cNvPr id="47" name="browser-ben"/>
           <p:cNvGrpSpPr/>
           <p:nvPr/>
         </p:nvGrpSpPr>
@@ -5856,7 +5553,7 @@
         </p:grpSpPr>
         <p:sp>
           <p:nvSpPr>
-            <p:cNvPr id="47" name="Rectangle 47"/>
+            <p:cNvPr id="42" name="Rectangle 42"/>
             <p:cNvSpPr/>
             <p:nvPr/>
           </p:nvSpPr>
@@ -5882,7 +5579,7 @@
         </p:sp>
         <p:sp>
           <p:nvSpPr>
-            <p:cNvPr id="48" name="TextBox 48"/>
+            <p:cNvPr id="43" name="TextBox 43"/>
             <p:cNvSpPr txBox="1"/>
             <p:nvPr/>
           </p:nvSpPr>
@@ -5922,7 +5619,7 @@
         </p:sp>
         <p:sp>
           <p:nvSpPr>
-            <p:cNvPr id="49" name="TextBox 49"/>
+            <p:cNvPr id="44" name="TextBox 44"/>
             <p:cNvSpPr txBox="1"/>
             <p:nvPr/>
           </p:nvSpPr>
@@ -5962,14 +5659,14 @@
         </p:sp>
         <p:sp>
           <p:nvSpPr>
-            <p:cNvPr id="50" name="TextBox 50"/>
+            <p:cNvPr id="45" name="TextBox 45"/>
             <p:cNvSpPr txBox="1"/>
             <p:nvPr/>
           </p:nvSpPr>
           <p:spPr>
             <a:xfrm>
               <a:off x="7802880" y="4622800"/>
-              <a:ext cx="2804874" cy="293370"/>
+              <a:ext cx="2466277" cy="293370"/>
             </a:xfrm>
             <a:prstGeom prst="rect">
               <a:avLst/>
@@ -5995,21 +5692,21 @@
                   <a:ea typeface="Consolas"/>
                   <a:cs typeface="Consolas"/>
                 </a:rPr>
-                <a:t>on("updateItem") → $1,300</a:t>
+                <a:t>updateItem → new price</a:t>
               </a:r>
             </a:p>
           </p:txBody>
         </p:sp>
         <p:sp>
           <p:nvSpPr>
-            <p:cNvPr id="51" name="TextBox 51"/>
+            <p:cNvPr id="46" name="TextBox 46"/>
             <p:cNvSpPr txBox="1"/>
             <p:nvPr/>
           </p:nvSpPr>
           <p:spPr>
             <a:xfrm>
               <a:off x="7802880" y="5010150"/>
-              <a:ext cx="2303917" cy="293370"/>
+              <a:ext cx="1691737" cy="293370"/>
             </a:xfrm>
             <a:prstGeom prst="rect">
               <a:avLst/>
@@ -6035,95 +5732,15 @@
                   <a:ea typeface="+mn-ea"/>
                   <a:cs typeface="+mn-cs"/>
                 </a:rPr>
-                <a:t>“You have been outbid”</a:t>
+                <a:t>Price updates live</a:t>
               </a:r>
             </a:p>
           </p:txBody>
         </p:sp>
-        <p:sp>
-          <p:nvSpPr>
-            <p:cNvPr id="52" name="TextBox 52"/>
-            <p:cNvSpPr txBox="1"/>
-            <p:nvPr/>
-          </p:nvSpPr>
-          <p:spPr>
-            <a:xfrm>
-              <a:off x="7802880" y="5410200"/>
-              <a:ext cx="3116345" cy="293370"/>
-            </a:xfrm>
-            <a:prstGeom prst="rect">
-              <a:avLst/>
-            </a:prstGeom>
-            <a:noFill/>
-            <a:ln>
-              <a:noFill/>
-            </a:ln>
-          </p:spPr>
-          <p:txBody>
-            <a:bodyPr wrap="none" lIns="0" tIns="0" rIns="0" bIns="0" anchor="t" anchorCtr="0">
-              <a:spAutoFit/>
-            </a:bodyPr>
-            <a:lstStyle/>
-            <a:p>
-              <a:pPr algn="l"/>
-              <a:r>
-                <a:rPr lang="en" sz="1500" dirty="0">
-                  <a:solidFill>
-                    <a:schemeClr val="accent5"/>
-                  </a:solidFill>
-                  <a:latin typeface="+mn-lt"/>
-                  <a:ea typeface="+mn-ea"/>
-                  <a:cs typeface="+mn-cs"/>
-                </a:rPr>
-                <a:t>updateEvent → no handler, ignored</a:t>
-              </a:r>
-            </a:p>
-          </p:txBody>
-        </p:sp>
-        <p:sp>
-          <p:nvSpPr>
-            <p:cNvPr id="53" name="TextBox 53"/>
-            <p:cNvSpPr txBox="1"/>
-            <p:nvPr/>
-          </p:nvSpPr>
-          <p:spPr>
-            <a:xfrm>
-              <a:off x="7802880" y="5734050"/>
-              <a:ext cx="1624398" cy="293370"/>
-            </a:xfrm>
-            <a:prstGeom prst="rect">
-              <a:avLst/>
-            </a:prstGeom>
-            <a:noFill/>
-            <a:ln>
-              <a:noFill/>
-            </a:ln>
-          </p:spPr>
-          <p:txBody>
-            <a:bodyPr wrap="none" lIns="0" tIns="0" rIns="0" bIns="0" anchor="t" anchorCtr="0">
-              <a:spAutoFit/>
-            </a:bodyPr>
-            <a:lstStyle/>
-            <a:p>
-              <a:pPr algn="l"/>
-              <a:r>
-                <a:rPr lang="en" sz="1500" dirty="0">
-                  <a:solidFill>
-                    <a:schemeClr val="accent5"/>
-                  </a:solidFill>
-                  <a:latin typeface="+mn-lt"/>
-                  <a:ea typeface="+mn-ea"/>
-                  <a:cs typeface="+mn-cs"/>
-                </a:rPr>
-                <a:t>no addBidSuccess</a:t>
-              </a:r>
-            </a:p>
-          </p:txBody>
-        </p:sp>
       </p:grpSp>
       <p:grpSp>
         <p:nvGrpSpPr>
-          <p:cNvPr id="57" name="footer"/>
+          <p:cNvPr id="50" name="footer"/>
           <p:cNvGrpSpPr/>
           <p:nvPr/>
         </p:nvGrpSpPr>
@@ -6137,7 +5754,7 @@
         </p:grpSpPr>
         <p:sp>
           <p:nvSpPr>
-            <p:cNvPr id="55" name="TextBox 55"/>
+            <p:cNvPr id="48" name="TextBox 48"/>
             <p:cNvSpPr txBox="1"/>
             <p:nvPr/>
           </p:nvSpPr>
@@ -6177,7 +5794,7 @@
         </p:sp>
         <p:sp>
           <p:nvSpPr>
-            <p:cNvPr id="56" name="TextBox 56"/>
+            <p:cNvPr id="49" name="TextBox 49"/>
             <p:cNvSpPr txBox="1"/>
             <p:nvPr/>
           </p:nvSpPr>
@@ -6260,10 +5877,10 @@
         </p:nvGrpSpPr>
         <p:grpSpPr>
           <a:xfrm>
-            <a:off x="590550" y="609600"/>
-            <a:ext cx="6930059" cy="1000125"/>
-            <a:chOff x="590550" y="609600"/>
-            <a:chExt cx="6930059" cy="1000125"/>
+            <a:off x="590550" y="571500"/>
+            <a:ext cx="6930059" cy="1038225"/>
+            <a:chOff x="590550" y="571500"/>
+            <a:chExt cx="6930059" cy="1038225"/>
           </a:xfrm>
         </p:grpSpPr>
         <p:sp>
@@ -6274,8 +5891,8 @@
           </p:nvSpPr>
           <p:spPr>
             <a:xfrm>
-              <a:off x="601980" y="609600"/>
-              <a:ext cx="4632787" cy="293370"/>
+              <a:off x="600456" y="571500"/>
+              <a:ext cx="5559344" cy="352044"/>
             </a:xfrm>
             <a:prstGeom prst="rect">
               <a:avLst/>
@@ -6293,7 +5910,7 @@
             <a:p>
               <a:pPr algn="l"/>
               <a:r>
-                <a:rPr lang="en" sz="1500" b="1" dirty="0">
+                <a:rPr lang="en" sz="1800" b="1" dirty="0">
                   <a:solidFill>
                     <a:schemeClr val="accent2"/>
                   </a:solidFill>
@@ -7996,7 +7613,7 @@
           <p:spPr>
             <a:xfrm>
               <a:off x="601218" y="5759450"/>
-              <a:ext cx="6406130" cy="322707"/>
+              <a:ext cx="8089407" cy="322707"/>
             </a:xfrm>
             <a:prstGeom prst="rect">
               <a:avLst/>
@@ -8022,7 +7639,7 @@
                   <a:ea typeface="+mn-ea"/>
                   <a:cs typeface="+mn-cs"/>
                 </a:rPr>
-                <a:t>Same plumbing as a bid — triggered by the server, not by a click.</a:t>
+                <a:t>A background job triggers the update, and SignalR delivers it to connected clients.</a:t>
               </a:r>
             </a:p>
           </p:txBody>
@@ -8167,10 +7784,10 @@
         </p:nvGrpSpPr>
         <p:grpSpPr>
           <a:xfrm>
-            <a:off x="590550" y="609600"/>
-            <a:ext cx="10456163" cy="1000125"/>
-            <a:chOff x="590550" y="609600"/>
-            <a:chExt cx="10456163" cy="1000125"/>
+            <a:off x="590550" y="571500"/>
+            <a:ext cx="8353765" cy="1038225"/>
+            <a:chOff x="590550" y="571500"/>
+            <a:chExt cx="8353765" cy="1038225"/>
           </a:xfrm>
         </p:grpSpPr>
         <p:sp>
@@ -8181,8 +7798,8 @@
           </p:nvSpPr>
           <p:spPr>
             <a:xfrm>
-              <a:off x="601980" y="609600"/>
-              <a:ext cx="2228150" cy="293370"/>
+              <a:off x="600456" y="571500"/>
+              <a:ext cx="3418060" cy="352044"/>
             </a:xfrm>
             <a:prstGeom prst="rect">
               <a:avLst/>
@@ -8200,7 +7817,7 @@
             <a:p>
               <a:pPr algn="l"/>
               <a:r>
-                <a:rPr lang="en" sz="1500" b="1" dirty="0">
+                <a:rPr lang="en" sz="1800" b="1" dirty="0">
                   <a:solidFill>
                     <a:schemeClr val="accent2"/>
                   </a:solidFill>
@@ -8208,7 +7825,7 @@
                   <a:ea typeface="+mn-ea"/>
                   <a:cs typeface="+mn-cs"/>
                 </a:rPr>
-                <a:t>4 · What should we fix?</a:t>
+                <a:t>4 · Best practices: Do &amp; Avoid</a:t>
               </a:r>
             </a:p>
           </p:txBody>
@@ -8222,7 +7839,7 @@
           <p:spPr>
             <a:xfrm>
               <a:off x="590550" y="876300"/>
-              <a:ext cx="10456163" cy="733425"/>
+              <a:ext cx="8353765" cy="733425"/>
             </a:xfrm>
             <a:prstGeom prst="rect">
               <a:avLst/>
@@ -8248,7 +7865,7 @@
                   <a:ea typeface="+mj-ea"/>
                   <a:cs typeface="+mj-cs"/>
                 </a:rPr>
-                <a:t>Two holes: who bids, and what everyone sees</a:t>
+                <a:t>Who chooses the bidder? The client.</a:t>
               </a:r>
             </a:p>
           </p:txBody>
@@ -8256,187 +7873,28 @@
       </p:grpSp>
       <p:grpSp>
         <p:nvGrpSpPr>
-          <p:cNvPr id="30" name="hole-identity"/>
+          <p:cNvPr id="9" name="client"/>
           <p:cNvGrpSpPr/>
           <p:nvPr/>
         </p:nvGrpSpPr>
         <p:grpSpPr>
           <a:xfrm>
-            <a:off x="595122" y="1809750"/>
-            <a:ext cx="5272278" cy="4248150"/>
-            <a:chOff x="595122" y="1809750"/>
-            <a:chExt cx="5272278" cy="4248150"/>
+            <a:off x="594360" y="1949450"/>
+            <a:ext cx="4779311" cy="1942465"/>
+            <a:chOff x="594360" y="1949450"/>
+            <a:chExt cx="4779311" cy="1942465"/>
           </a:xfrm>
         </p:grpSpPr>
-        <p:grpSp>
-          <p:nvGrpSpPr>
-            <p:cNvPr id="8" name="Group 8"/>
-            <p:cNvGrpSpPr/>
-            <p:nvPr/>
-          </p:nvGrpSpPr>
-          <p:grpSpPr>
-            <a:xfrm>
-              <a:off x="627839" y="1835161"/>
-              <a:ext cx="192114" cy="165051"/>
-              <a:chOff x="627839" y="1835161"/>
-              <a:chExt cx="192114" cy="165051"/>
-            </a:xfrm>
-          </p:grpSpPr>
-          <p:sp>
-            <p:nvSpPr>
-              <p:cNvPr id="5" name="Freeform 5"/>
-              <p:cNvSpPr/>
-              <p:nvPr/>
-            </p:nvSpPr>
-            <p:spPr>
-              <a:xfrm>
-                <a:off x="723900" y="1895475"/>
-                <a:ext cx="9525" cy="38100"/>
-              </a:xfrm>
-              <a:custGeom>
-                <a:avLst/>
-                <a:gdLst/>
-                <a:ahLst/>
-                <a:cxnLst/>
-                <a:rect l="l" t="t" r="r" b="b"/>
-                <a:pathLst>
-                  <a:path w="9525" h="38100">
-                    <a:moveTo>
-                      <a:pt x="0" y="0"/>
-                    </a:moveTo>
-                    <a:lnTo>
-                      <a:pt x="0" y="38100"/>
-                    </a:lnTo>
-                  </a:path>
-                </a:pathLst>
-              </a:custGeom>
-              <a:noFill/>
-              <a:ln w="19050">
-                <a:solidFill>
-                  <a:srgbClr val="B36A13"/>
-                </a:solidFill>
-              </a:ln>
-            </p:spPr>
-          </p:sp>
-          <p:sp>
-            <p:nvSpPr>
-              <p:cNvPr id="6" name="Freeform 6"/>
-              <p:cNvSpPr/>
-              <p:nvPr/>
-            </p:nvSpPr>
-            <p:spPr>
-              <a:xfrm>
-                <a:off x="627839" y="1835161"/>
-                <a:ext cx="192114" cy="165051"/>
-              </a:xfrm>
-              <a:custGeom>
-                <a:avLst/>
-                <a:gdLst/>
-                <a:ahLst/>
-                <a:cxnLst/>
-                <a:rect l="l" t="t" r="r" b="b"/>
-                <a:pathLst>
-                  <a:path w="192114" h="165051">
-                    <a:moveTo>
-                      <a:pt x="80468" y="8794"/>
-                    </a:moveTo>
-                    <a:lnTo>
-                      <a:pt x="3259" y="137705"/>
-                    </a:lnTo>
-                    <a:cubicBezTo>
-                      <a:pt x="20" y="143314"/>
-                      <a:pt x="0" y="150220"/>
-                      <a:pt x="3207" y="155848"/>
-                    </a:cubicBezTo>
-                    <a:cubicBezTo>
-                      <a:pt x="6413" y="161475"/>
-                      <a:pt x="12365" y="164979"/>
-                      <a:pt x="18842" y="165051"/>
-                    </a:cubicBezTo>
-                    <a:lnTo>
-                      <a:pt x="173280" y="165051"/>
-                    </a:lnTo>
-                    <a:cubicBezTo>
-                      <a:pt x="179753" y="164977"/>
-                      <a:pt x="185702" y="161474"/>
-                      <a:pt x="188908" y="155850"/>
-                    </a:cubicBezTo>
-                    <a:cubicBezTo>
-                      <a:pt x="192114" y="150226"/>
-                      <a:pt x="192097" y="143323"/>
-                      <a:pt x="188863" y="137715"/>
-                    </a:cubicBezTo>
-                    <a:lnTo>
-                      <a:pt x="111653" y="8784"/>
-                    </a:lnTo>
-                    <a:cubicBezTo>
-                      <a:pt x="108349" y="3331"/>
-                      <a:pt x="102437" y="0"/>
-                      <a:pt x="96061" y="0"/>
-                    </a:cubicBezTo>
-                    <a:cubicBezTo>
-                      <a:pt x="89685" y="0"/>
-                      <a:pt x="83772" y="3331"/>
-                      <a:pt x="80468" y="8784"/>
-                    </a:cubicBezTo>
-                  </a:path>
-                </a:pathLst>
-              </a:custGeom>
-              <a:noFill/>
-              <a:ln w="19050">
-                <a:solidFill>
-                  <a:srgbClr val="B36A13"/>
-                </a:solidFill>
-              </a:ln>
-            </p:spPr>
-          </p:sp>
-          <p:sp>
-            <p:nvSpPr>
-              <p:cNvPr id="7" name="Freeform 7"/>
-              <p:cNvSpPr/>
-              <p:nvPr/>
-            </p:nvSpPr>
-            <p:spPr>
-              <a:xfrm>
-                <a:off x="723900" y="1962150"/>
-                <a:ext cx="9525" cy="9525"/>
-              </a:xfrm>
-              <a:custGeom>
-                <a:avLst/>
-                <a:gdLst/>
-                <a:ahLst/>
-                <a:cxnLst/>
-                <a:rect l="l" t="t" r="r" b="b"/>
-                <a:pathLst>
-                  <a:path w="9525" h="9525">
-                    <a:moveTo>
-                      <a:pt x="0" y="0"/>
-                    </a:moveTo>
-                    <a:lnTo>
-                      <a:pt x="95" y="0"/>
-                    </a:lnTo>
-                  </a:path>
-                </a:pathLst>
-              </a:custGeom>
-              <a:noFill/>
-              <a:ln w="19050">
-                <a:solidFill>
-                  <a:srgbClr val="B36A13"/>
-                </a:solidFill>
-              </a:ln>
-            </p:spPr>
-          </p:sp>
-        </p:grpSp>
-        <p:sp>
-          <p:nvSpPr>
-            <p:cNvPr id="9" name="TextBox 9"/>
+        <p:sp>
+          <p:nvSpPr>
+            <p:cNvPr id="5" name="TextBox 5"/>
             <p:cNvSpPr txBox="1"/>
             <p:nvPr/>
           </p:nvSpPr>
           <p:spPr>
             <a:xfrm>
-              <a:off x="906780" y="1809750"/>
-              <a:ext cx="1753548" cy="293370"/>
+              <a:off x="599694" y="1949450"/>
+              <a:ext cx="3032694" cy="381381"/>
             </a:xfrm>
             <a:prstGeom prst="rect">
               <a:avLst/>
@@ -8454,29 +7912,29 @@
             <a:p>
               <a:pPr algn="l"/>
               <a:r>
-                <a:rPr lang="en" sz="1500" b="1" dirty="0">
-                  <a:solidFill>
-                    <a:srgbClr val="B36A13"/>
+                <a:rPr lang="en" sz="1950" b="1" dirty="0">
+                  <a:solidFill>
+                    <a:schemeClr val="accent2"/>
                   </a:solidFill>
                   <a:latin typeface="+mn-lt"/>
                   <a:ea typeface="+mn-ea"/>
                   <a:cs typeface="+mn-cs"/>
                 </a:rPr>
-                <a:t>Hole 1 · who bids?</a:t>
+                <a:t>ANNA SENDS BEN’S ID</a:t>
               </a:r>
             </a:p>
           </p:txBody>
         </p:sp>
         <p:sp>
           <p:nvSpPr>
-            <p:cNvPr id="10" name="TextBox 10"/>
+            <p:cNvPr id="6" name="TextBox 6"/>
             <p:cNvSpPr txBox="1"/>
             <p:nvPr/>
           </p:nvSpPr>
           <p:spPr>
             <a:xfrm>
-              <a:off x="595122" y="2063750"/>
-              <a:ext cx="4151508" cy="557403"/>
+              <a:off x="599313" y="2463800"/>
+              <a:ext cx="3643945" cy="396050"/>
             </a:xfrm>
             <a:prstGeom prst="rect">
               <a:avLst/>
@@ -8494,208 +7952,29 @@
             <a:p>
               <a:pPr algn="l"/>
               <a:r>
-                <a:rPr lang="en" sz="2850" dirty="0">
+                <a:rPr lang="en" sz="2020" dirty="0">
                   <a:solidFill>
                     <a:schemeClr val="accent1"/>
                   </a:solidFill>
-                  <a:latin typeface="+mj-lt"/>
-                  <a:ea typeface="+mj-ea"/>
-                  <a:cs typeface="+mj-cs"/>
-                </a:rPr>
-                <a:t>Client-supplied identity</a:t>
+                  <a:latin typeface="Consolas"/>
+                  <a:ea typeface="Consolas"/>
+                  <a:cs typeface="Consolas"/>
+                </a:rPr>
+                <a:t>invoke("AddBid", itemId,</a:t>
               </a:r>
             </a:p>
           </p:txBody>
         </p:sp>
         <p:sp>
           <p:nvSpPr>
-            <p:cNvPr id="11" name="Rectangle 11"/>
-            <p:cNvSpPr/>
-            <p:nvPr/>
-          </p:nvSpPr>
-          <p:spPr>
-            <a:xfrm>
-              <a:off x="609600" y="2609850"/>
-              <a:ext cx="5257800" cy="990600"/>
-            </a:xfrm>
-            <a:prstGeom prst="roundRect">
-              <a:avLst>
-                <a:gd name="adj" fmla="val 3846"/>
-              </a:avLst>
-            </a:prstGeom>
-            <a:solidFill>
-              <a:schemeClr val="accent1"/>
-            </a:solidFill>
-            <a:ln>
-              <a:noFill/>
-            </a:ln>
-          </p:spPr>
-        </p:sp>
-        <p:grpSp>
-          <p:nvGrpSpPr>
-            <p:cNvPr id="15" name="Group 15"/>
-            <p:cNvGrpSpPr/>
-            <p:nvPr/>
-          </p:nvGrpSpPr>
-          <p:grpSpPr>
-            <a:xfrm>
-              <a:off x="785812" y="2717800"/>
-              <a:ext cx="142875" cy="127000"/>
-              <a:chOff x="785812" y="2717800"/>
-              <a:chExt cx="142875" cy="127000"/>
-            </a:xfrm>
-          </p:grpSpPr>
-          <p:sp>
-            <p:nvSpPr>
-              <p:cNvPr id="12" name="Freeform 12"/>
-              <p:cNvSpPr/>
-              <p:nvPr/>
-            </p:nvSpPr>
-            <p:spPr>
-              <a:xfrm>
-                <a:off x="825500" y="2757487"/>
-                <a:ext cx="23812" cy="47625"/>
-              </a:xfrm>
-              <a:custGeom>
-                <a:avLst/>
-                <a:gdLst/>
-                <a:ahLst/>
-                <a:cxnLst/>
-                <a:rect l="l" t="t" r="r" b="b"/>
-                <a:pathLst>
-                  <a:path w="23812" h="47625">
-                    <a:moveTo>
-                      <a:pt x="0" y="0"/>
-                    </a:moveTo>
-                    <a:lnTo>
-                      <a:pt x="23812" y="23812"/>
-                    </a:lnTo>
-                    <a:lnTo>
-                      <a:pt x="0" y="47625"/>
-                    </a:lnTo>
-                  </a:path>
-                </a:pathLst>
-              </a:custGeom>
-              <a:noFill/>
-              <a:ln w="15875">
-                <a:solidFill>
-                  <a:srgbClr val="E8F4F8"/>
-                </a:solidFill>
-              </a:ln>
-            </p:spPr>
-          </p:sp>
-          <p:sp>
-            <p:nvSpPr>
-              <p:cNvPr id="13" name="Freeform 13"/>
-              <p:cNvSpPr/>
-              <p:nvPr/>
-            </p:nvSpPr>
-            <p:spPr>
-              <a:xfrm>
-                <a:off x="865187" y="2805112"/>
-                <a:ext cx="23812" cy="9525"/>
-              </a:xfrm>
-              <a:custGeom>
-                <a:avLst/>
-                <a:gdLst/>
-                <a:ahLst/>
-                <a:cxnLst/>
-                <a:rect l="l" t="t" r="r" b="b"/>
-                <a:pathLst>
-                  <a:path w="23812" h="9525">
-                    <a:moveTo>
-                      <a:pt x="0" y="0"/>
-                    </a:moveTo>
-                    <a:lnTo>
-                      <a:pt x="23812" y="0"/>
-                    </a:lnTo>
-                  </a:path>
-                </a:pathLst>
-              </a:custGeom>
-              <a:noFill/>
-              <a:ln w="15875">
-                <a:solidFill>
-                  <a:srgbClr val="E8F4F8"/>
-                </a:solidFill>
-              </a:ln>
-            </p:spPr>
-          </p:sp>
-          <p:sp>
-            <p:nvSpPr>
-              <p:cNvPr id="14" name="Freeform 14"/>
-              <p:cNvSpPr/>
-              <p:nvPr/>
-            </p:nvSpPr>
-            <p:spPr>
-              <a:xfrm>
-                <a:off x="785812" y="2717800"/>
-                <a:ext cx="142875" cy="127000"/>
-              </a:xfrm>
-              <a:custGeom>
-                <a:avLst/>
-                <a:gdLst/>
-                <a:ahLst/>
-                <a:cxnLst/>
-                <a:rect l="l" t="t" r="r" b="b"/>
-                <a:pathLst>
-                  <a:path w="142875" h="127000">
-                    <a:moveTo>
-                      <a:pt x="0" y="15875"/>
-                    </a:moveTo>
-                    <a:cubicBezTo>
-                      <a:pt x="0" y="7107"/>
-                      <a:pt x="7107" y="0"/>
-                      <a:pt x="15875" y="0"/>
-                    </a:cubicBezTo>
-                    <a:lnTo>
-                      <a:pt x="127000" y="0"/>
-                    </a:lnTo>
-                    <a:cubicBezTo>
-                      <a:pt x="135767" y="0"/>
-                      <a:pt x="142875" y="7107"/>
-                      <a:pt x="142875" y="15875"/>
-                    </a:cubicBezTo>
-                    <a:lnTo>
-                      <a:pt x="142875" y="111125"/>
-                    </a:lnTo>
-                    <a:cubicBezTo>
-                      <a:pt x="142875" y="119892"/>
-                      <a:pt x="135767" y="127000"/>
-                      <a:pt x="127000" y="127000"/>
-                    </a:cubicBezTo>
-                    <a:lnTo>
-                      <a:pt x="15875" y="127000"/>
-                    </a:lnTo>
-                    <a:cubicBezTo>
-                      <a:pt x="7107" y="127000"/>
-                      <a:pt x="0" y="119892"/>
-                      <a:pt x="0" y="111125"/>
-                    </a:cubicBezTo>
-                    <a:lnTo>
-                      <a:pt x="0" y="15875"/>
-                    </a:lnTo>
-                  </a:path>
-                </a:pathLst>
-              </a:custGeom>
-              <a:noFill/>
-              <a:ln w="15875">
-                <a:solidFill>
-                  <a:srgbClr val="E8F4F8"/>
-                </a:solidFill>
-              </a:ln>
-            </p:spPr>
-          </p:sp>
-        </p:grpSp>
-        <p:sp>
-          <p:nvSpPr>
-            <p:cNvPr id="16" name="TextBox 16"/>
+            <p:cNvPr id="7" name="TextBox 7"/>
             <p:cNvSpPr txBox="1"/>
             <p:nvPr/>
           </p:nvSpPr>
           <p:spPr>
             <a:xfrm>
-              <a:off x="1022604" y="2686050"/>
-              <a:ext cx="1380652" cy="234696"/>
+              <a:off x="594360" y="2863850"/>
+              <a:ext cx="3901343" cy="586740"/>
             </a:xfrm>
             <a:prstGeom prst="rect">
               <a:avLst/>
@@ -8713,135 +7992,40 @@
             <a:p>
               <a:pPr algn="l"/>
               <a:r>
-                <a:rPr lang="en" sz="1200" dirty="0">
-                  <a:solidFill>
-                    <a:srgbClr val="E8F4F8"/>
-                  </a:solidFill>
-                  <a:latin typeface="+mn-lt"/>
-                  <a:ea typeface="+mn-ea"/>
-                  <a:cs typeface="+mn-cs"/>
-                </a:rPr>
-                <a:t>DevTools · Console</a:t>
+                <a:rPr lang="en" sz="3000" b="1" dirty="0">
+                  <a:solidFill>
+                    <a:srgbClr val="B36A13"/>
+                  </a:solidFill>
+                  <a:latin typeface="Consolas"/>
+                  <a:ea typeface="Consolas"/>
+                  <a:cs typeface="Consolas"/>
+                </a:rPr>
+                <a:t>"ben-id"</a:t>
+              </a:r>
+              <a:r>
+                <a:rPr lang="en" sz="2020" dirty="0">
+                  <a:solidFill>
+                    <a:schemeClr val="accent1"/>
+                  </a:solidFill>
+                  <a:latin typeface="Consolas"/>
+                  <a:ea typeface="Consolas"/>
+                  <a:cs typeface="Consolas"/>
+                </a:rPr>
+                <a:t>, amount, ...)</a:t>
               </a:r>
             </a:p>
           </p:txBody>
         </p:sp>
-        <p:grpSp>
-          <p:nvGrpSpPr>
-            <p:cNvPr id="19" name="Group 19"/>
-            <p:cNvGrpSpPr/>
-            <p:nvPr/>
-          </p:nvGrpSpPr>
-          <p:grpSpPr>
-            <a:xfrm>
-              <a:off x="754380" y="3003550"/>
-              <a:ext cx="3922395" cy="560070"/>
-              <a:chOff x="754380" y="3003550"/>
-              <a:chExt cx="3922395" cy="560070"/>
-            </a:xfrm>
-          </p:grpSpPr>
-          <p:sp>
-            <p:nvSpPr>
-              <p:cNvPr id="17" name="TextBox 17"/>
-              <p:cNvSpPr txBox="1"/>
-              <p:nvPr/>
-            </p:nvSpPr>
-            <p:spPr>
-              <a:xfrm>
-                <a:off x="754380" y="3003550"/>
-                <a:ext cx="3922395" cy="293370"/>
-              </a:xfrm>
-              <a:prstGeom prst="rect">
-                <a:avLst/>
-              </a:prstGeom>
-              <a:noFill/>
-              <a:ln>
-                <a:noFill/>
-              </a:ln>
-            </p:spPr>
-            <p:txBody>
-              <a:bodyPr wrap="none" lIns="0" tIns="0" rIns="0" bIns="0" anchor="t" anchorCtr="0">
-                <a:spAutoFit/>
-              </a:bodyPr>
-              <a:lstStyle/>
-              <a:p>
-                <a:pPr algn="l"/>
-                <a:r>
-                  <a:rPr lang="en" sz="1500" dirty="0">
-                    <a:solidFill>
-                      <a:srgbClr val="E8F4F8"/>
-                    </a:solidFill>
-                    <a:latin typeface="Consolas"/>
-                    <a:ea typeface="Consolas"/>
-                    <a:cs typeface="Consolas"/>
-                  </a:rPr>
-                  <a:t>&gt; connection.invoke("AddBid", 1042,</a:t>
-                </a:r>
-              </a:p>
-            </p:txBody>
-          </p:sp>
-          <p:sp>
-            <p:nvSpPr>
-              <p:cNvPr id="18" name="TextBox 18"/>
-              <p:cNvSpPr txBox="1"/>
-              <p:nvPr/>
-            </p:nvSpPr>
-            <p:spPr>
-              <a:xfrm>
-                <a:off x="754380" y="3270250"/>
-                <a:ext cx="3791331" cy="293370"/>
-              </a:xfrm>
-              <a:prstGeom prst="rect">
-                <a:avLst/>
-              </a:prstGeom>
-              <a:noFill/>
-              <a:ln>
-                <a:noFill/>
-              </a:ln>
-            </p:spPr>
-            <p:txBody>
-              <a:bodyPr wrap="none" lIns="0" tIns="0" rIns="0" bIns="0" anchor="t" anchorCtr="0">
-                <a:spAutoFit/>
-              </a:bodyPr>
-              <a:lstStyle/>
-              <a:p>
-                <a:pPr algn="l"/>
-                <a:r>
-                  <a:rPr lang="en" sz="1500" b="1" dirty="0">
-                    <a:solidFill>
-                      <a:srgbClr val="F6C177"/>
-                    </a:solidFill>
-                    <a:latin typeface="Consolas"/>
-                    <a:ea typeface="Consolas"/>
-                    <a:cs typeface="Consolas"/>
-                  </a:rPr>
-                  <a:t>"&lt;victim id&gt;"</a:t>
-                </a:r>
-                <a:r>
-                  <a:rPr lang="en" sz="1500" dirty="0">
-                    <a:solidFill>
-                      <a:srgbClr val="E8F4F8"/>
-                    </a:solidFill>
-                    <a:latin typeface="Consolas"/>
-                    <a:ea typeface="Consolas"/>
-                    <a:cs typeface="Consolas"/>
-                  </a:rPr>
-                  <a:t>, 1300, false, false)</a:t>
-                </a:r>
-              </a:p>
-            </p:txBody>
-          </p:sp>
-        </p:grpSp>
-        <p:sp>
-          <p:nvSpPr>
-            <p:cNvPr id="20" name="TextBox 20"/>
+        <p:sp>
+          <p:nvSpPr>
+            <p:cNvPr id="8" name="TextBox 8"/>
             <p:cNvSpPr txBox="1"/>
             <p:nvPr/>
           </p:nvSpPr>
           <p:spPr>
             <a:xfrm>
-              <a:off x="601218" y="3721100"/>
-              <a:ext cx="3913068" cy="322707"/>
+              <a:off x="600075" y="3524250"/>
+              <a:ext cx="4773596" cy="367665"/>
             </a:xfrm>
             <a:prstGeom prst="rect">
               <a:avLst/>
@@ -8859,244 +8043,84 @@
             <a:p>
               <a:pPr algn="l"/>
               <a:r>
-                <a:rPr lang="en" sz="1650" b="1" dirty="0">
-                  <a:solidFill>
-                    <a:srgbClr val="B36A13"/>
+                <a:rPr lang="en" sz="1880" dirty="0">
+                  <a:solidFill>
+                    <a:schemeClr val="dk1"/>
                   </a:solidFill>
                   <a:latin typeface="+mn-lt"/>
                   <a:ea typeface="+mn-ea"/>
                   <a:cs typeface="+mn-cs"/>
                 </a:rPr>
-                <a:t>→ a bid saved in someone else’s name</a:t>
+                <a:t>The argument says Ben. The caller is Anna.</a:t>
               </a:r>
             </a:p>
           </p:txBody>
         </p:sp>
-        <p:grpSp>
-          <p:nvGrpSpPr>
-            <p:cNvPr id="24" name="Group 24"/>
-            <p:cNvGrpSpPr/>
-            <p:nvPr/>
-          </p:nvGrpSpPr>
-          <p:grpSpPr>
-            <a:xfrm>
-              <a:off x="601980" y="4127500"/>
-              <a:ext cx="3841220" cy="852170"/>
-              <a:chOff x="601980" y="4127500"/>
-              <a:chExt cx="3841220" cy="852170"/>
-            </a:xfrm>
-          </p:grpSpPr>
-          <p:sp>
-            <p:nvSpPr>
-              <p:cNvPr id="21" name="TextBox 21"/>
-              <p:cNvSpPr txBox="1"/>
-              <p:nvPr/>
-            </p:nvSpPr>
-            <p:spPr>
-              <a:xfrm>
-                <a:off x="601980" y="4127500"/>
-                <a:ext cx="3427743" cy="293370"/>
-              </a:xfrm>
-              <a:prstGeom prst="rect">
-                <a:avLst/>
-              </a:prstGeom>
-              <a:noFill/>
-              <a:ln>
-                <a:noFill/>
-              </a:ln>
-            </p:spPr>
-            <p:txBody>
-              <a:bodyPr wrap="none" lIns="0" tIns="0" rIns="0" bIns="0" anchor="t" anchorCtr="0">
-                <a:spAutoFit/>
-              </a:bodyPr>
-              <a:lstStyle/>
-              <a:p>
-                <a:pPr algn="l" marL="129559" indent="-129559">
-                  <a:buClr>
-                    <a:schemeClr val="dk1"/>
-                  </a:buClr>
-                  <a:buSzTx/>
-                  <a:buFontTx/>
-                  <a:buChar char="•"/>
-                </a:pPr>
-                <a:r>
-                  <a:rPr lang="en" sz="1500" dirty="0">
-                    <a:solidFill>
-                      <a:schemeClr val="dk1"/>
-                    </a:solidFill>
-                    <a:latin typeface="Consolas"/>
-                    <a:ea typeface="Consolas"/>
-                    <a:cs typeface="Consolas"/>
-                  </a:rPr>
-                  <a:t>bidderId</a:t>
-                </a:r>
-                <a:r>
-                  <a:rPr lang="en" sz="1500" dirty="0">
-                    <a:solidFill>
-                      <a:schemeClr val="dk1"/>
-                    </a:solidFill>
-                    <a:latin typeface="+mn-lt"/>
-                    <a:ea typeface="+mn-ea"/>
-                    <a:cs typeface="+mn-cs"/>
-                  </a:rPr>
-                  <a:t xml:space="preserve"> comes from a hidden field</a:t>
-                </a:r>
-              </a:p>
-            </p:txBody>
-          </p:sp>
-          <p:sp>
-            <p:nvSpPr>
-              <p:cNvPr id="22" name="TextBox 22"/>
-              <p:cNvSpPr txBox="1"/>
-              <p:nvPr/>
-            </p:nvSpPr>
-            <p:spPr>
-              <a:xfrm>
-                <a:off x="601980" y="4413250"/>
-                <a:ext cx="2696134" cy="293370"/>
-              </a:xfrm>
-              <a:prstGeom prst="rect">
-                <a:avLst/>
-              </a:prstGeom>
-              <a:noFill/>
-              <a:ln>
-                <a:noFill/>
-              </a:ln>
-            </p:spPr>
-            <p:txBody>
-              <a:bodyPr wrap="none" lIns="0" tIns="0" rIns="0" bIns="0" anchor="t" anchorCtr="0">
-                <a:spAutoFit/>
-              </a:bodyPr>
-              <a:lstStyle/>
-              <a:p>
-                <a:pPr algn="l" marL="129559" indent="-129559">
-                  <a:buClr>
-                    <a:schemeClr val="dk1"/>
-                  </a:buClr>
-                  <a:buSzTx/>
-                  <a:buFontTx/>
-                  <a:buChar char="•"/>
-                </a:pPr>
-                <a:r>
-                  <a:rPr lang="en" sz="1500" dirty="0">
-                    <a:solidFill>
-                      <a:schemeClr val="dk1"/>
-                    </a:solidFill>
-                    <a:latin typeface="+mn-lt"/>
-                    <a:ea typeface="+mn-ea"/>
-                    <a:cs typeface="+mn-cs"/>
-                  </a:rPr>
-                  <a:t xml:space="preserve">no </a:t>
-                </a:r>
-                <a:r>
-                  <a:rPr lang="en" sz="1500" dirty="0">
-                    <a:solidFill>
-                      <a:schemeClr val="dk1"/>
-                    </a:solidFill>
-                    <a:latin typeface="Consolas"/>
-                    <a:ea typeface="Consolas"/>
-                    <a:cs typeface="Consolas"/>
-                  </a:rPr>
-                  <a:t>[Authorize]</a:t>
-                </a:r>
-                <a:r>
-                  <a:rPr lang="en" sz="1500" dirty="0">
-                    <a:solidFill>
-                      <a:schemeClr val="dk1"/>
-                    </a:solidFill>
-                    <a:latin typeface="+mn-lt"/>
-                    <a:ea typeface="+mn-ea"/>
-                    <a:cs typeface="+mn-cs"/>
-                  </a:rPr>
-                  <a:t xml:space="preserve"> on the hub</a:t>
-                </a:r>
-              </a:p>
-            </p:txBody>
-          </p:sp>
-          <p:sp>
-            <p:nvSpPr>
-              <p:cNvPr id="23" name="TextBox 23"/>
-              <p:cNvSpPr txBox="1"/>
-              <p:nvPr/>
-            </p:nvSpPr>
-            <p:spPr>
-              <a:xfrm>
-                <a:off x="601980" y="4686300"/>
-                <a:ext cx="3841220" cy="293370"/>
-              </a:xfrm>
-              <a:prstGeom prst="rect">
-                <a:avLst/>
-              </a:prstGeom>
-              <a:noFill/>
-              <a:ln>
-                <a:noFill/>
-              </a:ln>
-            </p:spPr>
-            <p:txBody>
-              <a:bodyPr wrap="none" lIns="0" tIns="0" rIns="0" bIns="0" anchor="t" anchorCtr="0">
-                <a:spAutoFit/>
-              </a:bodyPr>
-              <a:lstStyle/>
-              <a:p>
-                <a:pPr algn="l" marL="129559" indent="-129559">
-                  <a:buClr>
-                    <a:schemeClr val="dk1"/>
-                  </a:buClr>
-                  <a:buSzTx/>
-                  <a:buFontTx/>
-                  <a:buChar char="•"/>
-                </a:pPr>
-                <a:r>
-                  <a:rPr lang="en" sz="1500" dirty="0">
-                    <a:solidFill>
-                      <a:schemeClr val="dk1"/>
-                    </a:solidFill>
-                    <a:latin typeface="+mn-lt"/>
-                    <a:ea typeface="+mn-ea"/>
-                    <a:cs typeface="+mn-cs"/>
-                  </a:rPr>
-                  <a:t>user ids already ride on every updateItem</a:t>
-                </a:r>
-              </a:p>
-            </p:txBody>
-          </p:sp>
-        </p:grpSp>
-        <p:sp>
-          <p:nvSpPr>
-            <p:cNvPr id="25" name="Rectangle 25"/>
-            <p:cNvSpPr/>
-            <p:nvPr/>
-          </p:nvSpPr>
-          <p:spPr>
-            <a:xfrm>
-              <a:off x="609600" y="5143500"/>
-              <a:ext cx="5257800" cy="914400"/>
-            </a:xfrm>
-            <a:prstGeom prst="roundRect">
-              <a:avLst>
-                <a:gd name="adj" fmla="val 4167"/>
-              </a:avLst>
-            </a:prstGeom>
-            <a:solidFill>
-              <a:schemeClr val="lt2"/>
-            </a:solidFill>
-            <a:ln w="19050">
-              <a:solidFill>
-                <a:schemeClr val="accent2"/>
-              </a:solidFill>
-            </a:ln>
-          </p:spPr>
-        </p:sp>
-        <p:sp>
-          <p:nvSpPr>
-            <p:cNvPr id="26" name="TextBox 26"/>
+      </p:grpSp>
+      <p:sp>
+        <p:nvSpPr>
+          <p:cNvPr id="10" name="TextBox 10"/>
+          <p:cNvSpPr txBox="1"/>
+          <p:nvPr/>
+        </p:nvSpPr>
+        <p:spPr>
+          <a:xfrm>
+            <a:off x="5793486" y="2584450"/>
+            <a:ext cx="277863" cy="645414"/>
+          </a:xfrm>
+          <a:prstGeom prst="rect">
+            <a:avLst/>
+          </a:prstGeom>
+          <a:noFill/>
+          <a:ln>
+            <a:noFill/>
+          </a:ln>
+        </p:spPr>
+        <p:txBody>
+          <a:bodyPr wrap="none" lIns="0" tIns="0" rIns="0" bIns="0" anchor="t" anchorCtr="0">
+            <a:spAutoFit/>
+          </a:bodyPr>
+          <a:lstStyle/>
+          <a:p>
+            <a:pPr algn="l"/>
+            <a:r>
+              <a:rPr lang="en" sz="3300" dirty="0">
+                <a:solidFill>
+                  <a:schemeClr val="accent5"/>
+                </a:solidFill>
+                <a:latin typeface="+mn-lt"/>
+                <a:ea typeface="+mn-ea"/>
+                <a:cs typeface="+mn-cs"/>
+              </a:rPr>
+              <a:t>→</a:t>
+            </a:r>
+          </a:p>
+        </p:txBody>
+      </p:sp>
+      <p:grpSp>
+        <p:nvGrpSpPr>
+          <p:cNvPr id="16" name="server"/>
+          <p:cNvGrpSpPr/>
+          <p:nvPr/>
+        </p:nvGrpSpPr>
+        <p:grpSpPr>
+          <a:xfrm>
+            <a:off x="6694170" y="1949450"/>
+            <a:ext cx="4123330" cy="2173605"/>
+            <a:chOff x="6694170" y="1949450"/>
+            <a:chExt cx="4123330" cy="2173605"/>
+          </a:xfrm>
+        </p:grpSpPr>
+        <p:sp>
+          <p:nvSpPr>
+            <p:cNvPr id="11" name="TextBox 11"/>
             <p:cNvSpPr txBox="1"/>
             <p:nvPr/>
           </p:nvSpPr>
           <p:spPr>
             <a:xfrm>
-              <a:off x="792480" y="5257800"/>
-              <a:ext cx="294326" cy="293370"/>
+              <a:off x="6695694" y="1949450"/>
+              <a:ext cx="2931261" cy="381381"/>
             </a:xfrm>
             <a:prstGeom prst="rect">
               <a:avLst/>
@@ -9114,7 +8138,7 @@
             <a:p>
               <a:pPr algn="l"/>
               <a:r>
-                <a:rPr lang="en" sz="1500" b="1" dirty="0">
+                <a:rPr lang="en" sz="1950" b="1" dirty="0">
                   <a:solidFill>
                     <a:schemeClr val="accent2"/>
                   </a:solidFill>
@@ -9122,288 +8146,21 @@
                   <a:ea typeface="+mn-ea"/>
                   <a:cs typeface="+mn-cs"/>
                 </a:rPr>
-                <a:t>Fix</a:t>
+                <a:t>SERVER USES THAT ID</a:t>
               </a:r>
             </a:p>
           </p:txBody>
         </p:sp>
-        <p:grpSp>
-          <p:nvGrpSpPr>
-            <p:cNvPr id="29" name="Group 29"/>
-            <p:cNvGrpSpPr/>
-            <p:nvPr/>
-          </p:nvGrpSpPr>
-          <p:grpSpPr>
-            <a:xfrm>
-              <a:off x="1325880" y="5270500"/>
-              <a:ext cx="3708884" cy="598170"/>
-              <a:chOff x="1325880" y="5270500"/>
-              <a:chExt cx="3708884" cy="598170"/>
-            </a:xfrm>
-          </p:grpSpPr>
-          <p:sp>
-            <p:nvSpPr>
-              <p:cNvPr id="27" name="TextBox 27"/>
-              <p:cNvSpPr txBox="1"/>
-              <p:nvPr/>
-            </p:nvSpPr>
-            <p:spPr>
-              <a:xfrm>
-                <a:off x="1325880" y="5270500"/>
-                <a:ext cx="2370829" cy="293370"/>
-              </a:xfrm>
-              <a:prstGeom prst="rect">
-                <a:avLst/>
-              </a:prstGeom>
-              <a:noFill/>
-              <a:ln>
-                <a:noFill/>
-              </a:ln>
-            </p:spPr>
-            <p:txBody>
-              <a:bodyPr wrap="none" lIns="0" tIns="0" rIns="0" bIns="0" anchor="t" anchorCtr="0">
-                <a:spAutoFit/>
-              </a:bodyPr>
-              <a:lstStyle/>
-              <a:p>
-                <a:pPr algn="l"/>
-                <a:r>
-                  <a:rPr lang="en" sz="1500" dirty="0">
-                    <a:solidFill>
-                      <a:schemeClr val="accent1"/>
-                    </a:solidFill>
-                    <a:latin typeface="Consolas"/>
-                    <a:ea typeface="Consolas"/>
-                    <a:cs typeface="Consolas"/>
-                  </a:rPr>
-                  <a:t>[Authorize] on AddBid</a:t>
-                </a:r>
-              </a:p>
-            </p:txBody>
-          </p:sp>
-          <p:sp>
-            <p:nvSpPr>
-              <p:cNvPr id="28" name="TextBox 28"/>
-              <p:cNvSpPr txBox="1"/>
-              <p:nvPr/>
-            </p:nvSpPr>
-            <p:spPr>
-              <a:xfrm>
-                <a:off x="1325880" y="5575300"/>
-                <a:ext cx="3708884" cy="293370"/>
-              </a:xfrm>
-              <a:prstGeom prst="rect">
-                <a:avLst/>
-              </a:prstGeom>
-              <a:noFill/>
-              <a:ln>
-                <a:noFill/>
-              </a:ln>
-            </p:spPr>
-            <p:txBody>
-              <a:bodyPr wrap="none" lIns="0" tIns="0" rIns="0" bIns="0" anchor="t" anchorCtr="0">
-                <a:spAutoFit/>
-              </a:bodyPr>
-              <a:lstStyle/>
-              <a:p>
-                <a:pPr algn="l"/>
-                <a:r>
-                  <a:rPr lang="en" sz="1500" dirty="0">
-                    <a:solidFill>
-                      <a:schemeClr val="accent1"/>
-                    </a:solidFill>
-                    <a:latin typeface="Consolas"/>
-                    <a:ea typeface="Consolas"/>
-                    <a:cs typeface="Consolas"/>
-                  </a:rPr>
-                  <a:t>bidderId = Context.UserIdentifier</a:t>
-                </a:r>
-              </a:p>
-            </p:txBody>
-          </p:sp>
-        </p:grpSp>
-      </p:grpSp>
-      <p:sp>
-        <p:nvSpPr>
-          <p:cNvPr id="31" name="Line 31"/>
-          <p:cNvSpPr/>
-          <p:nvPr/>
-        </p:nvSpPr>
-        <p:spPr>
-          <a:xfrm>
-            <a:off x="6096000" y="1809750"/>
-            <a:ext cx="9525" cy="4248150"/>
-          </a:xfrm>
-          <a:custGeom>
-            <a:avLst/>
-            <a:gdLst/>
-            <a:ahLst/>
-            <a:cxnLst/>
-            <a:rect l="l" t="t" r="r" b="b"/>
-            <a:pathLst>
-              <a:path w="9525" h="4248150">
-                <a:moveTo>
-                  <a:pt x="0" y="0"/>
-                </a:moveTo>
-                <a:lnTo>
-                  <a:pt x="0" y="4248150"/>
-                </a:lnTo>
-              </a:path>
-            </a:pathLst>
-          </a:custGeom>
-          <a:noFill/>
-          <a:ln w="9525">
-            <a:solidFill>
-              <a:schemeClr val="accent6"/>
-            </a:solidFill>
-          </a:ln>
-        </p:spPr>
-      </p:sp>
-      <p:grpSp>
-        <p:nvGrpSpPr>
-          <p:cNvPr id="56" name="hole-maxbid"/>
-          <p:cNvGrpSpPr/>
-          <p:nvPr/>
-        </p:nvGrpSpPr>
-        <p:grpSpPr>
-          <a:xfrm>
-            <a:off x="6310122" y="1809750"/>
-            <a:ext cx="5272278" cy="4248150"/>
-            <a:chOff x="6310122" y="1809750"/>
-            <a:chExt cx="5272278" cy="4248150"/>
-          </a:xfrm>
-        </p:grpSpPr>
-        <p:grpSp>
-          <p:nvGrpSpPr>
-            <p:cNvPr id="34" name="Group 34"/>
-            <p:cNvGrpSpPr/>
-            <p:nvPr/>
-          </p:nvGrpSpPr>
-          <p:grpSpPr>
-            <a:xfrm>
-              <a:off x="6353175" y="1866900"/>
-              <a:ext cx="171450" cy="114300"/>
-              <a:chOff x="6353175" y="1866900"/>
-              <a:chExt cx="171450" cy="114300"/>
-            </a:xfrm>
-          </p:grpSpPr>
-          <p:sp>
-            <p:nvSpPr>
-              <p:cNvPr id="32" name="Freeform 32"/>
-              <p:cNvSpPr/>
-              <p:nvPr/>
-            </p:nvSpPr>
-            <p:spPr>
-              <a:xfrm>
-                <a:off x="6419850" y="1905000"/>
-                <a:ext cx="38100" cy="38100"/>
-              </a:xfrm>
-              <a:custGeom>
-                <a:avLst/>
-                <a:gdLst/>
-                <a:ahLst/>
-                <a:cxnLst/>
-                <a:rect l="l" t="t" r="r" b="b"/>
-                <a:pathLst>
-                  <a:path w="38100" h="38100">
-                    <a:moveTo>
-                      <a:pt x="0" y="19050"/>
-                    </a:moveTo>
-                    <a:cubicBezTo>
-                      <a:pt x="0" y="29571"/>
-                      <a:pt x="8529" y="38100"/>
-                      <a:pt x="19050" y="38100"/>
-                    </a:cubicBezTo>
-                    <a:cubicBezTo>
-                      <a:pt x="29571" y="38100"/>
-                      <a:pt x="38100" y="29571"/>
-                      <a:pt x="38100" y="19050"/>
-                    </a:cubicBezTo>
-                    <a:cubicBezTo>
-                      <a:pt x="38100" y="8529"/>
-                      <a:pt x="29571" y="0"/>
-                      <a:pt x="19050" y="0"/>
-                    </a:cubicBezTo>
-                    <a:cubicBezTo>
-                      <a:pt x="8529" y="0"/>
-                      <a:pt x="0" y="8529"/>
-                      <a:pt x="0" y="19050"/>
-                    </a:cubicBezTo>
-                  </a:path>
-                </a:pathLst>
-              </a:custGeom>
-              <a:noFill/>
-              <a:ln w="19050">
-                <a:solidFill>
-                  <a:srgbClr val="B36A13"/>
-                </a:solidFill>
-              </a:ln>
-            </p:spPr>
-          </p:sp>
-          <p:sp>
-            <p:nvSpPr>
-              <p:cNvPr id="33" name="Freeform 33"/>
-              <p:cNvSpPr/>
-              <p:nvPr/>
-            </p:nvSpPr>
-            <p:spPr>
-              <a:xfrm>
-                <a:off x="6353175" y="1866900"/>
-                <a:ext cx="171450" cy="114300"/>
-              </a:xfrm>
-              <a:custGeom>
-                <a:avLst/>
-                <a:gdLst/>
-                <a:ahLst/>
-                <a:cxnLst/>
-                <a:rect l="l" t="t" r="r" b="b"/>
-                <a:pathLst>
-                  <a:path w="171450" h="114300">
-                    <a:moveTo>
-                      <a:pt x="171450" y="57150"/>
-                    </a:moveTo>
-                    <a:cubicBezTo>
-                      <a:pt x="148590" y="95250"/>
-                      <a:pt x="120015" y="114300"/>
-                      <a:pt x="85725" y="114300"/>
-                    </a:cubicBezTo>
-                    <a:cubicBezTo>
-                      <a:pt x="51435" y="114300"/>
-                      <a:pt x="22860" y="95250"/>
-                      <a:pt x="0" y="57150"/>
-                    </a:cubicBezTo>
-                    <a:cubicBezTo>
-                      <a:pt x="22860" y="19050"/>
-                      <a:pt x="51435" y="0"/>
-                      <a:pt x="85725" y="0"/>
-                    </a:cubicBezTo>
-                    <a:cubicBezTo>
-                      <a:pt x="120015" y="0"/>
-                      <a:pt x="148590" y="19050"/>
-                      <a:pt x="171450" y="57150"/>
-                    </a:cubicBezTo>
-                  </a:path>
-                </a:pathLst>
-              </a:custGeom>
-              <a:noFill/>
-              <a:ln w="19050">
-                <a:solidFill>
-                  <a:srgbClr val="B36A13"/>
-                </a:solidFill>
-              </a:ln>
-            </p:spPr>
-          </p:sp>
-        </p:grpSp>
-        <p:sp>
-          <p:nvSpPr>
-            <p:cNvPr id="35" name="TextBox 35"/>
+        <p:sp>
+          <p:nvSpPr>
+            <p:cNvPr id="12" name="TextBox 12"/>
             <p:cNvSpPr txBox="1"/>
             <p:nvPr/>
           </p:nvSpPr>
           <p:spPr>
             <a:xfrm>
-              <a:off x="6621780" y="1809750"/>
-              <a:ext cx="2654685" cy="293370"/>
+              <a:off x="6695313" y="2463800"/>
+              <a:ext cx="2746568" cy="396050"/>
             </a:xfrm>
             <a:prstGeom prst="rect">
               <a:avLst/>
@@ -9421,29 +8178,29 @@
             <a:p>
               <a:pPr algn="l"/>
               <a:r>
-                <a:rPr lang="en" sz="1500" b="1" dirty="0">
-                  <a:solidFill>
-                    <a:srgbClr val="B36A13"/>
-                  </a:solidFill>
-                  <a:latin typeface="+mn-lt"/>
-                  <a:ea typeface="+mn-ea"/>
-                  <a:cs typeface="+mn-cs"/>
-                </a:rPr>
-                <a:t>Hole 2 · what everyone sees</a:t>
+                <a:rPr lang="en" sz="2020" dirty="0">
+                  <a:solidFill>
+                    <a:schemeClr val="accent1"/>
+                  </a:solidFill>
+                  <a:latin typeface="Consolas"/>
+                  <a:ea typeface="Consolas"/>
+                  <a:cs typeface="Consolas"/>
+                </a:rPr>
+                <a:t>GetBidContextAsync</a:t>
               </a:r>
             </a:p>
           </p:txBody>
         </p:sp>
         <p:sp>
           <p:nvSpPr>
-            <p:cNvPr id="36" name="TextBox 36"/>
+            <p:cNvPr id="13" name="TextBox 13"/>
             <p:cNvSpPr txBox="1"/>
             <p:nvPr/>
           </p:nvSpPr>
           <p:spPr>
             <a:xfrm>
-              <a:off x="6310122" y="2063750"/>
-              <a:ext cx="3773107" cy="557403"/>
+              <a:off x="6695313" y="2832100"/>
+              <a:ext cx="4122187" cy="396050"/>
             </a:xfrm>
             <a:prstGeom prst="rect">
               <a:avLst/>
@@ -9461,205 +8218,29 @@
             <a:p>
               <a:pPr algn="l"/>
               <a:r>
-                <a:rPr lang="en" sz="2850" dirty="0">
-                  <a:solidFill>
-                    <a:schemeClr val="accent1"/>
-                  </a:solidFill>
-                  <a:latin typeface="+mj-lt"/>
-                  <a:ea typeface="+mj-ea"/>
-                  <a:cs typeface="+mj-cs"/>
-                </a:rPr>
-                <a:t>Max bid in plain sight</a:t>
+                <a:rPr lang="en" sz="2020" dirty="0">
+                  <a:solidFill>
+                    <a:schemeClr val="dk1"/>
+                  </a:solidFill>
+                  <a:latin typeface="+mn-lt"/>
+                  <a:ea typeface="+mn-ea"/>
+                  <a:cs typeface="+mn-cs"/>
+                </a:rPr>
+                <a:t>Loads Ben; checks Ben’s eligibility.</a:t>
               </a:r>
             </a:p>
           </p:txBody>
         </p:sp>
         <p:sp>
           <p:nvSpPr>
-            <p:cNvPr id="37" name="Rectangle 37"/>
-            <p:cNvSpPr/>
-            <p:nvPr/>
-          </p:nvSpPr>
-          <p:spPr>
-            <a:xfrm>
-              <a:off x="6324600" y="2609850"/>
-              <a:ext cx="5257800" cy="990600"/>
-            </a:xfrm>
-            <a:prstGeom prst="roundRect">
-              <a:avLst>
-                <a:gd name="adj" fmla="val 3846"/>
-              </a:avLst>
-            </a:prstGeom>
-            <a:solidFill>
-              <a:schemeClr val="accent1"/>
-            </a:solidFill>
-            <a:ln>
-              <a:noFill/>
-            </a:ln>
-          </p:spPr>
-        </p:sp>
-        <p:grpSp>
-          <p:nvGrpSpPr>
-            <p:cNvPr id="41" name="Group 41"/>
-            <p:cNvGrpSpPr/>
-            <p:nvPr/>
-          </p:nvGrpSpPr>
-          <p:grpSpPr>
-            <a:xfrm>
-              <a:off x="6508750" y="2717800"/>
-              <a:ext cx="127000" cy="127000"/>
-              <a:chOff x="6508750" y="2717800"/>
-              <a:chExt cx="127000" cy="127000"/>
-            </a:xfrm>
-          </p:grpSpPr>
-          <p:sp>
-            <p:nvSpPr>
-              <p:cNvPr id="38" name="Freeform 38"/>
-              <p:cNvSpPr/>
-              <p:nvPr/>
-            </p:nvSpPr>
-            <p:spPr>
-              <a:xfrm>
-                <a:off x="6508750" y="2749550"/>
-                <a:ext cx="127000" cy="9525"/>
-              </a:xfrm>
-              <a:custGeom>
-                <a:avLst/>
-                <a:gdLst/>
-                <a:ahLst/>
-                <a:cxnLst/>
-                <a:rect l="l" t="t" r="r" b="b"/>
-                <a:pathLst>
-                  <a:path w="127000" h="9525">
-                    <a:moveTo>
-                      <a:pt x="0" y="0"/>
-                    </a:moveTo>
-                    <a:lnTo>
-                      <a:pt x="127000" y="0"/>
-                    </a:lnTo>
-                  </a:path>
-                </a:pathLst>
-              </a:custGeom>
-              <a:noFill/>
-              <a:ln w="15875">
-                <a:solidFill>
-                  <a:srgbClr val="E8F4F8"/>
-                </a:solidFill>
-              </a:ln>
-            </p:spPr>
-          </p:sp>
-          <p:sp>
-            <p:nvSpPr>
-              <p:cNvPr id="39" name="Freeform 39"/>
-              <p:cNvSpPr/>
-              <p:nvPr/>
-            </p:nvSpPr>
-            <p:spPr>
-              <a:xfrm>
-                <a:off x="6508750" y="2717800"/>
-                <a:ext cx="127000" cy="127000"/>
-              </a:xfrm>
-              <a:custGeom>
-                <a:avLst/>
-                <a:gdLst/>
-                <a:ahLst/>
-                <a:cxnLst/>
-                <a:rect l="l" t="t" r="r" b="b"/>
-                <a:pathLst>
-                  <a:path w="127000" h="127000">
-                    <a:moveTo>
-                      <a:pt x="0" y="15875"/>
-                    </a:moveTo>
-                    <a:cubicBezTo>
-                      <a:pt x="0" y="7107"/>
-                      <a:pt x="7107" y="0"/>
-                      <a:pt x="15875" y="0"/>
-                    </a:cubicBezTo>
-                    <a:lnTo>
-                      <a:pt x="111125" y="0"/>
-                    </a:lnTo>
-                    <a:cubicBezTo>
-                      <a:pt x="119892" y="0"/>
-                      <a:pt x="127000" y="7107"/>
-                      <a:pt x="127000" y="15875"/>
-                    </a:cubicBezTo>
-                    <a:lnTo>
-                      <a:pt x="127000" y="111125"/>
-                    </a:lnTo>
-                    <a:cubicBezTo>
-                      <a:pt x="127000" y="119892"/>
-                      <a:pt x="119892" y="127000"/>
-                      <a:pt x="111125" y="127000"/>
-                    </a:cubicBezTo>
-                    <a:lnTo>
-                      <a:pt x="15875" y="127000"/>
-                    </a:lnTo>
-                    <a:cubicBezTo>
-                      <a:pt x="7107" y="127000"/>
-                      <a:pt x="0" y="119892"/>
-                      <a:pt x="0" y="111125"/>
-                    </a:cubicBezTo>
-                    <a:lnTo>
-                      <a:pt x="0" y="15875"/>
-                    </a:lnTo>
-                  </a:path>
-                </a:pathLst>
-              </a:custGeom>
-              <a:noFill/>
-              <a:ln w="15875">
-                <a:solidFill>
-                  <a:srgbClr val="E8F4F8"/>
-                </a:solidFill>
-              </a:ln>
-            </p:spPr>
-          </p:sp>
-          <p:sp>
-            <p:nvSpPr>
-              <p:cNvPr id="40" name="Freeform 40"/>
-              <p:cNvSpPr/>
-              <p:nvPr/>
-            </p:nvSpPr>
-            <p:spPr>
-              <a:xfrm>
-                <a:off x="6540500" y="2717800"/>
-                <a:ext cx="9525" cy="31750"/>
-              </a:xfrm>
-              <a:custGeom>
-                <a:avLst/>
-                <a:gdLst/>
-                <a:ahLst/>
-                <a:cxnLst/>
-                <a:rect l="l" t="t" r="r" b="b"/>
-                <a:pathLst>
-                  <a:path w="9525" h="31750">
-                    <a:moveTo>
-                      <a:pt x="0" y="0"/>
-                    </a:moveTo>
-                    <a:lnTo>
-                      <a:pt x="0" y="31750"/>
-                    </a:lnTo>
-                  </a:path>
-                </a:pathLst>
-              </a:custGeom>
-              <a:noFill/>
-              <a:ln w="15875">
-                <a:solidFill>
-                  <a:srgbClr val="E8F4F8"/>
-                </a:solidFill>
-              </a:ln>
-            </p:spPr>
-          </p:sp>
-        </p:grpSp>
-        <p:sp>
-          <p:nvSpPr>
-            <p:cNvPr id="42" name="TextBox 42"/>
+            <p:cNvPr id="14" name="TextBox 14"/>
             <p:cNvSpPr txBox="1"/>
             <p:nvPr/>
           </p:nvSpPr>
           <p:spPr>
             <a:xfrm>
-              <a:off x="6737604" y="2686050"/>
-              <a:ext cx="1789723" cy="234696"/>
+              <a:off x="6695313" y="3340100"/>
+              <a:ext cx="1383571" cy="396050"/>
             </a:xfrm>
             <a:prstGeom prst="rect">
               <a:avLst/>
@@ -9677,146 +8258,29 @@
             <a:p>
               <a:pPr algn="l"/>
               <a:r>
-                <a:rPr lang="en" sz="1200" dirty="0">
-                  <a:solidFill>
-                    <a:srgbClr val="E8F4F8"/>
-                  </a:solidFill>
-                  <a:latin typeface="+mn-lt"/>
-                  <a:ea typeface="+mn-ea"/>
-                  <a:cs typeface="+mn-cs"/>
-                </a:rPr>
-                <a:t>DevTools · Network · WS</a:t>
+                <a:rPr lang="en" sz="2020" dirty="0">
+                  <a:solidFill>
+                    <a:schemeClr val="accent1"/>
+                  </a:solidFill>
+                  <a:latin typeface="Consolas"/>
+                  <a:ea typeface="Consolas"/>
+                  <a:cs typeface="Consolas"/>
+                </a:rPr>
+                <a:t>CreateBid</a:t>
               </a:r>
             </a:p>
           </p:txBody>
         </p:sp>
-        <p:grpSp>
-          <p:nvGrpSpPr>
-            <p:cNvPr id="45" name="Group 45"/>
-            <p:cNvGrpSpPr/>
-            <p:nvPr/>
-          </p:nvGrpSpPr>
-          <p:grpSpPr>
-            <a:xfrm>
-              <a:off x="6469380" y="3003550"/>
-              <a:ext cx="3701015" cy="560070"/>
-              <a:chOff x="6469380" y="3003550"/>
-              <a:chExt cx="3701015" cy="560070"/>
-            </a:xfrm>
-          </p:grpSpPr>
-          <p:sp>
-            <p:nvSpPr>
-              <p:cNvPr id="43" name="TextBox 43"/>
-              <p:cNvSpPr txBox="1"/>
-              <p:nvPr/>
-            </p:nvSpPr>
-            <p:spPr>
-              <a:xfrm>
-                <a:off x="6469380" y="3003550"/>
-                <a:ext cx="3701015" cy="293370"/>
-              </a:xfrm>
-              <a:prstGeom prst="rect">
-                <a:avLst/>
-              </a:prstGeom>
-              <a:noFill/>
-              <a:ln>
-                <a:noFill/>
-              </a:ln>
-            </p:spPr>
-            <p:txBody>
-              <a:bodyPr wrap="none" lIns="0" tIns="0" rIns="0" bIns="0" anchor="t" anchorCtr="0">
-                <a:spAutoFit/>
-              </a:bodyPr>
-              <a:lstStyle/>
-              <a:p>
-                <a:pPr algn="l"/>
-                <a:r>
-                  <a:rPr lang="en" sz="1500" dirty="0">
-                    <a:solidFill>
-                      <a:srgbClr val="E8F4F8"/>
-                    </a:solidFill>
-                    <a:latin typeface="Consolas"/>
-                    <a:ea typeface="Consolas"/>
-                    <a:cs typeface="Consolas"/>
-                  </a:rPr>
-                  <a:t>↓ updateItem(1042, 1300, 1350, 8,</a:t>
-                </a:r>
-              </a:p>
-            </p:txBody>
-          </p:sp>
-          <p:sp>
-            <p:nvSpPr>
-              <p:cNvPr id="44" name="TextBox 44"/>
-              <p:cNvSpPr txBox="1"/>
-              <p:nvPr/>
-            </p:nvSpPr>
-            <p:spPr>
-              <a:xfrm>
-                <a:off x="6469380" y="3270250"/>
-                <a:ext cx="2569655" cy="293370"/>
-              </a:xfrm>
-              <a:prstGeom prst="rect">
-                <a:avLst/>
-              </a:prstGeom>
-              <a:noFill/>
-              <a:ln>
-                <a:noFill/>
-              </a:ln>
-            </p:spPr>
-            <p:txBody>
-              <a:bodyPr wrap="none" lIns="0" tIns="0" rIns="0" bIns="0" anchor="t" anchorCtr="0">
-                <a:spAutoFit/>
-              </a:bodyPr>
-              <a:lstStyle/>
-              <a:p>
-                <a:pPr algn="l"/>
-                <a:r>
-                  <a:rPr lang="en" sz="1500" dirty="0">
-                    <a:solidFill>
-                      <a:srgbClr val="E8F4F8"/>
-                    </a:solidFill>
-                    <a:latin typeface="Consolas"/>
-                    <a:ea typeface="Consolas"/>
-                    <a:cs typeface="Consolas"/>
-                  </a:rPr>
-                  <a:t xml:space="preserve">…, "u-ben", true, </a:t>
-                </a:r>
-                <a:r>
-                  <a:rPr lang="en" sz="1500" b="1" dirty="0">
-                    <a:solidFill>
-                      <a:srgbClr val="F6C177"/>
-                    </a:solidFill>
-                    <a:latin typeface="Consolas"/>
-                    <a:ea typeface="Consolas"/>
-                    <a:cs typeface="Consolas"/>
-                  </a:rPr>
-                  <a:t>2000</a:t>
-                </a:r>
-                <a:r>
-                  <a:rPr lang="en" sz="1500" dirty="0">
-                    <a:solidFill>
-                      <a:srgbClr val="E8F4F8"/>
-                    </a:solidFill>
-                    <a:latin typeface="Consolas"/>
-                    <a:ea typeface="Consolas"/>
-                    <a:cs typeface="Consolas"/>
-                  </a:rPr>
-                  <a:t>)</a:t>
-                </a:r>
-              </a:p>
-            </p:txBody>
-          </p:sp>
-        </p:grpSp>
-        <p:sp>
-          <p:nvSpPr>
-            <p:cNvPr id="46" name="TextBox 46"/>
+        <p:sp>
+          <p:nvSpPr>
+            <p:cNvPr id="15" name="TextBox 15"/>
             <p:cNvSpPr txBox="1"/>
             <p:nvPr/>
           </p:nvSpPr>
           <p:spPr>
             <a:xfrm>
-              <a:off x="6316218" y="3721100"/>
-              <a:ext cx="3450190" cy="322707"/>
+              <a:off x="6694170" y="3683000"/>
+              <a:ext cx="3828088" cy="440055"/>
             </a:xfrm>
             <a:prstGeom prst="rect">
               <a:avLst/>
@@ -9834,7 +8298,7 @@
             <a:p>
               <a:pPr algn="l"/>
               <a:r>
-                <a:rPr lang="en" sz="1650" b="1" dirty="0">
+                <a:rPr lang="en" sz="2250" b="1" dirty="0">
                   <a:solidFill>
                     <a:srgbClr val="B36A13"/>
                   </a:solidFill>
@@ -9842,214 +8306,36 @@
                   <a:ea typeface="+mn-ea"/>
                   <a:cs typeface="+mn-cs"/>
                 </a:rPr>
-                <a:t>→ every rival reads Ben’s max bid</a:t>
+                <a:t>Records Ben as the bidder.</a:t>
               </a:r>
             </a:p>
           </p:txBody>
         </p:sp>
-        <p:grpSp>
-          <p:nvGrpSpPr>
-            <p:cNvPr id="50" name="Group 50"/>
-            <p:cNvGrpSpPr/>
-            <p:nvPr/>
-          </p:nvGrpSpPr>
-          <p:grpSpPr>
-            <a:xfrm>
-              <a:off x="6316980" y="4127500"/>
-              <a:ext cx="3540046" cy="852170"/>
-              <a:chOff x="6316980" y="4127500"/>
-              <a:chExt cx="3540046" cy="852170"/>
-            </a:xfrm>
-          </p:grpSpPr>
-          <p:sp>
-            <p:nvSpPr>
-              <p:cNvPr id="47" name="TextBox 47"/>
-              <p:cNvSpPr txBox="1"/>
-              <p:nvPr/>
-            </p:nvSpPr>
-            <p:spPr>
-              <a:xfrm>
-                <a:off x="6316980" y="4127500"/>
-                <a:ext cx="2929509" cy="293370"/>
-              </a:xfrm>
-              <a:prstGeom prst="rect">
-                <a:avLst/>
-              </a:prstGeom>
-              <a:noFill/>
-              <a:ln>
-                <a:noFill/>
-              </a:ln>
-            </p:spPr>
-            <p:txBody>
-              <a:bodyPr wrap="none" lIns="0" tIns="0" rIns="0" bIns="0" anchor="t" anchorCtr="0">
-                <a:spAutoFit/>
-              </a:bodyPr>
-              <a:lstStyle/>
-              <a:p>
-                <a:pPr algn="l" marL="129559" indent="-129559">
-                  <a:buClr>
-                    <a:schemeClr val="dk1"/>
-                  </a:buClr>
-                  <a:buSzTx/>
-                  <a:buFontTx/>
-                  <a:buChar char="•"/>
-                </a:pPr>
-                <a:r>
-                  <a:rPr lang="en" sz="1500" dirty="0">
-                    <a:solidFill>
-                      <a:schemeClr val="dk1"/>
-                    </a:solidFill>
-                    <a:latin typeface="Consolas"/>
-                    <a:ea typeface="Consolas"/>
-                    <a:cs typeface="Consolas"/>
-                  </a:rPr>
-                  <a:t>highMaxBid</a:t>
-                </a:r>
-                <a:r>
-                  <a:rPr lang="en" sz="1500" dirty="0">
-                    <a:solidFill>
-                      <a:schemeClr val="dk1"/>
-                    </a:solidFill>
-                    <a:latin typeface="+mn-lt"/>
-                    <a:ea typeface="+mn-ea"/>
-                    <a:cs typeface="+mn-cs"/>
-                  </a:rPr>
-                  <a:t xml:space="preserve"> goes to Clients.All</a:t>
-                </a:r>
-              </a:p>
-            </p:txBody>
-          </p:sp>
-          <p:sp>
-            <p:nvSpPr>
-              <p:cNvPr id="48" name="TextBox 48"/>
-              <p:cNvSpPr txBox="1"/>
-              <p:nvPr/>
-            </p:nvSpPr>
-            <p:spPr>
-              <a:xfrm>
-                <a:off x="6316980" y="4400550"/>
-                <a:ext cx="3540046" cy="293370"/>
-              </a:xfrm>
-              <a:prstGeom prst="rect">
-                <a:avLst/>
-              </a:prstGeom>
-              <a:noFill/>
-              <a:ln>
-                <a:noFill/>
-              </a:ln>
-            </p:spPr>
-            <p:txBody>
-              <a:bodyPr wrap="none" lIns="0" tIns="0" rIns="0" bIns="0" anchor="t" anchorCtr="0">
-                <a:spAutoFit/>
-              </a:bodyPr>
-              <a:lstStyle/>
-              <a:p>
-                <a:pPr algn="l" marL="129559" indent="-129559">
-                  <a:buClr>
-                    <a:schemeClr val="dk1"/>
-                  </a:buClr>
-                  <a:buSzTx/>
-                  <a:buFontTx/>
-                  <a:buChar char="•"/>
-                </a:pPr>
-                <a:r>
-                  <a:rPr lang="en" sz="1500" dirty="0">
-                    <a:solidFill>
-                      <a:schemeClr val="dk1"/>
-                    </a:solidFill>
-                    <a:latin typeface="+mn-lt"/>
-                    <a:ea typeface="+mn-ea"/>
-                    <a:cs typeface="+mn-cs"/>
-                  </a:rPr>
-                  <a:t>the page only uses it to hide Buy Now</a:t>
-                </a:r>
-              </a:p>
-            </p:txBody>
-          </p:sp>
-          <p:sp>
-            <p:nvSpPr>
-              <p:cNvPr id="49" name="TextBox 49"/>
-              <p:cNvSpPr txBox="1"/>
-              <p:nvPr/>
-            </p:nvSpPr>
-            <p:spPr>
-              <a:xfrm>
-                <a:off x="6316980" y="4686300"/>
-                <a:ext cx="2865737" cy="293370"/>
-              </a:xfrm>
-              <a:prstGeom prst="rect">
-                <a:avLst/>
-              </a:prstGeom>
-              <a:noFill/>
-              <a:ln>
-                <a:noFill/>
-              </a:ln>
-            </p:spPr>
-            <p:txBody>
-              <a:bodyPr wrap="none" lIns="0" tIns="0" rIns="0" bIns="0" anchor="t" anchorCtr="0">
-                <a:spAutoFit/>
-              </a:bodyPr>
-              <a:lstStyle/>
-              <a:p>
-                <a:pPr algn="l" marL="129559" indent="-129559">
-                  <a:buClr>
-                    <a:schemeClr val="dk1"/>
-                  </a:buClr>
-                  <a:buSzTx/>
-                  <a:buFontTx/>
-                  <a:buChar char="•"/>
-                </a:pPr>
-                <a:r>
-                  <a:rPr lang="en" sz="1500" dirty="0">
-                    <a:solidFill>
-                      <a:schemeClr val="dk1"/>
-                    </a:solidFill>
-                    <a:latin typeface="+mn-lt"/>
-                    <a:ea typeface="+mn-ea"/>
-                    <a:cs typeface="+mn-cs"/>
-                  </a:rPr>
-                  <a:t>anything in Clients.All is public</a:t>
-                </a:r>
-              </a:p>
-            </p:txBody>
-          </p:sp>
-        </p:grpSp>
-        <p:sp>
-          <p:nvSpPr>
-            <p:cNvPr id="51" name="Rectangle 51"/>
-            <p:cNvSpPr/>
-            <p:nvPr/>
-          </p:nvSpPr>
-          <p:spPr>
-            <a:xfrm>
-              <a:off x="6324600" y="5143500"/>
-              <a:ext cx="5257800" cy="914400"/>
-            </a:xfrm>
-            <a:prstGeom prst="roundRect">
-              <a:avLst>
-                <a:gd name="adj" fmla="val 4167"/>
-              </a:avLst>
-            </a:prstGeom>
-            <a:solidFill>
-              <a:schemeClr val="lt2"/>
-            </a:solidFill>
-            <a:ln w="19050">
-              <a:solidFill>
-                <a:schemeClr val="accent2"/>
-              </a:solidFill>
-            </a:ln>
-          </p:spPr>
-        </p:sp>
-        <p:sp>
-          <p:nvSpPr>
-            <p:cNvPr id="52" name="TextBox 52"/>
+      </p:grpSp>
+      <p:grpSp>
+        <p:nvGrpSpPr>
+          <p:cNvPr id="18" name="risk"/>
+          <p:cNvGrpSpPr/>
+          <p:nvPr/>
+        </p:nvGrpSpPr>
+        <p:grpSpPr>
+          <a:xfrm>
+            <a:off x="595884" y="4318000"/>
+            <a:ext cx="9225932" cy="528066"/>
+            <a:chOff x="595884" y="4318000"/>
+            <a:chExt cx="9225932" cy="528066"/>
+          </a:xfrm>
+        </p:grpSpPr>
+        <p:sp>
+          <p:nvSpPr>
+            <p:cNvPr id="17" name="TextBox 17"/>
             <p:cNvSpPr txBox="1"/>
             <p:nvPr/>
           </p:nvSpPr>
           <p:spPr>
             <a:xfrm>
-              <a:off x="6507480" y="5257800"/>
-              <a:ext cx="294326" cy="293370"/>
+              <a:off x="595884" y="4318000"/>
+              <a:ext cx="9225932" cy="528066"/>
             </a:xfrm>
             <a:prstGeom prst="rect">
               <a:avLst/>
@@ -10067,118 +8353,213 @@
             <a:p>
               <a:pPr algn="l"/>
               <a:r>
-                <a:rPr lang="en" sz="1500" b="1" dirty="0">
+                <a:rPr lang="en" sz="2700" b="1" dirty="0">
+                  <a:solidFill>
+                    <a:srgbClr val="B36A13"/>
+                  </a:solidFill>
+                  <a:latin typeface="+mj-lt"/>
+                  <a:ea typeface="+mj-ea"/>
+                  <a:cs typeface="+mj-cs"/>
+                </a:rPr>
+                <a:t>Anna places the bid. Ben is recorded as responsible.</a:t>
+              </a:r>
+            </a:p>
+          </p:txBody>
+        </p:sp>
+      </p:grpSp>
+      <p:grpSp>
+        <p:nvGrpSpPr>
+          <p:cNvPr id="21" name="fix-auth"/>
+          <p:cNvGrpSpPr/>
+          <p:nvPr/>
+        </p:nvGrpSpPr>
+        <p:grpSpPr>
+          <a:xfrm>
+            <a:off x="595122" y="5048250"/>
+            <a:ext cx="4191464" cy="902081"/>
+            <a:chOff x="595122" y="5048250"/>
+            <a:chExt cx="4191464" cy="902081"/>
+          </a:xfrm>
+        </p:grpSpPr>
+        <p:sp>
+          <p:nvSpPr>
+            <p:cNvPr id="19" name="TextBox 19"/>
+            <p:cNvSpPr txBox="1"/>
+            <p:nvPr/>
+          </p:nvSpPr>
+          <p:spPr>
+            <a:xfrm>
+              <a:off x="595122" y="5048250"/>
+              <a:ext cx="2364740" cy="557403"/>
+            </a:xfrm>
+            <a:prstGeom prst="rect">
+              <a:avLst/>
+            </a:prstGeom>
+            <a:noFill/>
+            <a:ln>
+              <a:noFill/>
+            </a:ln>
+          </p:spPr>
+          <p:txBody>
+            <a:bodyPr wrap="none" lIns="0" tIns="0" rIns="0" bIns="0" anchor="t" anchorCtr="0">
+              <a:spAutoFit/>
+            </a:bodyPr>
+            <a:lstStyle/>
+            <a:p>
+              <a:pPr algn="l"/>
+              <a:r>
+                <a:rPr lang="en" sz="2850" b="1" dirty="0">
                   <a:solidFill>
                     <a:schemeClr val="accent2"/>
+                  </a:solidFill>
+                  <a:latin typeface="Consolas"/>
+                  <a:ea typeface="Consolas"/>
+                  <a:cs typeface="Consolas"/>
+                </a:rPr>
+                <a:t>[Authorize]</a:t>
+              </a:r>
+            </a:p>
+          </p:txBody>
+        </p:sp>
+        <p:sp>
+          <p:nvSpPr>
+            <p:cNvPr id="20" name="TextBox 20"/>
+            <p:cNvSpPr txBox="1"/>
+            <p:nvPr/>
+          </p:nvSpPr>
+          <p:spPr>
+            <a:xfrm>
+              <a:off x="599694" y="5568950"/>
+              <a:ext cx="4186892" cy="381381"/>
+            </a:xfrm>
+            <a:prstGeom prst="rect">
+              <a:avLst/>
+            </a:prstGeom>
+            <a:noFill/>
+            <a:ln>
+              <a:noFill/>
+            </a:ln>
+          </p:spPr>
+          <p:txBody>
+            <a:bodyPr wrap="none" lIns="0" tIns="0" rIns="0" bIns="0" anchor="t" anchorCtr="0">
+              <a:spAutoFit/>
+            </a:bodyPr>
+            <a:lstStyle/>
+            <a:p>
+              <a:pPr algn="l"/>
+              <a:r>
+                <a:rPr lang="en" sz="1950" dirty="0">
+                  <a:solidFill>
+                    <a:schemeClr val="dk1"/>
                   </a:solidFill>
                   <a:latin typeface="+mn-lt"/>
                   <a:ea typeface="+mn-ea"/>
                   <a:cs typeface="+mn-cs"/>
                 </a:rPr>
-                <a:t>Fix</a:t>
+                <a:t>Require login for AddBid / AddBids.</a:t>
               </a:r>
             </a:p>
           </p:txBody>
         </p:sp>
-        <p:grpSp>
-          <p:nvGrpSpPr>
-            <p:cNvPr id="55" name="Group 55"/>
-            <p:cNvGrpSpPr/>
-            <p:nvPr/>
-          </p:nvGrpSpPr>
-          <p:grpSpPr>
-            <a:xfrm>
-              <a:off x="7040880" y="5270500"/>
-              <a:ext cx="2478351" cy="598170"/>
-              <a:chOff x="7040880" y="5270500"/>
-              <a:chExt cx="2478351" cy="598170"/>
-            </a:xfrm>
-          </p:grpSpPr>
-          <p:sp>
-            <p:nvSpPr>
-              <p:cNvPr id="53" name="TextBox 53"/>
-              <p:cNvSpPr txBox="1"/>
-              <p:nvPr/>
-            </p:nvSpPr>
-            <p:spPr>
-              <a:xfrm>
-                <a:off x="7040880" y="5270500"/>
-                <a:ext cx="2478351" cy="293370"/>
-              </a:xfrm>
-              <a:prstGeom prst="rect">
-                <a:avLst/>
-              </a:prstGeom>
-              <a:noFill/>
-              <a:ln>
-                <a:noFill/>
-              </a:ln>
-            </p:spPr>
-            <p:txBody>
-              <a:bodyPr wrap="none" lIns="0" tIns="0" rIns="0" bIns="0" anchor="t" anchorCtr="0">
-                <a:spAutoFit/>
-              </a:bodyPr>
-              <a:lstStyle/>
-              <a:p>
-                <a:pPr algn="l"/>
-                <a:r>
-                  <a:rPr lang="en" sz="1500" dirty="0">
-                    <a:solidFill>
-                      <a:schemeClr val="accent1"/>
-                    </a:solidFill>
-                    <a:latin typeface="Consolas"/>
-                    <a:ea typeface="Consolas"/>
-                    <a:cs typeface="Consolas"/>
-                  </a:rPr>
-                  <a:t>send isBuyNowAvailable</a:t>
-                </a:r>
-              </a:p>
-            </p:txBody>
-          </p:sp>
-          <p:sp>
-            <p:nvSpPr>
-              <p:cNvPr id="54" name="TextBox 54"/>
-              <p:cNvSpPr txBox="1"/>
-              <p:nvPr/>
-            </p:nvSpPr>
-            <p:spPr>
-              <a:xfrm>
-                <a:off x="7040880" y="5575300"/>
-                <a:ext cx="1570101" cy="293370"/>
-              </a:xfrm>
-              <a:prstGeom prst="rect">
-                <a:avLst/>
-              </a:prstGeom>
-              <a:noFill/>
-              <a:ln>
-                <a:noFill/>
-              </a:ln>
-            </p:spPr>
-            <p:txBody>
-              <a:bodyPr wrap="none" lIns="0" tIns="0" rIns="0" bIns="0" anchor="t" anchorCtr="0">
-                <a:spAutoFit/>
-              </a:bodyPr>
-              <a:lstStyle/>
-              <a:p>
-                <a:pPr algn="l"/>
-                <a:r>
-                  <a:rPr lang="en" sz="1500" dirty="0">
-                    <a:solidFill>
-                      <a:schemeClr val="accent1"/>
-                    </a:solidFill>
-                    <a:latin typeface="Consolas"/>
-                    <a:ea typeface="Consolas"/>
-                    <a:cs typeface="Consolas"/>
-                  </a:rPr>
-                  <a:t>not the amount</a:t>
-                </a:r>
-              </a:p>
-            </p:txBody>
-          </p:sp>
-        </p:grpSp>
       </p:grpSp>
       <p:grpSp>
         <p:nvGrpSpPr>
-          <p:cNvPr id="59" name="footer"/>
+          <p:cNvPr id="24" name="fix-identity"/>
+          <p:cNvGrpSpPr/>
+          <p:nvPr/>
+        </p:nvGrpSpPr>
+        <p:grpSpPr>
+          <a:xfrm>
+            <a:off x="6388608" y="5099050"/>
+            <a:ext cx="4476737" cy="850265"/>
+            <a:chOff x="6388608" y="5099050"/>
+            <a:chExt cx="4476737" cy="850265"/>
+          </a:xfrm>
+        </p:grpSpPr>
+        <p:sp>
+          <p:nvSpPr>
+            <p:cNvPr id="22" name="TextBox 22"/>
+            <p:cNvSpPr txBox="1"/>
+            <p:nvPr/>
+          </p:nvSpPr>
+          <p:spPr>
+            <a:xfrm>
+              <a:off x="6388608" y="5099050"/>
+              <a:ext cx="3965361" cy="469392"/>
+            </a:xfrm>
+            <a:prstGeom prst="rect">
+              <a:avLst/>
+            </a:prstGeom>
+            <a:noFill/>
+            <a:ln>
+              <a:noFill/>
+            </a:ln>
+          </p:spPr>
+          <p:txBody>
+            <a:bodyPr wrap="none" lIns="0" tIns="0" rIns="0" bIns="0" anchor="t" anchorCtr="0">
+              <a:spAutoFit/>
+            </a:bodyPr>
+            <a:lstStyle/>
+            <a:p>
+              <a:pPr algn="l"/>
+              <a:r>
+                <a:rPr lang="en" sz="2400" b="1" dirty="0">
+                  <a:solidFill>
+                    <a:schemeClr val="accent2"/>
+                  </a:solidFill>
+                  <a:latin typeface="Consolas"/>
+                  <a:ea typeface="Consolas"/>
+                  <a:cs typeface="Consolas"/>
+                </a:rPr>
+                <a:t>Context.UserIdentifier</a:t>
+              </a:r>
+            </a:p>
+          </p:txBody>
+        </p:sp>
+        <p:sp>
+          <p:nvSpPr>
+            <p:cNvPr id="23" name="TextBox 23"/>
+            <p:cNvSpPr txBox="1"/>
+            <p:nvPr/>
+          </p:nvSpPr>
+          <p:spPr>
+            <a:xfrm>
+              <a:off x="6391275" y="5581650"/>
+              <a:ext cx="4474070" cy="367665"/>
+            </a:xfrm>
+            <a:prstGeom prst="rect">
+              <a:avLst/>
+            </a:prstGeom>
+            <a:noFill/>
+            <a:ln>
+              <a:noFill/>
+            </a:ln>
+          </p:spPr>
+          <p:txBody>
+            <a:bodyPr wrap="none" lIns="0" tIns="0" rIns="0" bIns="0" anchor="t" anchorCtr="0">
+              <a:spAutoFit/>
+            </a:bodyPr>
+            <a:lstStyle/>
+            <a:p>
+              <a:pPr algn="l"/>
+              <a:r>
+                <a:rPr lang="en" sz="1880" dirty="0">
+                  <a:solidFill>
+                    <a:schemeClr val="dk1"/>
+                  </a:solidFill>
+                  <a:latin typeface="+mn-lt"/>
+                  <a:ea typeface="+mn-ea"/>
+                  <a:cs typeface="+mn-cs"/>
+                </a:rPr>
+                <a:t>Use the caller’s ID; remove the client ID.</a:t>
+              </a:r>
+            </a:p>
+          </p:txBody>
+        </p:sp>
+      </p:grpSp>
+      <p:grpSp>
+        <p:nvGrpSpPr>
+          <p:cNvPr id="27" name="footer"/>
           <p:cNvGrpSpPr/>
           <p:nvPr/>
         </p:nvGrpSpPr>
@@ -10192,14 +8573,14 @@
         </p:grpSpPr>
         <p:sp>
           <p:nvSpPr>
-            <p:cNvPr id="57" name="TextBox 57"/>
+            <p:cNvPr id="25" name="TextBox 25"/>
             <p:cNvSpPr txBox="1"/>
             <p:nvPr/>
           </p:nvSpPr>
           <p:spPr>
             <a:xfrm>
               <a:off x="603504" y="6362700"/>
-              <a:ext cx="5773962" cy="234696"/>
+              <a:ext cx="2449163" cy="234696"/>
             </a:xfrm>
             <a:prstGeom prst="rect">
               <a:avLst/>
@@ -10225,14 +8606,14 @@
                   <a:ea typeface="+mn-ea"/>
                   <a:cs typeface="+mn-cs"/>
                 </a:rPr>
-                <a:t>SignalR — More Than WebSocket · inferred from code, not tested on production</a:t>
+                <a:t>SignalR — More Than WebSocket</a:t>
               </a:r>
             </a:p>
           </p:txBody>
         </p:sp>
         <p:sp>
           <p:nvSpPr>
-            <p:cNvPr id="58" name="TextBox 58"/>
+            <p:cNvPr id="26" name="TextBox 26"/>
             <p:cNvSpPr txBox="1"/>
             <p:nvPr/>
           </p:nvSpPr>
@@ -10315,10 +8696,10 @@
         </p:nvGrpSpPr>
         <p:grpSpPr>
           <a:xfrm>
-            <a:off x="590550" y="609600"/>
-            <a:ext cx="6717988" cy="1000125"/>
-            <a:chOff x="590550" y="609600"/>
-            <a:chExt cx="6717988" cy="1000125"/>
+            <a:off x="590550" y="571500"/>
+            <a:ext cx="6463002" cy="1038225"/>
+            <a:chOff x="590550" y="571500"/>
+            <a:chExt cx="6463002" cy="1038225"/>
           </a:xfrm>
         </p:grpSpPr>
         <p:sp>
@@ -10329,8 +8710,8 @@
           </p:nvSpPr>
           <p:spPr>
             <a:xfrm>
-              <a:off x="601980" y="609600"/>
-              <a:ext cx="2228150" cy="293370"/>
+              <a:off x="600456" y="571500"/>
+              <a:ext cx="3418060" cy="352044"/>
             </a:xfrm>
             <a:prstGeom prst="rect">
               <a:avLst/>
@@ -10348,7 +8729,7 @@
             <a:p>
               <a:pPr algn="l"/>
               <a:r>
-                <a:rPr lang="en" sz="1500" b="1" dirty="0">
+                <a:rPr lang="en" sz="1800" b="1" dirty="0">
                   <a:solidFill>
                     <a:schemeClr val="accent2"/>
                   </a:solidFill>
@@ -10356,7 +8737,7 @@
                   <a:ea typeface="+mn-ea"/>
                   <a:cs typeface="+mn-cs"/>
                 </a:rPr>
-                <a:t>4 · What should we fix?</a:t>
+                <a:t>4 · Best practices: Do &amp; Avoid</a:t>
               </a:r>
             </a:p>
           </p:txBody>
@@ -10370,7 +8751,7 @@
           <p:spPr>
             <a:xfrm>
               <a:off x="590550" y="876300"/>
-              <a:ext cx="6717988" cy="733425"/>
+              <a:ext cx="6463002" cy="733425"/>
             </a:xfrm>
             <a:prstGeom prst="rect">
               <a:avLst/>
@@ -10396,7 +8777,7 @@
                   <a:ea typeface="+mj-ea"/>
                   <a:cs typeface="+mj-cs"/>
                 </a:rPr>
-                <a:t>Seven habits for the next hub</a:t>
+                <a:t>Three rules for the next hub</a:t>
               </a:r>
             </a:p>
           </p:txBody>
@@ -10404,16 +8785,16 @@
       </p:grpSp>
       <p:grpSp>
         <p:nvGrpSpPr>
-          <p:cNvPr id="23" name="do-list"/>
+          <p:cNvPr id="12" name="do-list"/>
           <p:cNvGrpSpPr/>
           <p:nvPr/>
         </p:nvGrpSpPr>
         <p:grpSpPr>
           <a:xfrm>
-            <a:off x="595122" y="1797050"/>
-            <a:ext cx="6720078" cy="4227068"/>
-            <a:chOff x="595122" y="1797050"/>
-            <a:chExt cx="6720078" cy="4227068"/>
+            <a:off x="594360" y="1955800"/>
+            <a:ext cx="5262052" cy="3937381"/>
+            <a:chOff x="594360" y="1955800"/>
+            <a:chExt cx="5262052" cy="3937381"/>
           </a:xfrm>
         </p:grpSpPr>
         <p:sp>
@@ -10424,8 +8805,8 @@
           </p:nvSpPr>
           <p:spPr>
             <a:xfrm>
-              <a:off x="595122" y="1797050"/>
-              <a:ext cx="564127" cy="557403"/>
+              <a:off x="594360" y="1955800"/>
+              <a:ext cx="593817" cy="586740"/>
             </a:xfrm>
             <a:prstGeom prst="rect">
               <a:avLst/>
@@ -10443,7 +8824,7 @@
             <a:p>
               <a:pPr algn="l"/>
               <a:r>
-                <a:rPr lang="en" sz="2850" dirty="0">
+                <a:rPr lang="en" sz="3000" dirty="0">
                   <a:solidFill>
                     <a:schemeClr val="accent2"/>
                   </a:solidFill>
@@ -10458,691 +8839,14 @@
         </p:sp>
         <p:sp>
           <p:nvSpPr>
-            <p:cNvPr id="6" name="Line 6"/>
-            <p:cNvSpPr/>
-            <p:nvPr/>
-          </p:nvSpPr>
-          <p:spPr>
-            <a:xfrm>
-              <a:off x="609600" y="2324100"/>
-              <a:ext cx="6705600" cy="9525"/>
-            </a:xfrm>
-            <a:custGeom>
-              <a:avLst/>
-              <a:gdLst/>
-              <a:ahLst/>
-              <a:cxnLst/>
-              <a:rect l="l" t="t" r="r" b="b"/>
-              <a:pathLst>
-                <a:path w="6705600" h="9525">
-                  <a:moveTo>
-                    <a:pt x="0" y="0"/>
-                  </a:moveTo>
-                  <a:lnTo>
-                    <a:pt x="6705600" y="0"/>
-                  </a:lnTo>
-                </a:path>
-              </a:pathLst>
-            </a:custGeom>
-            <a:noFill/>
-            <a:ln w="19050">
-              <a:solidFill>
-                <a:schemeClr val="accent2"/>
-              </a:solidFill>
-            </a:ln>
-          </p:spPr>
-        </p:sp>
-        <p:grpSp>
-          <p:nvGrpSpPr>
-            <p:cNvPr id="14" name="Group 14"/>
-            <p:cNvGrpSpPr/>
-            <p:nvPr/>
-          </p:nvGrpSpPr>
-          <p:grpSpPr>
-            <a:xfrm>
-              <a:off x="598932" y="2527300"/>
-              <a:ext cx="318173" cy="3496818"/>
-              <a:chOff x="598932" y="2527300"/>
-              <a:chExt cx="318173" cy="3496818"/>
-            </a:xfrm>
-          </p:grpSpPr>
-          <p:sp>
-            <p:nvSpPr>
-              <p:cNvPr id="7" name="TextBox 7"/>
-              <p:cNvSpPr txBox="1"/>
-              <p:nvPr/>
-            </p:nvSpPr>
-            <p:spPr>
-              <a:xfrm>
-                <a:off x="598932" y="2527300"/>
-                <a:ext cx="318173" cy="410718"/>
-              </a:xfrm>
-              <a:prstGeom prst="rect">
-                <a:avLst/>
-              </a:prstGeom>
-              <a:noFill/>
-              <a:ln>
-                <a:noFill/>
-              </a:ln>
-            </p:spPr>
-            <p:txBody>
-              <a:bodyPr wrap="none" lIns="0" tIns="0" rIns="0" bIns="0" anchor="t" anchorCtr="0">
-                <a:spAutoFit/>
-              </a:bodyPr>
-              <a:lstStyle/>
-              <a:p>
-                <a:pPr algn="l"/>
-                <a:r>
-                  <a:rPr lang="en" sz="2100" b="1" dirty="0">
-                    <a:solidFill>
-                      <a:schemeClr val="accent2"/>
-                    </a:solidFill>
-                    <a:latin typeface="+mn-lt"/>
-                    <a:ea typeface="+mn-ea"/>
-                    <a:cs typeface="+mn-cs"/>
-                  </a:rPr>
-                  <a:t>✓</a:t>
-                </a:r>
-              </a:p>
-            </p:txBody>
-          </p:sp>
-          <p:sp>
-            <p:nvSpPr>
-              <p:cNvPr id="8" name="TextBox 8"/>
-              <p:cNvSpPr txBox="1"/>
-              <p:nvPr/>
-            </p:nvSpPr>
-            <p:spPr>
-              <a:xfrm>
-                <a:off x="598932" y="3041650"/>
-                <a:ext cx="318173" cy="410718"/>
-              </a:xfrm>
-              <a:prstGeom prst="rect">
-                <a:avLst/>
-              </a:prstGeom>
-              <a:noFill/>
-              <a:ln>
-                <a:noFill/>
-              </a:ln>
-            </p:spPr>
-            <p:txBody>
-              <a:bodyPr wrap="none" lIns="0" tIns="0" rIns="0" bIns="0" anchor="t" anchorCtr="0">
-                <a:spAutoFit/>
-              </a:bodyPr>
-              <a:lstStyle/>
-              <a:p>
-                <a:pPr algn="l"/>
-                <a:r>
-                  <a:rPr lang="en" sz="2100" b="1" dirty="0">
-                    <a:solidFill>
-                      <a:schemeClr val="accent2"/>
-                    </a:solidFill>
-                    <a:latin typeface="+mn-lt"/>
-                    <a:ea typeface="+mn-ea"/>
-                    <a:cs typeface="+mn-cs"/>
-                  </a:rPr>
-                  <a:t>✓</a:t>
-                </a:r>
-              </a:p>
-            </p:txBody>
-          </p:sp>
-          <p:sp>
-            <p:nvSpPr>
-              <p:cNvPr id="9" name="TextBox 9"/>
-              <p:cNvSpPr txBox="1"/>
-              <p:nvPr/>
-            </p:nvSpPr>
-            <p:spPr>
-              <a:xfrm>
-                <a:off x="598932" y="3556000"/>
-                <a:ext cx="318173" cy="410718"/>
-              </a:xfrm>
-              <a:prstGeom prst="rect">
-                <a:avLst/>
-              </a:prstGeom>
-              <a:noFill/>
-              <a:ln>
-                <a:noFill/>
-              </a:ln>
-            </p:spPr>
-            <p:txBody>
-              <a:bodyPr wrap="none" lIns="0" tIns="0" rIns="0" bIns="0" anchor="t" anchorCtr="0">
-                <a:spAutoFit/>
-              </a:bodyPr>
-              <a:lstStyle/>
-              <a:p>
-                <a:pPr algn="l"/>
-                <a:r>
-                  <a:rPr lang="en" sz="2100" b="1" dirty="0">
-                    <a:solidFill>
-                      <a:schemeClr val="accent2"/>
-                    </a:solidFill>
-                    <a:latin typeface="+mn-lt"/>
-                    <a:ea typeface="+mn-ea"/>
-                    <a:cs typeface="+mn-cs"/>
-                  </a:rPr>
-                  <a:t>✓</a:t>
-                </a:r>
-              </a:p>
-            </p:txBody>
-          </p:sp>
-          <p:sp>
-            <p:nvSpPr>
-              <p:cNvPr id="10" name="TextBox 10"/>
-              <p:cNvSpPr txBox="1"/>
-              <p:nvPr/>
-            </p:nvSpPr>
-            <p:spPr>
-              <a:xfrm>
-                <a:off x="598932" y="4070350"/>
-                <a:ext cx="318173" cy="410718"/>
-              </a:xfrm>
-              <a:prstGeom prst="rect">
-                <a:avLst/>
-              </a:prstGeom>
-              <a:noFill/>
-              <a:ln>
-                <a:noFill/>
-              </a:ln>
-            </p:spPr>
-            <p:txBody>
-              <a:bodyPr wrap="none" lIns="0" tIns="0" rIns="0" bIns="0" anchor="t" anchorCtr="0">
-                <a:spAutoFit/>
-              </a:bodyPr>
-              <a:lstStyle/>
-              <a:p>
-                <a:pPr algn="l"/>
-                <a:r>
-                  <a:rPr lang="en" sz="2100" b="1" dirty="0">
-                    <a:solidFill>
-                      <a:schemeClr val="accent2"/>
-                    </a:solidFill>
-                    <a:latin typeface="+mn-lt"/>
-                    <a:ea typeface="+mn-ea"/>
-                    <a:cs typeface="+mn-cs"/>
-                  </a:rPr>
-                  <a:t>✓</a:t>
-                </a:r>
-              </a:p>
-            </p:txBody>
-          </p:sp>
-          <p:sp>
-            <p:nvSpPr>
-              <p:cNvPr id="11" name="TextBox 11"/>
-              <p:cNvSpPr txBox="1"/>
-              <p:nvPr/>
-            </p:nvSpPr>
-            <p:spPr>
-              <a:xfrm>
-                <a:off x="598932" y="4584700"/>
-                <a:ext cx="318173" cy="410718"/>
-              </a:xfrm>
-              <a:prstGeom prst="rect">
-                <a:avLst/>
-              </a:prstGeom>
-              <a:noFill/>
-              <a:ln>
-                <a:noFill/>
-              </a:ln>
-            </p:spPr>
-            <p:txBody>
-              <a:bodyPr wrap="none" lIns="0" tIns="0" rIns="0" bIns="0" anchor="t" anchorCtr="0">
-                <a:spAutoFit/>
-              </a:bodyPr>
-              <a:lstStyle/>
-              <a:p>
-                <a:pPr algn="l"/>
-                <a:r>
-                  <a:rPr lang="en" sz="2100" b="1" dirty="0">
-                    <a:solidFill>
-                      <a:schemeClr val="accent2"/>
-                    </a:solidFill>
-                    <a:latin typeface="+mn-lt"/>
-                    <a:ea typeface="+mn-ea"/>
-                    <a:cs typeface="+mn-cs"/>
-                  </a:rPr>
-                  <a:t>✓</a:t>
-                </a:r>
-              </a:p>
-            </p:txBody>
-          </p:sp>
-          <p:sp>
-            <p:nvSpPr>
-              <p:cNvPr id="12" name="TextBox 12"/>
-              <p:cNvSpPr txBox="1"/>
-              <p:nvPr/>
-            </p:nvSpPr>
-            <p:spPr>
-              <a:xfrm>
-                <a:off x="598932" y="5099050"/>
-                <a:ext cx="318173" cy="410718"/>
-              </a:xfrm>
-              <a:prstGeom prst="rect">
-                <a:avLst/>
-              </a:prstGeom>
-              <a:noFill/>
-              <a:ln>
-                <a:noFill/>
-              </a:ln>
-            </p:spPr>
-            <p:txBody>
-              <a:bodyPr wrap="none" lIns="0" tIns="0" rIns="0" bIns="0" anchor="t" anchorCtr="0">
-                <a:spAutoFit/>
-              </a:bodyPr>
-              <a:lstStyle/>
-              <a:p>
-                <a:pPr algn="l"/>
-                <a:r>
-                  <a:rPr lang="en" sz="2100" b="1" dirty="0">
-                    <a:solidFill>
-                      <a:schemeClr val="accent2"/>
-                    </a:solidFill>
-                    <a:latin typeface="+mn-lt"/>
-                    <a:ea typeface="+mn-ea"/>
-                    <a:cs typeface="+mn-cs"/>
-                  </a:rPr>
-                  <a:t>✓</a:t>
-                </a:r>
-              </a:p>
-            </p:txBody>
-          </p:sp>
-          <p:sp>
-            <p:nvSpPr>
-              <p:cNvPr id="13" name="TextBox 13"/>
-              <p:cNvSpPr txBox="1"/>
-              <p:nvPr/>
-            </p:nvSpPr>
-            <p:spPr>
-              <a:xfrm>
-                <a:off x="598932" y="5613400"/>
-                <a:ext cx="318173" cy="410718"/>
-              </a:xfrm>
-              <a:prstGeom prst="rect">
-                <a:avLst/>
-              </a:prstGeom>
-              <a:noFill/>
-              <a:ln>
-                <a:noFill/>
-              </a:ln>
-            </p:spPr>
-            <p:txBody>
-              <a:bodyPr wrap="none" lIns="0" tIns="0" rIns="0" bIns="0" anchor="t" anchorCtr="0">
-                <a:spAutoFit/>
-              </a:bodyPr>
-              <a:lstStyle/>
-              <a:p>
-                <a:pPr algn="l"/>
-                <a:r>
-                  <a:rPr lang="en" sz="2100" b="1" dirty="0">
-                    <a:solidFill>
-                      <a:schemeClr val="accent2"/>
-                    </a:solidFill>
-                    <a:latin typeface="+mn-lt"/>
-                    <a:ea typeface="+mn-ea"/>
-                    <a:cs typeface="+mn-cs"/>
-                  </a:rPr>
-                  <a:t>✓</a:t>
-                </a:r>
-              </a:p>
-            </p:txBody>
-          </p:sp>
-        </p:grpSp>
-        <p:grpSp>
-          <p:nvGrpSpPr>
-            <p:cNvPr id="22" name="Group 22"/>
-            <p:cNvGrpSpPr/>
-            <p:nvPr/>
-          </p:nvGrpSpPr>
-          <p:grpSpPr>
-            <a:xfrm>
-              <a:off x="979932" y="2527300"/>
-              <a:ext cx="5597652" cy="3496818"/>
-              <a:chOff x="979932" y="2527300"/>
-              <a:chExt cx="5597652" cy="3496818"/>
-            </a:xfrm>
-          </p:grpSpPr>
-          <p:sp>
-            <p:nvSpPr>
-              <p:cNvPr id="15" name="TextBox 15"/>
-              <p:cNvSpPr txBox="1"/>
-              <p:nvPr/>
-            </p:nvSpPr>
-            <p:spPr>
-              <a:xfrm>
-                <a:off x="979932" y="2527300"/>
-                <a:ext cx="5033236" cy="410718"/>
-              </a:xfrm>
-              <a:prstGeom prst="rect">
-                <a:avLst/>
-              </a:prstGeom>
-              <a:noFill/>
-              <a:ln>
-                <a:noFill/>
-              </a:ln>
-            </p:spPr>
-            <p:txBody>
-              <a:bodyPr wrap="none" lIns="0" tIns="0" rIns="0" bIns="0" anchor="t" anchorCtr="0">
-                <a:spAutoFit/>
-              </a:bodyPr>
-              <a:lstStyle/>
-              <a:p>
-                <a:pPr algn="l"/>
-                <a:r>
-                  <a:rPr lang="en" sz="2100" dirty="0">
-                    <a:solidFill>
-                      <a:schemeClr val="dk1"/>
-                    </a:solidFill>
-                    <a:latin typeface="+mn-lt"/>
-                    <a:ea typeface="+mn-ea"/>
-                    <a:cs typeface="+mn-cs"/>
-                  </a:rPr>
-                  <a:t>Groups per event or item, not Clients.All</a:t>
-                </a:r>
-              </a:p>
-            </p:txBody>
-          </p:sp>
-          <p:sp>
-            <p:nvSpPr>
-              <p:cNvPr id="16" name="TextBox 16"/>
-              <p:cNvSpPr txBox="1"/>
-              <p:nvPr/>
-            </p:nvSpPr>
-            <p:spPr>
-              <a:xfrm>
-                <a:off x="979932" y="3041650"/>
-                <a:ext cx="5597652" cy="410718"/>
-              </a:xfrm>
-              <a:prstGeom prst="rect">
-                <a:avLst/>
-              </a:prstGeom>
-              <a:noFill/>
-              <a:ln>
-                <a:noFill/>
-              </a:ln>
-            </p:spPr>
-            <p:txBody>
-              <a:bodyPr wrap="none" lIns="0" tIns="0" rIns="0" bIns="0" anchor="t" anchorCtr="0">
-                <a:spAutoFit/>
-              </a:bodyPr>
-              <a:lstStyle/>
-              <a:p>
-                <a:pPr algn="l"/>
-                <a:r>
-                  <a:rPr lang="en" sz="2100" dirty="0">
-                    <a:solidFill>
-                      <a:schemeClr val="dk1"/>
-                    </a:solidFill>
-                    <a:latin typeface="+mn-lt"/>
-                    <a:ea typeface="+mn-ea"/>
-                    <a:cs typeface="+mn-cs"/>
-                  </a:rPr>
-                  <a:t>Take identity from Context, never arguments</a:t>
-                </a:r>
-              </a:p>
-            </p:txBody>
-          </p:sp>
-          <p:sp>
-            <p:nvSpPr>
-              <p:cNvPr id="17" name="TextBox 17"/>
-              <p:cNvSpPr txBox="1"/>
-              <p:nvPr/>
-            </p:nvSpPr>
-            <p:spPr>
-              <a:xfrm>
-                <a:off x="979932" y="3556000"/>
-                <a:ext cx="4858108" cy="410718"/>
-              </a:xfrm>
-              <a:prstGeom prst="rect">
-                <a:avLst/>
-              </a:prstGeom>
-              <a:noFill/>
-              <a:ln>
-                <a:noFill/>
-              </a:ln>
-            </p:spPr>
-            <p:txBody>
-              <a:bodyPr wrap="none" lIns="0" tIns="0" rIns="0" bIns="0" anchor="t" anchorCtr="0">
-                <a:spAutoFit/>
-              </a:bodyPr>
-              <a:lstStyle/>
-              <a:p>
-                <a:pPr algn="l"/>
-                <a:r>
-                  <a:rPr lang="en" sz="2100" dirty="0">
-                    <a:solidFill>
-                      <a:schemeClr val="dk1"/>
-                    </a:solidFill>
-                    <a:latin typeface="+mn-lt"/>
-                    <a:ea typeface="+mn-ea"/>
-                    <a:cs typeface="+mn-cs"/>
-                  </a:rPr>
-                  <a:t>Broadcast only what everyone may see</a:t>
-                </a:r>
-              </a:p>
-            </p:txBody>
-          </p:sp>
-          <p:sp>
-            <p:nvSpPr>
-              <p:cNvPr id="18" name="TextBox 18"/>
-              <p:cNvSpPr txBox="1"/>
-              <p:nvPr/>
-            </p:nvSpPr>
-            <p:spPr>
-              <a:xfrm>
-                <a:off x="979932" y="4070350"/>
-                <a:ext cx="4180040" cy="410718"/>
-              </a:xfrm>
-              <a:prstGeom prst="rect">
-                <a:avLst/>
-              </a:prstGeom>
-              <a:noFill/>
-              <a:ln>
-                <a:noFill/>
-              </a:ln>
-            </p:spPr>
-            <p:txBody>
-              <a:bodyPr wrap="none" lIns="0" tIns="0" rIns="0" bIns="0" anchor="t" anchorCtr="0">
-                <a:spAutoFit/>
-              </a:bodyPr>
-              <a:lstStyle/>
-              <a:p>
-                <a:pPr algn="l"/>
-                <a:r>
-                  <a:rPr lang="en" sz="2100" dirty="0">
-                    <a:solidFill>
-                      <a:schemeClr val="dk1"/>
-                    </a:solidFill>
-                    <a:latin typeface="+mn-lt"/>
-                    <a:ea typeface="+mn-ea"/>
-                    <a:cs typeface="+mn-cs"/>
-                  </a:rPr>
-                  <a:t>Resync state after onreconnected</a:t>
-                </a:r>
-              </a:p>
-            </p:txBody>
-          </p:sp>
-          <p:sp>
-            <p:nvSpPr>
-              <p:cNvPr id="19" name="TextBox 19"/>
-              <p:cNvSpPr txBox="1"/>
-              <p:nvPr/>
-            </p:nvSpPr>
-            <p:spPr>
-              <a:xfrm>
-                <a:off x="979932" y="4584700"/>
-                <a:ext cx="4548999" cy="410718"/>
-              </a:xfrm>
-              <a:prstGeom prst="rect">
-                <a:avLst/>
-              </a:prstGeom>
-              <a:noFill/>
-              <a:ln>
-                <a:noFill/>
-              </a:ln>
-            </p:spPr>
-            <p:txBody>
-              <a:bodyPr wrap="none" lIns="0" tIns="0" rIns="0" bIns="0" anchor="t" anchorCtr="0">
-                <a:spAutoFit/>
-              </a:bodyPr>
-              <a:lstStyle/>
-              <a:p>
-                <a:pPr algn="l"/>
-                <a:r>
-                  <a:rPr lang="en" sz="2100" dirty="0">
-                    <a:solidFill>
-                      <a:schemeClr val="dk1"/>
-                    </a:solidFill>
-                    <a:latin typeface="+mn-lt"/>
-                    <a:ea typeface="+mn-ea"/>
-                    <a:cs typeface="+mn-cs"/>
-                  </a:rPr>
-                  <a:t>Detailed errors in Development only</a:t>
-                </a:r>
-              </a:p>
-            </p:txBody>
-          </p:sp>
-          <p:sp>
-            <p:nvSpPr>
-              <p:cNvPr id="20" name="TextBox 20"/>
-              <p:cNvSpPr txBox="1"/>
-              <p:nvPr/>
-            </p:nvSpPr>
-            <p:spPr>
-              <a:xfrm>
-                <a:off x="979932" y="5099050"/>
-                <a:ext cx="4797924" cy="410718"/>
-              </a:xfrm>
-              <a:prstGeom prst="rect">
-                <a:avLst/>
-              </a:prstGeom>
-              <a:noFill/>
-              <a:ln>
-                <a:noFill/>
-              </a:ln>
-            </p:spPr>
-            <p:txBody>
-              <a:bodyPr wrap="none" lIns="0" tIns="0" rIns="0" bIns="0" anchor="t" anchorCtr="0">
-                <a:spAutoFit/>
-              </a:bodyPr>
-              <a:lstStyle/>
-              <a:p>
-                <a:pPr algn="l"/>
-                <a:r>
-                  <a:rPr lang="en" sz="2100" dirty="0">
-                    <a:solidFill>
-                      <a:schemeClr val="dk1"/>
-                    </a:solidFill>
-                    <a:latin typeface="+mn-lt"/>
-                    <a:ea typeface="+mn-ea"/>
-                    <a:cs typeface="+mn-cs"/>
-                  </a:rPr>
-                  <a:t>Keep hub methods short and stateless</a:t>
-                </a:r>
-              </a:p>
-            </p:txBody>
-          </p:sp>
-          <p:sp>
-            <p:nvSpPr>
-              <p:cNvPr id="21" name="TextBox 21"/>
-              <p:cNvSpPr txBox="1"/>
-              <p:nvPr/>
-            </p:nvSpPr>
-            <p:spPr>
-              <a:xfrm>
-                <a:off x="979932" y="5613400"/>
-                <a:ext cx="5328929" cy="410718"/>
-              </a:xfrm>
-              <a:prstGeom prst="rect">
-                <a:avLst/>
-              </a:prstGeom>
-              <a:noFill/>
-              <a:ln>
-                <a:noFill/>
-              </a:ln>
-            </p:spPr>
-            <p:txBody>
-              <a:bodyPr wrap="none" lIns="0" tIns="0" rIns="0" bIns="0" anchor="t" anchorCtr="0">
-                <a:spAutoFit/>
-              </a:bodyPr>
-              <a:lstStyle/>
-              <a:p>
-                <a:pPr algn="l"/>
-                <a:r>
-                  <a:rPr lang="en" sz="2100" dirty="0">
-                    <a:solidFill>
-                      <a:schemeClr val="dk1"/>
-                    </a:solidFill>
-                    <a:latin typeface="+mn-lt"/>
-                    <a:ea typeface="+mn-ea"/>
-                    <a:cs typeface="+mn-cs"/>
-                  </a:rPr>
-                  <a:t>Plan scale-out: sticky sessions + backplane</a:t>
-                </a:r>
-              </a:p>
-            </p:txBody>
-          </p:sp>
-        </p:grpSp>
-      </p:grpSp>
-      <p:sp>
-        <p:nvSpPr>
-          <p:cNvPr id="24" name="Line 24"/>
-          <p:cNvSpPr/>
-          <p:nvPr/>
-        </p:nvSpPr>
-        <p:spPr>
-          <a:xfrm>
-            <a:off x="7620000" y="1809750"/>
-            <a:ext cx="9525" cy="4248150"/>
-          </a:xfrm>
-          <a:custGeom>
-            <a:avLst/>
-            <a:gdLst/>
-            <a:ahLst/>
-            <a:cxnLst/>
-            <a:rect l="l" t="t" r="r" b="b"/>
-            <a:pathLst>
-              <a:path w="9525" h="4248150">
-                <a:moveTo>
-                  <a:pt x="0" y="0"/>
-                </a:moveTo>
-                <a:lnTo>
-                  <a:pt x="0" y="4248150"/>
-                </a:lnTo>
-              </a:path>
-            </a:pathLst>
-          </a:custGeom>
-          <a:noFill/>
-          <a:ln w="9525">
-            <a:solidFill>
-              <a:schemeClr val="accent6"/>
-            </a:solidFill>
-          </a:ln>
-        </p:spPr>
-      </p:sp>
-      <p:grpSp>
-        <p:nvGrpSpPr>
-          <p:cNvPr id="36" name="avoid-list"/>
-          <p:cNvGrpSpPr/>
-          <p:nvPr/>
-        </p:nvGrpSpPr>
-        <p:grpSpPr>
-          <a:xfrm>
-            <a:off x="7910322" y="1797050"/>
-            <a:ext cx="3672078" cy="3929507"/>
-            <a:chOff x="7910322" y="1797050"/>
-            <a:chExt cx="3672078" cy="3929507"/>
-          </a:xfrm>
-        </p:grpSpPr>
-        <p:sp>
-          <p:nvSpPr>
-            <p:cNvPr id="25" name="TextBox 25"/>
+            <p:cNvPr id="6" name="TextBox 6"/>
             <p:cNvSpPr txBox="1"/>
             <p:nvPr/>
           </p:nvSpPr>
           <p:spPr>
             <a:xfrm>
-              <a:off x="7910322" y="1797050"/>
-              <a:ext cx="1081707" cy="557403"/>
+              <a:off x="598170" y="2730500"/>
+              <a:ext cx="3647851" cy="440055"/>
             </a:xfrm>
             <a:prstGeom prst="rect">
               <a:avLst/>
@@ -11160,360 +8864,29 @@
             <a:p>
               <a:pPr algn="l"/>
               <a:r>
-                <a:rPr lang="en" sz="2850" dirty="0">
-                  <a:solidFill>
-                    <a:srgbClr val="B36A13"/>
-                  </a:solidFill>
-                  <a:latin typeface="+mj-lt"/>
-                  <a:ea typeface="+mj-ea"/>
-                  <a:cs typeface="+mj-cs"/>
-                </a:rPr>
-                <a:t>Avoid</a:t>
+                <a:rPr lang="en" sz="2250" b="1" dirty="0">
+                  <a:solidFill>
+                    <a:schemeClr val="accent2"/>
+                  </a:solidFill>
+                  <a:latin typeface="+mn-lt"/>
+                  <a:ea typeface="+mn-ea"/>
+                  <a:cs typeface="+mn-cs"/>
+                </a:rPr>
+                <a:t>Target the right audience</a:t>
               </a:r>
             </a:p>
           </p:txBody>
         </p:sp>
         <p:sp>
           <p:nvSpPr>
-            <p:cNvPr id="26" name="Line 26"/>
-            <p:cNvSpPr/>
-            <p:nvPr/>
-          </p:nvSpPr>
-          <p:spPr>
-            <a:xfrm>
-              <a:off x="7924800" y="2324100"/>
-              <a:ext cx="3657600" cy="9525"/>
-            </a:xfrm>
-            <a:custGeom>
-              <a:avLst/>
-              <a:gdLst/>
-              <a:ahLst/>
-              <a:cxnLst/>
-              <a:rect l="l" t="t" r="r" b="b"/>
-              <a:pathLst>
-                <a:path w="3657600" h="9525">
-                  <a:moveTo>
-                    <a:pt x="0" y="0"/>
-                  </a:moveTo>
-                  <a:lnTo>
-                    <a:pt x="3657600" y="0"/>
-                  </a:lnTo>
-                </a:path>
-              </a:pathLst>
-            </a:custGeom>
-            <a:noFill/>
-            <a:ln w="19050">
-              <a:solidFill>
-                <a:srgbClr val="B36A13"/>
-              </a:solidFill>
-            </a:ln>
-          </p:spPr>
-        </p:sp>
-        <p:grpSp>
-          <p:nvGrpSpPr>
-            <p:cNvPr id="30" name="Group 30"/>
-            <p:cNvGrpSpPr/>
-            <p:nvPr/>
-          </p:nvGrpSpPr>
-          <p:grpSpPr>
-            <a:xfrm>
-              <a:off x="7914132" y="2527300"/>
-              <a:ext cx="318173" cy="1439418"/>
-              <a:chOff x="7914132" y="2527300"/>
-              <a:chExt cx="318173" cy="1439418"/>
-            </a:xfrm>
-          </p:grpSpPr>
-          <p:sp>
-            <p:nvSpPr>
-              <p:cNvPr id="27" name="TextBox 27"/>
-              <p:cNvSpPr txBox="1"/>
-              <p:nvPr/>
-            </p:nvSpPr>
-            <p:spPr>
-              <a:xfrm>
-                <a:off x="7914132" y="2527300"/>
-                <a:ext cx="318173" cy="410718"/>
-              </a:xfrm>
-              <a:prstGeom prst="rect">
-                <a:avLst/>
-              </a:prstGeom>
-              <a:noFill/>
-              <a:ln>
-                <a:noFill/>
-              </a:ln>
-            </p:spPr>
-            <p:txBody>
-              <a:bodyPr wrap="none" lIns="0" tIns="0" rIns="0" bIns="0" anchor="t" anchorCtr="0">
-                <a:spAutoFit/>
-              </a:bodyPr>
-              <a:lstStyle/>
-              <a:p>
-                <a:pPr algn="l"/>
-                <a:r>
-                  <a:rPr lang="en" sz="2100" b="1" dirty="0">
-                    <a:solidFill>
-                      <a:srgbClr val="B36A13"/>
-                    </a:solidFill>
-                    <a:latin typeface="+mn-lt"/>
-                    <a:ea typeface="+mn-ea"/>
-                    <a:cs typeface="+mn-cs"/>
-                  </a:rPr>
-                  <a:t>✕</a:t>
-                </a:r>
-              </a:p>
-            </p:txBody>
-          </p:sp>
-          <p:sp>
-            <p:nvSpPr>
-              <p:cNvPr id="28" name="TextBox 28"/>
-              <p:cNvSpPr txBox="1"/>
-              <p:nvPr/>
-            </p:nvSpPr>
-            <p:spPr>
-              <a:xfrm>
-                <a:off x="7914132" y="3041650"/>
-                <a:ext cx="318173" cy="410718"/>
-              </a:xfrm>
-              <a:prstGeom prst="rect">
-                <a:avLst/>
-              </a:prstGeom>
-              <a:noFill/>
-              <a:ln>
-                <a:noFill/>
-              </a:ln>
-            </p:spPr>
-            <p:txBody>
-              <a:bodyPr wrap="none" lIns="0" tIns="0" rIns="0" bIns="0" anchor="t" anchorCtr="0">
-                <a:spAutoFit/>
-              </a:bodyPr>
-              <a:lstStyle/>
-              <a:p>
-                <a:pPr algn="l"/>
-                <a:r>
-                  <a:rPr lang="en" sz="2100" b="1" dirty="0">
-                    <a:solidFill>
-                      <a:srgbClr val="B36A13"/>
-                    </a:solidFill>
-                    <a:latin typeface="+mn-lt"/>
-                    <a:ea typeface="+mn-ea"/>
-                    <a:cs typeface="+mn-cs"/>
-                  </a:rPr>
-                  <a:t>✕</a:t>
-                </a:r>
-              </a:p>
-            </p:txBody>
-          </p:sp>
-          <p:sp>
-            <p:nvSpPr>
-              <p:cNvPr id="29" name="TextBox 29"/>
-              <p:cNvSpPr txBox="1"/>
-              <p:nvPr/>
-            </p:nvSpPr>
-            <p:spPr>
-              <a:xfrm>
-                <a:off x="7914132" y="3556000"/>
-                <a:ext cx="318173" cy="410718"/>
-              </a:xfrm>
-              <a:prstGeom prst="rect">
-                <a:avLst/>
-              </a:prstGeom>
-              <a:noFill/>
-              <a:ln>
-                <a:noFill/>
-              </a:ln>
-            </p:spPr>
-            <p:txBody>
-              <a:bodyPr wrap="none" lIns="0" tIns="0" rIns="0" bIns="0" anchor="t" anchorCtr="0">
-                <a:spAutoFit/>
-              </a:bodyPr>
-              <a:lstStyle/>
-              <a:p>
-                <a:pPr algn="l"/>
-                <a:r>
-                  <a:rPr lang="en" sz="2100" b="1" dirty="0">
-                    <a:solidFill>
-                      <a:srgbClr val="B36A13"/>
-                    </a:solidFill>
-                    <a:latin typeface="+mn-lt"/>
-                    <a:ea typeface="+mn-ea"/>
-                    <a:cs typeface="+mn-cs"/>
-                  </a:rPr>
-                  <a:t>✕</a:t>
-                </a:r>
-              </a:p>
-            </p:txBody>
-          </p:sp>
-        </p:grpSp>
-        <p:grpSp>
-          <p:nvGrpSpPr>
-            <p:cNvPr id="34" name="Group 34"/>
-            <p:cNvGrpSpPr/>
-            <p:nvPr/>
-          </p:nvGrpSpPr>
-          <p:grpSpPr>
-            <a:xfrm>
-              <a:off x="8295132" y="2527300"/>
-              <a:ext cx="3197899" cy="1782318"/>
-              <a:chOff x="8295132" y="2527300"/>
-              <a:chExt cx="3197899" cy="1782318"/>
-            </a:xfrm>
-          </p:grpSpPr>
-          <p:sp>
-            <p:nvSpPr>
-              <p:cNvPr id="31" name="TextBox 31"/>
-              <p:cNvSpPr txBox="1"/>
-              <p:nvPr/>
-            </p:nvSpPr>
-            <p:spPr>
-              <a:xfrm>
-                <a:off x="8295132" y="2527300"/>
-                <a:ext cx="3197899" cy="410718"/>
-              </a:xfrm>
-              <a:prstGeom prst="rect">
-                <a:avLst/>
-              </a:prstGeom>
-              <a:noFill/>
-              <a:ln>
-                <a:noFill/>
-              </a:ln>
-            </p:spPr>
-            <p:txBody>
-              <a:bodyPr wrap="none" lIns="0" tIns="0" rIns="0" bIns="0" anchor="t" anchorCtr="0">
-                <a:spAutoFit/>
-              </a:bodyPr>
-              <a:lstStyle/>
-              <a:p>
-                <a:pPr algn="l"/>
-                <a:r>
-                  <a:rPr lang="en" sz="2100" dirty="0">
-                    <a:solidFill>
-                      <a:schemeClr val="dk1"/>
-                    </a:solidFill>
-                    <a:latin typeface="+mn-lt"/>
-                    <a:ea typeface="+mn-ea"/>
-                    <a:cs typeface="+mn-cs"/>
-                  </a:rPr>
-                  <a:t>Trusting ids in arguments</a:t>
-                </a:r>
-              </a:p>
-            </p:txBody>
-          </p:sp>
-          <p:sp>
-            <p:nvSpPr>
-              <p:cNvPr id="32" name="TextBox 32"/>
-              <p:cNvSpPr txBox="1"/>
-              <p:nvPr/>
-            </p:nvSpPr>
-            <p:spPr>
-              <a:xfrm>
-                <a:off x="8295132" y="3041650"/>
-                <a:ext cx="2775587" cy="410718"/>
-              </a:xfrm>
-              <a:prstGeom prst="rect">
-                <a:avLst/>
-              </a:prstGeom>
-              <a:noFill/>
-              <a:ln>
-                <a:noFill/>
-              </a:ln>
-            </p:spPr>
-            <p:txBody>
-              <a:bodyPr wrap="none" lIns="0" tIns="0" rIns="0" bIns="0" anchor="t" anchorCtr="0">
-                <a:spAutoFit/>
-              </a:bodyPr>
-              <a:lstStyle/>
-              <a:p>
-                <a:pPr algn="l"/>
-                <a:r>
-                  <a:rPr lang="en" sz="2100" dirty="0">
-                    <a:solidFill>
-                      <a:schemeClr val="dk1"/>
-                    </a:solidFill>
-                    <a:latin typeface="+mn-lt"/>
-                    <a:ea typeface="+mn-ea"/>
-                    <a:cs typeface="+mn-cs"/>
-                  </a:rPr>
-                  <a:t>Leaking private values</a:t>
-                </a:r>
-              </a:p>
-            </p:txBody>
-          </p:sp>
-          <p:sp>
-            <p:nvSpPr>
-              <p:cNvPr id="33" name="TextBox 33"/>
-              <p:cNvSpPr txBox="1"/>
-              <p:nvPr/>
-            </p:nvSpPr>
-            <p:spPr>
-              <a:xfrm>
-                <a:off x="8295132" y="3556000"/>
-                <a:ext cx="2759625" cy="753618"/>
-              </a:xfrm>
-              <a:prstGeom prst="rect">
-                <a:avLst/>
-              </a:prstGeom>
-              <a:noFill/>
-              <a:ln>
-                <a:noFill/>
-              </a:ln>
-            </p:spPr>
-            <p:txBody>
-              <a:bodyPr wrap="none" lIns="0" tIns="0" rIns="0" bIns="0" anchor="t" anchorCtr="0">
-                <a:spAutoFit/>
-              </a:bodyPr>
-              <a:lstStyle/>
-              <a:p>
-                <a:pPr algn="l">
-                  <a:lnSpc>
-                    <a:spcPts val="2700"/>
-                  </a:lnSpc>
-                </a:pPr>
-                <a:r>
-                  <a:rPr lang="en" sz="2100" dirty="0">
-                    <a:solidFill>
-                      <a:schemeClr val="dk1"/>
-                    </a:solidFill>
-                    <a:latin typeface="+mn-lt"/>
-                    <a:ea typeface="+mn-ea"/>
-                    <a:cs typeface="+mn-cs"/>
-                  </a:rPr>
-                  <a:t>Assuming reconnect</a:t>
-                </a:r>
-                <a:br>
-                  <a:rPr lang="en" sz="2100" dirty="0">
-                    <a:solidFill>
-                      <a:schemeClr val="dk1"/>
-                    </a:solidFill>
-                    <a:latin typeface="+mn-lt"/>
-                    <a:ea typeface="+mn-ea"/>
-                    <a:cs typeface="+mn-cs"/>
-                  </a:rPr>
-                </a:br>
-                <a:r>
-                  <a:rPr lang="en" sz="2100" dirty="0">
-                    <a:solidFill>
-                      <a:schemeClr val="dk1"/>
-                    </a:solidFill>
-                    <a:latin typeface="+mn-lt"/>
-                    <a:ea typeface="+mn-ea"/>
-                    <a:cs typeface="+mn-cs"/>
-                  </a:rPr>
-                  <a:t>replays missed updates</a:t>
-                </a:r>
-              </a:p>
-            </p:txBody>
-          </p:sp>
-        </p:grpSp>
-        <p:sp>
-          <p:nvSpPr>
-            <p:cNvPr id="35" name="TextBox 35"/>
+            <p:cNvPr id="7" name="TextBox 7"/>
             <p:cNvSpPr txBox="1"/>
             <p:nvPr/>
           </p:nvSpPr>
           <p:spPr>
             <a:xfrm>
-              <a:off x="7916418" y="5118100"/>
-              <a:ext cx="2747410" cy="608457"/>
+              <a:off x="599694" y="3187700"/>
+              <a:ext cx="3503490" cy="381381"/>
             </a:xfrm>
             <a:prstGeom prst="rect">
               <a:avLst/>
@@ -11529,50 +8902,480 @@
             </a:bodyPr>
             <a:lstStyle/>
             <a:p>
-              <a:pPr algn="l">
-                <a:lnSpc>
-                  <a:spcPts val="2250"/>
-                </a:lnSpc>
-              </a:pPr>
+              <a:pPr algn="l"/>
               <a:r>
-                <a:rPr lang="en" sz="1650" dirty="0">
-                  <a:solidFill>
-                    <a:schemeClr val="accent5"/>
+                <a:rPr lang="en" sz="1950" dirty="0">
+                  <a:solidFill>
+                    <a:schemeClr val="dk1"/>
                   </a:solidFill>
                   <a:latin typeface="+mn-lt"/>
                   <a:ea typeface="+mn-ea"/>
                   <a:cs typeface="+mn-cs"/>
                 </a:rPr>
-                <a:t>Geronimo today: Clients.All,</a:t>
+                <a:t>Use Groups per event or item.</a:t>
               </a:r>
-              <a:br>
-                <a:rPr lang="en" sz="1650" dirty="0">
-                  <a:solidFill>
-                    <a:schemeClr val="accent5"/>
+            </a:p>
+          </p:txBody>
+        </p:sp>
+        <p:sp>
+          <p:nvSpPr>
+            <p:cNvPr id="8" name="TextBox 8"/>
+            <p:cNvSpPr txBox="1"/>
+            <p:nvPr/>
+          </p:nvSpPr>
+          <p:spPr>
+            <a:xfrm>
+              <a:off x="598170" y="3892550"/>
+              <a:ext cx="3795783" cy="440055"/>
+            </a:xfrm>
+            <a:prstGeom prst="rect">
+              <a:avLst/>
+            </a:prstGeom>
+            <a:noFill/>
+            <a:ln>
+              <a:noFill/>
+            </a:ln>
+          </p:spPr>
+          <p:txBody>
+            <a:bodyPr wrap="none" lIns="0" tIns="0" rIns="0" bIns="0" anchor="t" anchorCtr="0">
+              <a:spAutoFit/>
+            </a:bodyPr>
+            <a:lstStyle/>
+            <a:p>
+              <a:pPr algn="l"/>
+              <a:r>
+                <a:rPr lang="en" sz="2250" b="1" dirty="0">
+                  <a:solidFill>
+                    <a:schemeClr val="accent2"/>
                   </a:solidFill>
                   <a:latin typeface="+mn-lt"/>
                   <a:ea typeface="+mn-ea"/>
                   <a:cs typeface="+mn-cs"/>
                 </a:rPr>
-              </a:br>
+                <a:t>Use authenticated identity</a:t>
+              </a:r>
+            </a:p>
+          </p:txBody>
+        </p:sp>
+        <p:sp>
+          <p:nvSpPr>
+            <p:cNvPr id="9" name="TextBox 9"/>
+            <p:cNvSpPr txBox="1"/>
+            <p:nvPr/>
+          </p:nvSpPr>
+          <p:spPr>
+            <a:xfrm>
+              <a:off x="599694" y="4362450"/>
+              <a:ext cx="5256718" cy="381381"/>
+            </a:xfrm>
+            <a:prstGeom prst="rect">
+              <a:avLst/>
+            </a:prstGeom>
+            <a:noFill/>
+            <a:ln>
+              <a:noFill/>
+            </a:ln>
+          </p:spPr>
+          <p:txBody>
+            <a:bodyPr wrap="none" lIns="0" tIns="0" rIns="0" bIns="0" anchor="t" anchorCtr="0">
+              <a:spAutoFit/>
+            </a:bodyPr>
+            <a:lstStyle/>
+            <a:p>
+              <a:pPr algn="l"/>
               <a:r>
-                <a:rPr lang="en" sz="1650" dirty="0">
-                  <a:solidFill>
-                    <a:schemeClr val="accent5"/>
+                <a:rPr lang="en" sz="1950" dirty="0">
+                  <a:solidFill>
+                    <a:schemeClr val="dk1"/>
+                  </a:solidFill>
+                  <a:latin typeface="Consolas"/>
+                  <a:ea typeface="Consolas"/>
+                  <a:cs typeface="Consolas"/>
+                </a:rPr>
+                <a:t>[Authorize] + Context.UserIdentifier</a:t>
+              </a:r>
+            </a:p>
+          </p:txBody>
+        </p:sp>
+        <p:sp>
+          <p:nvSpPr>
+            <p:cNvPr id="10" name="TextBox 10"/>
+            <p:cNvSpPr txBox="1"/>
+            <p:nvPr/>
+          </p:nvSpPr>
+          <p:spPr>
+            <a:xfrm>
+              <a:off x="598170" y="5054600"/>
+              <a:ext cx="3510742" cy="440055"/>
+            </a:xfrm>
+            <a:prstGeom prst="rect">
+              <a:avLst/>
+            </a:prstGeom>
+            <a:noFill/>
+            <a:ln>
+              <a:noFill/>
+            </a:ln>
+          </p:spPr>
+          <p:txBody>
+            <a:bodyPr wrap="none" lIns="0" tIns="0" rIns="0" bIns="0" anchor="t" anchorCtr="0">
+              <a:spAutoFit/>
+            </a:bodyPr>
+            <a:lstStyle/>
+            <a:p>
+              <a:pPr algn="l"/>
+              <a:r>
+                <a:rPr lang="en" sz="2250" b="1" dirty="0">
+                  <a:solidFill>
+                    <a:schemeClr val="accent2"/>
                   </a:solidFill>
                   <a:latin typeface="+mn-lt"/>
                   <a:ea typeface="+mn-ea"/>
                   <a:cs typeface="+mn-cs"/>
                 </a:rPr>
-                <a:t>bidderId argument, no resync</a:t>
+                <a:t>Plan for multiple servers</a:t>
               </a:r>
             </a:p>
           </p:txBody>
         </p:sp>
+        <p:sp>
+          <p:nvSpPr>
+            <p:cNvPr id="11" name="TextBox 11"/>
+            <p:cNvSpPr txBox="1"/>
+            <p:nvPr/>
+          </p:nvSpPr>
+          <p:spPr>
+            <a:xfrm>
+              <a:off x="599694" y="5511800"/>
+              <a:ext cx="4962356" cy="381381"/>
+            </a:xfrm>
+            <a:prstGeom prst="rect">
+              <a:avLst/>
+            </a:prstGeom>
+            <a:noFill/>
+            <a:ln>
+              <a:noFill/>
+            </a:ln>
+          </p:spPr>
+          <p:txBody>
+            <a:bodyPr wrap="none" lIns="0" tIns="0" rIns="0" bIns="0" anchor="t" anchorCtr="0">
+              <a:spAutoFit/>
+            </a:bodyPr>
+            <a:lstStyle/>
+            <a:p>
+              <a:pPr algn="l"/>
+              <a:r>
+                <a:rPr lang="en" sz="1950" dirty="0">
+                  <a:solidFill>
+                    <a:schemeClr val="dk1"/>
+                  </a:solidFill>
+                  <a:latin typeface="+mn-lt"/>
+                  <a:ea typeface="+mn-ea"/>
+                  <a:cs typeface="+mn-cs"/>
+                </a:rPr>
+                <a:t>Backplane + sticky sessions where needed.</a:t>
+              </a:r>
+            </a:p>
+          </p:txBody>
+        </p:sp>
       </p:grpSp>
       <p:grpSp>
         <p:nvGrpSpPr>
-          <p:cNvPr id="39" name="footer"/>
+          <p:cNvPr id="20" name="avoid-list"/>
+          <p:cNvGrpSpPr/>
+          <p:nvPr/>
+        </p:nvGrpSpPr>
+        <p:grpSpPr>
+          <a:xfrm>
+            <a:off x="6690360" y="1955800"/>
+            <a:ext cx="4781816" cy="3937381"/>
+            <a:chOff x="6690360" y="1955800"/>
+            <a:chExt cx="4781816" cy="3937381"/>
+          </a:xfrm>
+        </p:grpSpPr>
+        <p:sp>
+          <p:nvSpPr>
+            <p:cNvPr id="13" name="TextBox 13"/>
+            <p:cNvSpPr txBox="1"/>
+            <p:nvPr/>
+          </p:nvSpPr>
+          <p:spPr>
+            <a:xfrm>
+              <a:off x="6690360" y="1955800"/>
+              <a:ext cx="1138639" cy="586740"/>
+            </a:xfrm>
+            <a:prstGeom prst="rect">
+              <a:avLst/>
+            </a:prstGeom>
+            <a:noFill/>
+            <a:ln>
+              <a:noFill/>
+            </a:ln>
+          </p:spPr>
+          <p:txBody>
+            <a:bodyPr wrap="none" lIns="0" tIns="0" rIns="0" bIns="0" anchor="t" anchorCtr="0">
+              <a:spAutoFit/>
+            </a:bodyPr>
+            <a:lstStyle/>
+            <a:p>
+              <a:pPr algn="l"/>
+              <a:r>
+                <a:rPr lang="en" sz="3000" dirty="0">
+                  <a:solidFill>
+                    <a:srgbClr val="B36A13"/>
+                  </a:solidFill>
+                  <a:latin typeface="+mj-lt"/>
+                  <a:ea typeface="+mj-ea"/>
+                  <a:cs typeface="+mj-cs"/>
+                </a:rPr>
+                <a:t>Avoid</a:t>
+              </a:r>
+            </a:p>
+          </p:txBody>
+        </p:sp>
+        <p:sp>
+          <p:nvSpPr>
+            <p:cNvPr id="14" name="TextBox 14"/>
+            <p:cNvSpPr txBox="1"/>
+            <p:nvPr/>
+          </p:nvSpPr>
+          <p:spPr>
+            <a:xfrm>
+              <a:off x="6694170" y="2730500"/>
+              <a:ext cx="3514690" cy="440055"/>
+            </a:xfrm>
+            <a:prstGeom prst="rect">
+              <a:avLst/>
+            </a:prstGeom>
+            <a:noFill/>
+            <a:ln>
+              <a:noFill/>
+            </a:ln>
+          </p:spPr>
+          <p:txBody>
+            <a:bodyPr wrap="none" lIns="0" tIns="0" rIns="0" bIns="0" anchor="t" anchorCtr="0">
+              <a:spAutoFit/>
+            </a:bodyPr>
+            <a:lstStyle/>
+            <a:p>
+              <a:pPr algn="l"/>
+              <a:r>
+                <a:rPr lang="en" sz="2250" b="1" dirty="0">
+                  <a:solidFill>
+                    <a:srgbClr val="B36A13"/>
+                  </a:solidFill>
+                  <a:latin typeface="+mn-lt"/>
+                  <a:ea typeface="+mn-ea"/>
+                  <a:cs typeface="+mn-cs"/>
+                </a:rPr>
+                <a:t>Broadcasting everything</a:t>
+              </a:r>
+            </a:p>
+          </p:txBody>
+        </p:sp>
+        <p:sp>
+          <p:nvSpPr>
+            <p:cNvPr id="15" name="TextBox 15"/>
+            <p:cNvSpPr txBox="1"/>
+            <p:nvPr/>
+          </p:nvSpPr>
+          <p:spPr>
+            <a:xfrm>
+              <a:off x="6695694" y="3187700"/>
+              <a:ext cx="4392332" cy="381381"/>
+            </a:xfrm>
+            <a:prstGeom prst="rect">
+              <a:avLst/>
+            </a:prstGeom>
+            <a:noFill/>
+            <a:ln>
+              <a:noFill/>
+            </a:ln>
+          </p:spPr>
+          <p:txBody>
+            <a:bodyPr wrap="none" lIns="0" tIns="0" rIns="0" bIns="0" anchor="t" anchorCtr="0">
+              <a:spAutoFit/>
+            </a:bodyPr>
+            <a:lstStyle/>
+            <a:p>
+              <a:pPr algn="l"/>
+              <a:r>
+                <a:rPr lang="en" sz="1950" dirty="0">
+                  <a:solidFill>
+                    <a:schemeClr val="dk1"/>
+                  </a:solidFill>
+                  <a:latin typeface="+mn-lt"/>
+                  <a:ea typeface="+mn-ea"/>
+                  <a:cs typeface="+mn-cs"/>
+                </a:rPr>
+                <a:t>Send only data the audience may see.</a:t>
+              </a:r>
+            </a:p>
+          </p:txBody>
+        </p:sp>
+        <p:sp>
+          <p:nvSpPr>
+            <p:cNvPr id="16" name="TextBox 16"/>
+            <p:cNvSpPr txBox="1"/>
+            <p:nvPr/>
+          </p:nvSpPr>
+          <p:spPr>
+            <a:xfrm>
+              <a:off x="6694170" y="3892550"/>
+              <a:ext cx="4778006" cy="440055"/>
+            </a:xfrm>
+            <a:prstGeom prst="rect">
+              <a:avLst/>
+            </a:prstGeom>
+            <a:noFill/>
+            <a:ln>
+              <a:noFill/>
+            </a:ln>
+          </p:spPr>
+          <p:txBody>
+            <a:bodyPr wrap="none" lIns="0" tIns="0" rIns="0" bIns="0" anchor="t" anchorCtr="0">
+              <a:spAutoFit/>
+            </a:bodyPr>
+            <a:lstStyle/>
+            <a:p>
+              <a:pPr algn="l"/>
+              <a:r>
+                <a:rPr lang="en" sz="2250" b="1" dirty="0">
+                  <a:solidFill>
+                    <a:srgbClr val="B36A13"/>
+                  </a:solidFill>
+                  <a:latin typeface="+mn-lt"/>
+                  <a:ea typeface="+mn-ea"/>
+                  <a:cs typeface="+mn-cs"/>
+                </a:rPr>
+                <a:t>Trusting a client-supplied user ID</a:t>
+              </a:r>
+            </a:p>
+          </p:txBody>
+        </p:sp>
+        <p:sp>
+          <p:nvSpPr>
+            <p:cNvPr id="17" name="TextBox 17"/>
+            <p:cNvSpPr txBox="1"/>
+            <p:nvPr/>
+          </p:nvSpPr>
+          <p:spPr>
+            <a:xfrm>
+              <a:off x="6695694" y="4349750"/>
+              <a:ext cx="4452418" cy="381381"/>
+            </a:xfrm>
+            <a:prstGeom prst="rect">
+              <a:avLst/>
+            </a:prstGeom>
+            <a:noFill/>
+            <a:ln>
+              <a:noFill/>
+            </a:ln>
+          </p:spPr>
+          <p:txBody>
+            <a:bodyPr wrap="none" lIns="0" tIns="0" rIns="0" bIns="0" anchor="t" anchorCtr="0">
+              <a:spAutoFit/>
+            </a:bodyPr>
+            <a:lstStyle/>
+            <a:p>
+              <a:pPr algn="l"/>
+              <a:r>
+                <a:rPr lang="en" sz="1950" dirty="0">
+                  <a:solidFill>
+                    <a:schemeClr val="dk1"/>
+                  </a:solidFill>
+                  <a:latin typeface="+mn-lt"/>
+                  <a:ea typeface="+mn-ea"/>
+                  <a:cs typeface="+mn-cs"/>
+                </a:rPr>
+                <a:t>A caller can submit someone else’s ID.</a:t>
+              </a:r>
+            </a:p>
+          </p:txBody>
+        </p:sp>
+        <p:sp>
+          <p:nvSpPr>
+            <p:cNvPr id="18" name="TextBox 18"/>
+            <p:cNvSpPr txBox="1"/>
+            <p:nvPr/>
+          </p:nvSpPr>
+          <p:spPr>
+            <a:xfrm>
+              <a:off x="6694170" y="5054600"/>
+              <a:ext cx="2247020" cy="440055"/>
+            </a:xfrm>
+            <a:prstGeom prst="rect">
+              <a:avLst/>
+            </a:prstGeom>
+            <a:noFill/>
+            <a:ln>
+              <a:noFill/>
+            </a:ln>
+          </p:spPr>
+          <p:txBody>
+            <a:bodyPr wrap="none" lIns="0" tIns="0" rIns="0" bIns="0" anchor="t" anchorCtr="0">
+              <a:spAutoFit/>
+            </a:bodyPr>
+            <a:lstStyle/>
+            <a:p>
+              <a:pPr algn="l"/>
+              <a:r>
+                <a:rPr lang="en" sz="2250" b="1" dirty="0">
+                  <a:solidFill>
+                    <a:srgbClr val="B36A13"/>
+                  </a:solidFill>
+                  <a:latin typeface="+mn-lt"/>
+                  <a:ea typeface="+mn-ea"/>
+                  <a:cs typeface="+mn-cs"/>
+                </a:rPr>
+                <a:t>Isolated servers</a:t>
+              </a:r>
+            </a:p>
+          </p:txBody>
+        </p:sp>
+        <p:sp>
+          <p:nvSpPr>
+            <p:cNvPr id="19" name="TextBox 19"/>
+            <p:cNvSpPr txBox="1"/>
+            <p:nvPr/>
+          </p:nvSpPr>
+          <p:spPr>
+            <a:xfrm>
+              <a:off x="6695694" y="5511800"/>
+              <a:ext cx="4549949" cy="381381"/>
+            </a:xfrm>
+            <a:prstGeom prst="rect">
+              <a:avLst/>
+            </a:prstGeom>
+            <a:noFill/>
+            <a:ln>
+              <a:noFill/>
+            </a:ln>
+          </p:spPr>
+          <p:txBody>
+            <a:bodyPr wrap="none" lIns="0" tIns="0" rIns="0" bIns="0" anchor="t" anchorCtr="0">
+              <a:spAutoFit/>
+            </a:bodyPr>
+            <a:lstStyle/>
+            <a:p>
+              <a:pPr algn="l"/>
+              <a:r>
+                <a:rPr lang="en" sz="1950" dirty="0">
+                  <a:solidFill>
+                    <a:schemeClr val="dk1"/>
+                  </a:solidFill>
+                  <a:latin typeface="+mn-lt"/>
+                  <a:ea typeface="+mn-ea"/>
+                  <a:cs typeface="+mn-cs"/>
+                </a:rPr>
+                <a:t>Without scale-out, messages stay local.</a:t>
+              </a:r>
+            </a:p>
+          </p:txBody>
+        </p:sp>
+      </p:grpSp>
+      <p:grpSp>
+        <p:nvGrpSpPr>
+          <p:cNvPr id="23" name="footer"/>
           <p:cNvGrpSpPr/>
           <p:nvPr/>
         </p:nvGrpSpPr>
@@ -11586,7 +9389,7 @@
         </p:grpSpPr>
         <p:sp>
           <p:nvSpPr>
-            <p:cNvPr id="37" name="TextBox 37"/>
+            <p:cNvPr id="21" name="TextBox 21"/>
             <p:cNvSpPr txBox="1"/>
             <p:nvPr/>
           </p:nvSpPr>
@@ -11626,7 +9429,7 @@
         </p:sp>
         <p:sp>
           <p:nvSpPr>
-            <p:cNvPr id="38" name="TextBox 38"/>
+            <p:cNvPr id="22" name="TextBox 22"/>
             <p:cNvSpPr txBox="1"/>
             <p:nvPr/>
           </p:nvSpPr>
@@ -11703,16 +9506,16 @@
       </p:grpSpPr>
       <p:grpSp>
         <p:nvGrpSpPr>
-          <p:cNvPr id="3" name="kicker"/>
+          <p:cNvPr id="3" name="takeaway"/>
           <p:cNvGrpSpPr/>
           <p:nvPr/>
         </p:nvGrpSpPr>
         <p:grpSpPr>
           <a:xfrm>
-            <a:off x="601980" y="1028700"/>
-            <a:ext cx="1368670" cy="293370"/>
-            <a:chOff x="601980" y="1028700"/>
-            <a:chExt cx="1368670" cy="293370"/>
+            <a:off x="590550" y="1682750"/>
+            <a:ext cx="6652648" cy="1104900"/>
+            <a:chOff x="590550" y="1682750"/>
+            <a:chExt cx="6652648" cy="1104900"/>
           </a:xfrm>
         </p:grpSpPr>
         <p:sp>
@@ -11723,8 +9526,8 @@
           </p:nvSpPr>
           <p:spPr>
             <a:xfrm>
-              <a:off x="601980" y="1028700"/>
-              <a:ext cx="1368670" cy="293370"/>
+              <a:off x="590550" y="1682750"/>
+              <a:ext cx="6652648" cy="1104900"/>
             </a:xfrm>
             <a:prstGeom prst="rect">
               <a:avLst/>
@@ -11742,114 +9545,23 @@
             <a:p>
               <a:pPr algn="l"/>
               <a:r>
-                <a:rPr lang="en" sz="1500" b="1" dirty="0">
-                  <a:solidFill>
-                    <a:schemeClr val="accent2"/>
-                  </a:solidFill>
-                  <a:latin typeface="+mn-lt"/>
-                  <a:ea typeface="+mn-ea"/>
-                  <a:cs typeface="+mn-cs"/>
-                </a:rPr>
-                <a:t>Demo &amp; Q&amp;A</a:t>
+                <a:rPr lang="en" sz="5700" dirty="0">
+                  <a:solidFill>
+                    <a:schemeClr val="accent1"/>
+                  </a:solidFill>
+                  <a:latin typeface="+mj-lt"/>
+                  <a:ea typeface="+mj-ea"/>
+                  <a:cs typeface="+mj-cs"/>
+                </a:rPr>
+                <a:t>Demo &amp; Questions</a:t>
               </a:r>
             </a:p>
           </p:txBody>
         </p:sp>
       </p:grpSp>
-      <p:grpSp>
-        <p:nvGrpSpPr>
-          <p:cNvPr id="5" name="takeaway"/>
-          <p:cNvGrpSpPr/>
-          <p:nvPr/>
-        </p:nvGrpSpPr>
-        <p:grpSpPr>
-          <a:xfrm>
-            <a:off x="590550" y="1638300"/>
-            <a:ext cx="7962138" cy="1343025"/>
-            <a:chOff x="590550" y="1638300"/>
-            <a:chExt cx="7962138" cy="1343025"/>
-          </a:xfrm>
-        </p:grpSpPr>
-        <p:sp>
-          <p:nvSpPr>
-            <p:cNvPr id="4" name="TextBox 4"/>
-            <p:cNvSpPr txBox="1"/>
-            <p:nvPr/>
-          </p:nvSpPr>
-          <p:spPr>
-            <a:xfrm>
-              <a:off x="590550" y="1638300"/>
-              <a:ext cx="7962138" cy="1343025"/>
-            </a:xfrm>
-            <a:prstGeom prst="rect">
-              <a:avLst/>
-            </a:prstGeom>
-            <a:noFill/>
-            <a:ln>
-              <a:noFill/>
-            </a:ln>
-          </p:spPr>
-          <p:txBody>
-            <a:bodyPr wrap="none" lIns="0" tIns="0" rIns="0" bIns="0" anchor="t" anchorCtr="0">
-              <a:spAutoFit/>
-            </a:bodyPr>
-            <a:lstStyle/>
-            <a:p>
-              <a:pPr algn="l">
-                <a:lnSpc>
-                  <a:spcPts val="4800"/>
-                </a:lnSpc>
-              </a:pPr>
-              <a:r>
-                <a:rPr lang="en" sz="3750" dirty="0">
-                  <a:solidFill>
-                    <a:schemeClr val="accent1"/>
-                  </a:solidFill>
-                  <a:latin typeface="+mj-lt"/>
-                  <a:ea typeface="+mj-ea"/>
-                  <a:cs typeface="+mj-cs"/>
-                </a:rPr>
-                <a:t>SignalR moves the message.</a:t>
-              </a:r>
-              <a:br>
-                <a:rPr lang="en" sz="3750" dirty="0">
-                  <a:solidFill>
-                    <a:schemeClr val="accent1"/>
-                  </a:solidFill>
-                  <a:latin typeface="+mj-lt"/>
-                  <a:ea typeface="+mj-ea"/>
-                  <a:cs typeface="+mj-cs"/>
-                </a:rPr>
-              </a:br>
-              <a:r>
-                <a:rPr lang="en" sz="3750" dirty="0">
-                  <a:solidFill>
-                    <a:schemeClr val="accent3"/>
-                  </a:solidFill>
-                  <a:latin typeface="+mj-lt"/>
-                  <a:ea typeface="+mj-ea"/>
-                  <a:cs typeface="+mj-cs"/>
-                </a:rPr>
-                <a:t>You</a:t>
-              </a:r>
-              <a:r>
-                <a:rPr lang="en" sz="3750" dirty="0">
-                  <a:solidFill>
-                    <a:schemeClr val="accent1"/>
-                  </a:solidFill>
-                  <a:latin typeface="+mj-lt"/>
-                  <a:ea typeface="+mj-ea"/>
-                  <a:cs typeface="+mj-cs"/>
-                </a:rPr>
-                <a:t xml:space="preserve"> own who sends it and what it says.</a:t>
-              </a:r>
-            </a:p>
-          </p:txBody>
-        </p:sp>
-      </p:grpSp>
       <p:sp>
         <p:nvSpPr>
-          <p:cNvPr id="6" name="Line 6"/>
+          <p:cNvPr id="4" name="Line 4"/>
           <p:cNvSpPr/>
           <p:nvPr/>
         </p:nvSpPr>
@@ -11885,7 +9597,7 @@
       </p:sp>
       <p:sp>
         <p:nvSpPr>
-          <p:cNvPr id="7" name="Freeform 7"/>
+          <p:cNvPr id="5" name="Freeform 5"/>
           <p:cNvSpPr/>
           <p:nvPr/>
         </p:nvSpPr>
@@ -11909,7 +9621,7 @@
       </p:sp>
       <p:sp>
         <p:nvSpPr>
-          <p:cNvPr id="8" name="Freeform 8"/>
+          <p:cNvPr id="6" name="Freeform 6"/>
           <p:cNvSpPr/>
           <p:nvPr/>
         </p:nvSpPr>
@@ -11933,7 +9645,7 @@
       </p:sp>
       <p:sp>
         <p:nvSpPr>
-          <p:cNvPr id="9" name="Freeform 9"/>
+          <p:cNvPr id="7" name="Freeform 7"/>
           <p:cNvSpPr/>
           <p:nvPr/>
         </p:nvSpPr>
@@ -11957,21 +9669,21 @@
       </p:sp>
       <p:grpSp>
         <p:nvGrpSpPr>
-          <p:cNvPr id="18" name="scene-labels"/>
+          <p:cNvPr id="16" name="scene-labels"/>
           <p:cNvGrpSpPr/>
           <p:nvPr/>
         </p:nvGrpSpPr>
         <p:grpSpPr>
           <a:xfrm>
             <a:off x="1586330" y="3797300"/>
-            <a:ext cx="8999202" cy="991870"/>
+            <a:ext cx="9057217" cy="991870"/>
             <a:chOff x="1586330" y="3797300"/>
-            <a:chExt cx="8999202" cy="991870"/>
+            <a:chExt cx="9057217" cy="991870"/>
           </a:xfrm>
         </p:grpSpPr>
         <p:grpSp>
           <p:nvGrpSpPr>
-            <p:cNvPr id="13" name="Group 13"/>
+            <p:cNvPr id="11" name="Group 11"/>
             <p:cNvGrpSpPr/>
             <p:nvPr/>
           </p:nvGrpSpPr>
@@ -11985,7 +9697,7 @@
           </p:grpSpPr>
           <p:sp>
             <p:nvSpPr>
-              <p:cNvPr id="10" name="TextBox 10"/>
+              <p:cNvPr id="8" name="TextBox 8"/>
               <p:cNvSpPr txBox="1"/>
               <p:nvPr/>
             </p:nvSpPr>
@@ -12025,7 +9737,7 @@
           </p:sp>
           <p:sp>
             <p:nvSpPr>
-              <p:cNvPr id="11" name="TextBox 11"/>
+              <p:cNvPr id="9" name="TextBox 9"/>
               <p:cNvSpPr txBox="1"/>
               <p:nvPr/>
             </p:nvSpPr>
@@ -12065,7 +9777,7 @@
           </p:sp>
           <p:sp>
             <p:nvSpPr>
-              <p:cNvPr id="12" name="TextBox 12"/>
+              <p:cNvPr id="10" name="TextBox 10"/>
               <p:cNvSpPr txBox="1"/>
               <p:nvPr/>
             </p:nvSpPr>
@@ -12106,21 +9818,21 @@
         </p:grpSp>
         <p:grpSp>
           <p:nvGrpSpPr>
-            <p:cNvPr id="17" name="Group 17"/>
+            <p:cNvPr id="15" name="Group 15"/>
             <p:cNvGrpSpPr/>
             <p:nvPr/>
           </p:nvGrpSpPr>
           <p:grpSpPr>
             <a:xfrm>
               <a:off x="1586330" y="4495800"/>
-              <a:ext cx="8999202" cy="293370"/>
+              <a:ext cx="9057217" cy="293370"/>
               <a:chOff x="1586330" y="4495800"/>
-              <a:chExt cx="8999202" cy="293370"/>
+              <a:chExt cx="9057217" cy="293370"/>
             </a:xfrm>
           </p:grpSpPr>
           <p:sp>
             <p:nvSpPr>
-              <p:cNvPr id="14" name="TextBox 14"/>
+              <p:cNvPr id="12" name="TextBox 12"/>
               <p:cNvSpPr txBox="1"/>
               <p:nvPr/>
             </p:nvSpPr>
@@ -12160,14 +9872,14 @@
           </p:sp>
           <p:sp>
             <p:nvSpPr>
-              <p:cNvPr id="15" name="TextBox 15"/>
+              <p:cNvPr id="13" name="TextBox 13"/>
               <p:cNvSpPr txBox="1"/>
               <p:nvPr/>
             </p:nvSpPr>
             <p:spPr>
               <a:xfrm>
-                <a:off x="5121578" y="4495800"/>
-                <a:ext cx="2215543" cy="293370"/>
+                <a:off x="4792732" y="4495800"/>
+                <a:ext cx="2873236" cy="293370"/>
               </a:xfrm>
               <a:prstGeom prst="rect">
                 <a:avLst/>
@@ -12193,21 +9905,21 @@
                     <a:ea typeface="+mn-ea"/>
                     <a:cs typeface="+mn-cs"/>
                   </a:rPr>
-                  <a:t>8 steps, Ben updates last</a:t>
+                  <a:t>bid → broadcast → update clients</a:t>
                 </a:r>
               </a:p>
             </p:txBody>
           </p:sp>
           <p:sp>
             <p:nvSpPr>
-              <p:cNvPr id="16" name="TextBox 16"/>
+              <p:cNvPr id="14" name="TextBox 14"/>
               <p:cNvSpPr txBox="1"/>
               <p:nvPr/>
             </p:nvSpPr>
             <p:spPr>
               <a:xfrm>
-                <a:off x="8845467" y="4495800"/>
-                <a:ext cx="1740065" cy="293370"/>
+                <a:off x="8787453" y="4495800"/>
+                <a:ext cx="1856094" cy="293370"/>
               </a:xfrm>
               <a:prstGeom prst="rect">
                 <a:avLst/>
@@ -12233,7 +9945,7 @@
                     <a:ea typeface="+mn-ea"/>
                     <a:cs typeface="+mn-cs"/>
                   </a:rPr>
-                  <a:t>retry 0 · 2 · 10 · 30 s</a:t>
+                  <a:t>reconnect or give up</a:t>
                 </a:r>
               </a:p>
             </p:txBody>
@@ -12242,7 +9954,7 @@
       </p:grpSp>
       <p:grpSp>
         <p:nvGrpSpPr>
-          <p:cNvPr id="25" name="demo-link"/>
+          <p:cNvPr id="23" name="demo-link"/>
           <p:cNvGrpSpPr/>
           <p:nvPr/>
         </p:nvGrpSpPr>
@@ -12256,7 +9968,7 @@
         </p:grpSpPr>
         <p:grpSp>
           <p:nvGrpSpPr>
-            <p:cNvPr id="22" name="Group 22"/>
+            <p:cNvPr id="20" name="Group 20"/>
             <p:cNvGrpSpPr/>
             <p:nvPr/>
           </p:nvGrpSpPr>
@@ -12270,7 +9982,7 @@
           </p:grpSpPr>
           <p:sp>
             <p:nvSpPr>
-              <p:cNvPr id="19" name="Freeform 19"/>
+              <p:cNvPr id="17" name="Freeform 17"/>
               <p:cNvSpPr/>
               <p:nvPr/>
             </p:nvSpPr>
@@ -12306,7 +10018,7 @@
           </p:sp>
           <p:sp>
             <p:nvSpPr>
-              <p:cNvPr id="20" name="Freeform 20"/>
+              <p:cNvPr id="18" name="Freeform 18"/>
               <p:cNvSpPr/>
               <p:nvPr/>
             </p:nvSpPr>
@@ -12371,7 +10083,7 @@
           </p:sp>
           <p:sp>
             <p:nvSpPr>
-              <p:cNvPr id="21" name="Freeform 21"/>
+              <p:cNvPr id="19" name="Freeform 19"/>
               <p:cNvSpPr/>
               <p:nvPr/>
             </p:nvSpPr>
@@ -12408,14 +10120,14 @@
         </p:grpSp>
         <p:sp>
           <p:nvSpPr>
-            <p:cNvPr id="23" name="TextBox 23"/>
+            <p:cNvPr id="21" name="TextBox 21"/>
             <p:cNvSpPr txBox="1"/>
             <p:nvPr/>
           </p:nvSpPr>
           <p:spPr>
             <a:xfrm>
               <a:off x="1020318" y="5511800"/>
-              <a:ext cx="4720964" cy="322707"/>
+              <a:ext cx="1756899" cy="322707"/>
             </a:xfrm>
             <a:prstGeom prst="rect">
               <a:avLst/>
@@ -12441,14 +10153,14 @@
                   <a:ea typeface="Consolas"/>
                   <a:cs typeface="Consolas"/>
                 </a:rPr>
-                <a:t>SignalR BidLab · http://127.0.0.1:5080</a:t>
+                <a:t>SignalR BidLab</a:t>
               </a:r>
             </a:p>
           </p:txBody>
         </p:sp>
         <p:sp>
           <p:nvSpPr>
-            <p:cNvPr id="24" name="TextBox 24"/>
+            <p:cNvPr id="22" name="TextBox 22"/>
             <p:cNvSpPr txBox="1"/>
             <p:nvPr/>
           </p:nvSpPr>
@@ -13495,16 +11207,16 @@
       </p:sp>
       <p:grpSp>
         <p:nvGrpSpPr>
-          <p:cNvPr id="43" name="questions"/>
+          <p:cNvPr id="42" name="questions"/>
           <p:cNvGrpSpPr/>
           <p:nvPr/>
         </p:nvGrpSpPr>
         <p:grpSpPr>
           <a:xfrm>
             <a:off x="6076950" y="1847850"/>
-            <a:ext cx="5505450" cy="4100957"/>
+            <a:ext cx="5505450" cy="3705225"/>
             <a:chOff x="6076950" y="1847850"/>
-            <a:chExt cx="5505450" cy="4100957"/>
+            <a:chExt cx="5505450" cy="3705225"/>
           </a:xfrm>
         </p:grpSpPr>
         <p:sp>
@@ -13865,7 +11577,7 @@
             <p:spPr>
               <a:xfrm>
                 <a:off x="6656832" y="4946650"/>
-                <a:ext cx="2532860" cy="410718"/>
+                <a:ext cx="3356149" cy="410718"/>
               </a:xfrm>
               <a:prstGeom prst="rect">
                 <a:avLst/>
@@ -13891,7 +11603,7 @@
                     <a:ea typeface="+mn-ea"/>
                     <a:cs typeface="+mn-cs"/>
                   </a:rPr>
-                  <a:t>What should we fix?</a:t>
+                  <a:t>Best practices: Do &amp; Avoid</a:t>
                 </a:r>
               </a:p>
             </p:txBody>
@@ -14020,50 +11732,10 @@
             </p:spPr>
           </p:sp>
         </p:grpSp>
-        <p:sp>
-          <p:nvSpPr>
-            <p:cNvPr id="42" name="TextBox 42"/>
-            <p:cNvSpPr txBox="1"/>
-            <p:nvPr/>
-          </p:nvSpPr>
-          <p:spPr>
-            <a:xfrm>
-              <a:off x="6087618" y="5626100"/>
-              <a:ext cx="3300213" cy="322707"/>
-            </a:xfrm>
-            <a:prstGeom prst="rect">
-              <a:avLst/>
-            </a:prstGeom>
-            <a:noFill/>
-            <a:ln>
-              <a:noFill/>
-            </a:ln>
-          </p:spPr>
-          <p:txBody>
-            <a:bodyPr wrap="none" lIns="0" tIns="0" rIns="0" bIns="0" anchor="t" anchorCtr="0">
-              <a:spAutoFit/>
-            </a:bodyPr>
-            <a:lstStyle/>
-            <a:p>
-              <a:pPr algn="l"/>
-              <a:r>
-                <a:rPr lang="en" sz="1650" dirty="0">
-                  <a:solidFill>
-                    <a:schemeClr val="accent5"/>
-                  </a:solidFill>
-                  <a:latin typeface="+mn-lt"/>
-                  <a:ea typeface="+mn-ea"/>
-                  <a:cs typeface="+mn-cs"/>
-                </a:rPr>
-                <a:t>Then: the same bid, live in BidLab</a:t>
-              </a:r>
-            </a:p>
-          </p:txBody>
-        </p:sp>
       </p:grpSp>
       <p:grpSp>
         <p:nvGrpSpPr>
-          <p:cNvPr id="46" name="footer"/>
+          <p:cNvPr id="45" name="footer"/>
           <p:cNvGrpSpPr/>
           <p:nvPr/>
         </p:nvGrpSpPr>
@@ -14077,7 +11749,7 @@
         </p:grpSpPr>
         <p:sp>
           <p:nvSpPr>
-            <p:cNvPr id="44" name="TextBox 44"/>
+            <p:cNvPr id="43" name="TextBox 43"/>
             <p:cNvSpPr txBox="1"/>
             <p:nvPr/>
           </p:nvSpPr>
@@ -14117,7 +11789,7 @@
         </p:sp>
         <p:sp>
           <p:nvSpPr>
-            <p:cNvPr id="45" name="TextBox 45"/>
+            <p:cNvPr id="44" name="TextBox 44"/>
             <p:cNvSpPr txBox="1"/>
             <p:nvPr/>
           </p:nvSpPr>
@@ -14200,10 +11872,10 @@
         </p:nvGrpSpPr>
         <p:grpSpPr>
           <a:xfrm>
-            <a:off x="590550" y="609600"/>
-            <a:ext cx="9490328" cy="1000125"/>
-            <a:chOff x="590550" y="609600"/>
-            <a:chExt cx="9490328" cy="1000125"/>
+            <a:off x="590550" y="571500"/>
+            <a:ext cx="9490328" cy="1038225"/>
+            <a:chOff x="590550" y="571500"/>
+            <a:chExt cx="9490328" cy="1038225"/>
           </a:xfrm>
         </p:grpSpPr>
         <p:sp>
@@ -14214,8 +11886,8 @@
           </p:nvSpPr>
           <p:spPr>
             <a:xfrm>
-              <a:off x="601980" y="609600"/>
-              <a:ext cx="1895217" cy="293370"/>
+              <a:off x="600456" y="571500"/>
+              <a:ext cx="2274261" cy="352044"/>
             </a:xfrm>
             <a:prstGeom prst="rect">
               <a:avLst/>
@@ -14233,7 +11905,7 @@
             <a:p>
               <a:pPr algn="l"/>
               <a:r>
-                <a:rPr lang="en" sz="1500" b="1" dirty="0">
+                <a:rPr lang="en" sz="1800" b="1" dirty="0">
                   <a:solidFill>
                     <a:schemeClr val="accent2"/>
                   </a:solidFill>
@@ -15415,10 +13087,10 @@
         </p:nvGrpSpPr>
         <p:grpSpPr>
           <a:xfrm>
-            <a:off x="590550" y="609600"/>
-            <a:ext cx="6745754" cy="1000125"/>
-            <a:chOff x="590550" y="609600"/>
-            <a:chExt cx="6745754" cy="1000125"/>
+            <a:off x="590550" y="571500"/>
+            <a:ext cx="7967700" cy="1038225"/>
+            <a:chOff x="590550" y="571500"/>
+            <a:chExt cx="7967700" cy="1038225"/>
           </a:xfrm>
         </p:grpSpPr>
         <p:sp>
@@ -15429,8 +13101,8 @@
           </p:nvSpPr>
           <p:spPr>
             <a:xfrm>
-              <a:off x="601980" y="609600"/>
-              <a:ext cx="1895217" cy="293370"/>
+              <a:off x="600456" y="571500"/>
+              <a:ext cx="2274261" cy="352044"/>
             </a:xfrm>
             <a:prstGeom prst="rect">
               <a:avLst/>
@@ -15448,7 +13120,7 @@
             <a:p>
               <a:pPr algn="l"/>
               <a:r>
-                <a:rPr lang="en" sz="1500" b="1" dirty="0">
+                <a:rPr lang="en" sz="1800" b="1" dirty="0">
                   <a:solidFill>
                     <a:schemeClr val="accent2"/>
                   </a:solidFill>
@@ -15470,7 +13142,7 @@
           <p:spPr>
             <a:xfrm>
               <a:off x="590550" y="876300"/>
-              <a:ext cx="6745754" cy="733425"/>
+              <a:ext cx="7967700" cy="733425"/>
             </a:xfrm>
             <a:prstGeom prst="rect">
               <a:avLst/>
@@ -15496,7 +13168,7 @@
                   <a:ea typeface="+mj-ea"/>
                   <a:cs typeface="+mj-cs"/>
                 </a:rPr>
-                <a:t>A framework, not a transport</a:t>
+                <a:t>A real-time library, not a transport</a:t>
               </a:r>
             </a:p>
           </p:txBody>
@@ -16695,10 +14367,10 @@
         </p:nvGrpSpPr>
         <p:grpSpPr>
           <a:xfrm>
-            <a:off x="590550" y="609600"/>
-            <a:ext cx="6421063" cy="1000125"/>
-            <a:chOff x="590550" y="609600"/>
-            <a:chExt cx="6421063" cy="1000125"/>
+            <a:off x="590550" y="571500"/>
+            <a:ext cx="6421063" cy="1038225"/>
+            <a:chOff x="590550" y="571500"/>
+            <a:chExt cx="6421063" cy="1038225"/>
           </a:xfrm>
         </p:grpSpPr>
         <p:sp>
@@ -16709,8 +14381,8 @@
           </p:nvSpPr>
           <p:spPr>
             <a:xfrm>
-              <a:off x="601980" y="609600"/>
-              <a:ext cx="1895217" cy="293370"/>
+              <a:off x="600456" y="571500"/>
+              <a:ext cx="2274261" cy="352044"/>
             </a:xfrm>
             <a:prstGeom prst="rect">
               <a:avLst/>
@@ -16728,7 +14400,7 @@
             <a:p>
               <a:pPr algn="l"/>
               <a:r>
-                <a:rPr lang="en" sz="1500" b="1" dirty="0">
+                <a:rPr lang="en" sz="1800" b="1" dirty="0">
                   <a:solidFill>
                     <a:schemeClr val="accent2"/>
                   </a:solidFill>
@@ -18903,10 +16575,10 @@
         </p:nvGrpSpPr>
         <p:grpSpPr>
           <a:xfrm>
-            <a:off x="590550" y="609600"/>
-            <a:ext cx="8930515" cy="1000125"/>
-            <a:chOff x="590550" y="609600"/>
-            <a:chExt cx="8930515" cy="1000125"/>
+            <a:off x="590550" y="571500"/>
+            <a:ext cx="8930515" cy="1038225"/>
+            <a:chOff x="590550" y="571500"/>
+            <a:chExt cx="8930515" cy="1038225"/>
           </a:xfrm>
         </p:grpSpPr>
         <p:sp>
@@ -18917,8 +16589,8 @@
           </p:nvSpPr>
           <p:spPr>
             <a:xfrm>
-              <a:off x="601980" y="609600"/>
-              <a:ext cx="1895217" cy="293370"/>
+              <a:off x="600456" y="571500"/>
+              <a:ext cx="2274261" cy="352044"/>
             </a:xfrm>
             <a:prstGeom prst="rect">
               <a:avLst/>
@@ -18936,7 +16608,7 @@
             <a:p>
               <a:pPr algn="l"/>
               <a:r>
-                <a:rPr lang="en" sz="1500" b="1" dirty="0">
+                <a:rPr lang="en" sz="1800" b="1" dirty="0">
                   <a:solidFill>
                     <a:schemeClr val="accent2"/>
                   </a:solidFill>
@@ -21133,10 +18805,10 @@
         </p:nvGrpSpPr>
         <p:grpSpPr>
           <a:xfrm>
-            <a:off x="590550" y="609600"/>
-            <a:ext cx="7651475" cy="1000125"/>
-            <a:chOff x="590550" y="609600"/>
-            <a:chExt cx="7651475" cy="1000125"/>
+            <a:off x="590550" y="571500"/>
+            <a:ext cx="7651475" cy="1038225"/>
+            <a:chOff x="590550" y="571500"/>
+            <a:chExt cx="7651475" cy="1038225"/>
           </a:xfrm>
         </p:grpSpPr>
         <p:sp>
@@ -21147,8 +18819,8 @@
           </p:nvSpPr>
           <p:spPr>
             <a:xfrm>
-              <a:off x="601980" y="609600"/>
-              <a:ext cx="2330591" cy="293370"/>
+              <a:off x="600456" y="571500"/>
+              <a:ext cx="2796709" cy="352044"/>
             </a:xfrm>
             <a:prstGeom prst="rect">
               <a:avLst/>
@@ -21166,7 +18838,7 @@
             <a:p>
               <a:pPr algn="l"/>
               <a:r>
-                <a:rPr lang="en" sz="1500" b="1" dirty="0">
+                <a:rPr lang="en" sz="1800" b="1" dirty="0">
                   <a:solidFill>
                     <a:schemeClr val="accent2"/>
                   </a:solidFill>
@@ -22651,10 +20323,10 @@
         </p:nvGrpSpPr>
         <p:grpSpPr>
           <a:xfrm>
-            <a:off x="590550" y="609600"/>
-            <a:ext cx="7635082" cy="1000125"/>
-            <a:chOff x="590550" y="609600"/>
-            <a:chExt cx="7635082" cy="1000125"/>
+            <a:off x="590550" y="571500"/>
+            <a:ext cx="7300156" cy="1038225"/>
+            <a:chOff x="590550" y="571500"/>
+            <a:chExt cx="7300156" cy="1038225"/>
           </a:xfrm>
         </p:grpSpPr>
         <p:sp>
@@ -22665,8 +20337,8 @@
           </p:nvSpPr>
           <p:spPr>
             <a:xfrm>
-              <a:off x="601980" y="609600"/>
-              <a:ext cx="3343963" cy="293370"/>
+              <a:off x="600456" y="571500"/>
+              <a:ext cx="4012756" cy="352044"/>
             </a:xfrm>
             <a:prstGeom prst="rect">
               <a:avLst/>
@@ -22684,7 +20356,7 @@
             <a:p>
               <a:pPr algn="l"/>
               <a:r>
-                <a:rPr lang="en" sz="1500" b="1" dirty="0">
+                <a:rPr lang="en" sz="1800" b="1" dirty="0">
                   <a:solidFill>
                     <a:schemeClr val="accent2"/>
                   </a:solidFill>
@@ -22706,7 +20378,7 @@
           <p:spPr>
             <a:xfrm>
               <a:off x="590550" y="876300"/>
-              <a:ext cx="7635082" cy="733425"/>
+              <a:ext cx="7300156" cy="733425"/>
             </a:xfrm>
             <a:prstGeom prst="rect">
               <a:avLst/>
@@ -22732,7 +20404,7 @@
                   <a:ea typeface="+mj-ea"/>
                   <a:cs typeface="+mj-cs"/>
                 </a:rPr>
-                <a:t>Three hubs, one Redis backplane</a:t>
+                <a:t>Two hubs, one Redis backplane</a:t>
               </a:r>
             </a:p>
           </p:txBody>
@@ -23373,9 +21045,9 @@
         <p:grpSpPr>
           <a:xfrm>
             <a:off x="3314700" y="2667000"/>
-            <a:ext cx="1066800" cy="1238251"/>
+            <a:ext cx="1066800" cy="1532878"/>
             <a:chOff x="3314700" y="2667000"/>
-            <a:chExt cx="1066800" cy="1238251"/>
+            <a:chExt cx="1066800" cy="1532878"/>
           </a:xfrm>
         </p:grpSpPr>
         <p:sp>
@@ -23411,7 +21083,7 @@
           </p:nvSpPr>
           <p:spPr>
             <a:xfrm>
-              <a:off x="3314700" y="3905250"/>
+              <a:off x="3314700" y="4199877"/>
               <a:ext cx="1066800" cy="1"/>
             </a:xfrm>
             <a:prstGeom prst="line">
@@ -23431,7 +21103,7 @@
       </p:grpSp>
       <p:grpSp>
         <p:nvGrpSpPr>
-          <p:cNvPr id="52" name="server"/>
+          <p:cNvPr id="49" name="server"/>
           <p:cNvGrpSpPr/>
           <p:nvPr/>
         </p:nvGrpSpPr>
@@ -23938,112 +21610,6 @@
           </p:nvSpPr>
           <p:spPr>
             <a:xfrm>
-              <a:off x="4419600" y="4305300"/>
-              <a:ext cx="2819400" cy="914400"/>
-            </a:xfrm>
-            <a:prstGeom prst="roundRect">
-              <a:avLst>
-                <a:gd name="adj" fmla="val 4167"/>
-              </a:avLst>
-            </a:prstGeom>
-            <a:solidFill>
-              <a:srgbClr val="FFFFFF"/>
-            </a:solidFill>
-            <a:ln w="14288">
-              <a:solidFill>
-                <a:schemeClr val="accent6"/>
-              </a:solidFill>
-            </a:ln>
-          </p:spPr>
-        </p:sp>
-        <p:sp>
-          <p:nvSpPr>
-            <p:cNvPr id="40" name="TextBox 40"/>
-            <p:cNvSpPr txBox="1"/>
-            <p:nvPr/>
-          </p:nvSpPr>
-          <p:spPr>
-            <a:xfrm>
-              <a:off x="4601718" y="4425950"/>
-              <a:ext cx="1252271" cy="322707"/>
-            </a:xfrm>
-            <a:prstGeom prst="rect">
-              <a:avLst/>
-            </a:prstGeom>
-            <a:noFill/>
-            <a:ln>
-              <a:noFill/>
-            </a:ln>
-          </p:spPr>
-          <p:txBody>
-            <a:bodyPr wrap="none" lIns="0" tIns="0" rIns="0" bIns="0" anchor="t" anchorCtr="0">
-              <a:spAutoFit/>
-            </a:bodyPr>
-            <a:lstStyle/>
-            <a:p>
-              <a:pPr algn="l"/>
-              <a:r>
-                <a:rPr lang="en" sz="1650" b="1" dirty="0">
-                  <a:solidFill>
-                    <a:schemeClr val="accent5"/>
-                  </a:solidFill>
-                  <a:latin typeface="Consolas"/>
-                  <a:ea typeface="Consolas"/>
-                  <a:cs typeface="Consolas"/>
-                </a:rPr>
-                <a:t>MessageHub</a:t>
-              </a:r>
-            </a:p>
-          </p:txBody>
-        </p:sp>
-        <p:sp>
-          <p:nvSpPr>
-            <p:cNvPr id="41" name="TextBox 41"/>
-            <p:cNvSpPr txBox="1"/>
-            <p:nvPr/>
-          </p:nvSpPr>
-          <p:spPr>
-            <a:xfrm>
-              <a:off x="4601718" y="4749800"/>
-              <a:ext cx="2940142" cy="322707"/>
-            </a:xfrm>
-            <a:prstGeom prst="rect">
-              <a:avLst/>
-            </a:prstGeom>
-            <a:noFill/>
-            <a:ln>
-              <a:noFill/>
-            </a:ln>
-          </p:spPr>
-          <p:txBody>
-            <a:bodyPr wrap="none" lIns="0" tIns="0" rIns="0" bIns="0" anchor="t" anchorCtr="0">
-              <a:spAutoFit/>
-            </a:bodyPr>
-            <a:lstStyle/>
-            <a:p>
-              <a:pPr algn="l"/>
-              <a:r>
-                <a:rPr lang="en" sz="1650" dirty="0">
-                  <a:solidFill>
-                    <a:schemeClr val="accent5"/>
-                  </a:solidFill>
-                  <a:latin typeface="+mn-lt"/>
-                  <a:ea typeface="+mn-ea"/>
-                  <a:cs typeface="+mn-cs"/>
-                </a:rPr>
-                <a:t>sendMessage · never mapped</a:t>
-              </a:r>
-            </a:p>
-          </p:txBody>
-        </p:sp>
-        <p:sp>
-          <p:nvSpPr>
-            <p:cNvPr id="42" name="Rectangle 42"/>
-            <p:cNvSpPr/>
-            <p:nvPr/>
-          </p:nvSpPr>
-          <p:spPr>
-            <a:xfrm>
               <a:off x="7391400" y="4305300"/>
               <a:ext cx="1905000" cy="914400"/>
             </a:xfrm>
@@ -24064,7 +21630,7 @@
         </p:sp>
         <p:grpSp>
           <p:nvGrpSpPr>
-            <p:cNvPr id="45" name="Group 45"/>
+            <p:cNvPr id="42" name="Group 42"/>
             <p:cNvGrpSpPr/>
             <p:nvPr/>
           </p:nvGrpSpPr>
@@ -24078,7 +21644,7 @@
           </p:grpSpPr>
           <p:sp>
             <p:nvSpPr>
-              <p:cNvPr id="43" name="Freeform 43"/>
+              <p:cNvPr id="40" name="Freeform 40"/>
               <p:cNvSpPr/>
               <p:nvPr/>
             </p:nvSpPr>
@@ -24131,7 +21697,7 @@
           </p:sp>
           <p:sp>
             <p:nvSpPr>
-              <p:cNvPr id="44" name="Freeform 44"/>
+              <p:cNvPr id="41" name="Freeform 41"/>
               <p:cNvSpPr/>
               <p:nvPr/>
             </p:nvSpPr>
@@ -24171,7 +21737,7 @@
         </p:grpSp>
         <p:sp>
           <p:nvSpPr>
-            <p:cNvPr id="46" name="TextBox 46"/>
+            <p:cNvPr id="43" name="TextBox 43"/>
             <p:cNvSpPr txBox="1"/>
             <p:nvPr/>
           </p:nvSpPr>
@@ -24211,7 +21777,7 @@
         </p:sp>
         <p:sp>
           <p:nvSpPr>
-            <p:cNvPr id="47" name="TextBox 47"/>
+            <p:cNvPr id="44" name="TextBox 44"/>
             <p:cNvSpPr txBox="1"/>
             <p:nvPr/>
           </p:nvSpPr>
@@ -24251,7 +21817,7 @@
         </p:sp>
         <p:sp>
           <p:nvSpPr>
-            <p:cNvPr id="48" name="Line 48"/>
+            <p:cNvPr id="45" name="Line 45"/>
             <p:cNvSpPr/>
             <p:nvPr/>
           </p:nvSpPr>
@@ -24274,7 +21840,7 @@
         </p:sp>
         <p:sp>
           <p:nvSpPr>
-            <p:cNvPr id="49" name="Rectangle 49"/>
+            <p:cNvPr id="46" name="Rectangle 46"/>
             <p:cNvSpPr/>
             <p:nvPr/>
           </p:nvSpPr>
@@ -24303,7 +21869,7 @@
         </p:sp>
         <p:sp>
           <p:nvSpPr>
-            <p:cNvPr id="50" name="TextBox 50"/>
+            <p:cNvPr id="47" name="TextBox 47"/>
             <p:cNvSpPr txBox="1"/>
             <p:nvPr/>
           </p:nvSpPr>
@@ -24343,7 +21909,7 @@
         </p:sp>
         <p:sp>
           <p:nvSpPr>
-            <p:cNvPr id="51" name="TextBox 51"/>
+            <p:cNvPr id="48" name="TextBox 48"/>
             <p:cNvSpPr txBox="1"/>
             <p:nvPr/>
           </p:nvSpPr>
@@ -24384,7 +21950,7 @@
       </p:grpSp>
       <p:grpSp>
         <p:nvGrpSpPr>
-          <p:cNvPr id="61" name="redis"/>
+          <p:cNvPr id="58" name="redis"/>
           <p:cNvGrpSpPr/>
           <p:nvPr/>
         </p:nvGrpSpPr>
@@ -24398,7 +21964,7 @@
         </p:grpSpPr>
         <p:sp>
           <p:nvSpPr>
-            <p:cNvPr id="53" name="Line 53"/>
+            <p:cNvPr id="50" name="Line 50"/>
             <p:cNvSpPr/>
             <p:nvPr/>
           </p:nvSpPr>
@@ -24435,7 +22001,7 @@
         </p:sp>
         <p:sp>
           <p:nvSpPr>
-            <p:cNvPr id="54" name="Rectangle 54"/>
+            <p:cNvPr id="51" name="Rectangle 51"/>
             <p:cNvSpPr/>
             <p:nvPr/>
           </p:nvSpPr>
@@ -24464,7 +22030,7 @@
         </p:sp>
         <p:grpSp>
           <p:nvGrpSpPr>
-            <p:cNvPr id="58" name="Group 58"/>
+            <p:cNvPr id="55" name="Group 55"/>
             <p:cNvGrpSpPr/>
             <p:nvPr/>
           </p:nvGrpSpPr>
@@ -24478,7 +22044,7 @@
           </p:grpSpPr>
           <p:sp>
             <p:nvSpPr>
-              <p:cNvPr id="55" name="Freeform 55"/>
+              <p:cNvPr id="52" name="Freeform 52"/>
               <p:cNvSpPr/>
               <p:nvPr/>
             </p:nvSpPr>
@@ -24531,7 +22097,7 @@
           </p:sp>
           <p:sp>
             <p:nvSpPr>
-              <p:cNvPr id="56" name="Freeform 56"/>
+              <p:cNvPr id="53" name="Freeform 53"/>
               <p:cNvSpPr/>
               <p:nvPr/>
             </p:nvSpPr>
@@ -24580,7 +22146,7 @@
           </p:sp>
           <p:sp>
             <p:nvSpPr>
-              <p:cNvPr id="57" name="Freeform 57"/>
+              <p:cNvPr id="54" name="Freeform 54"/>
               <p:cNvSpPr/>
               <p:nvPr/>
             </p:nvSpPr>
@@ -24630,7 +22196,7 @@
         </p:grpSp>
         <p:sp>
           <p:nvSpPr>
-            <p:cNvPr id="59" name="TextBox 59"/>
+            <p:cNvPr id="56" name="TextBox 56"/>
             <p:cNvSpPr txBox="1"/>
             <p:nvPr/>
           </p:nvSpPr>
@@ -24670,7 +22236,7 @@
         </p:sp>
         <p:sp>
           <p:nvSpPr>
-            <p:cNvPr id="60" name="TextBox 60"/>
+            <p:cNvPr id="57" name="TextBox 57"/>
             <p:cNvSpPr txBox="1"/>
             <p:nvPr/>
           </p:nvSpPr>
@@ -24711,7 +22277,7 @@
       </p:grpSp>
       <p:grpSp>
         <p:nvGrpSpPr>
-          <p:cNvPr id="68" name="legend"/>
+          <p:cNvPr id="65" name="legend"/>
           <p:cNvGrpSpPr/>
           <p:nvPr/>
         </p:nvGrpSpPr>
@@ -24725,7 +22291,7 @@
         </p:grpSpPr>
         <p:sp>
           <p:nvSpPr>
-            <p:cNvPr id="62" name="Rectangle 62"/>
+            <p:cNvPr id="59" name="Rectangle 59"/>
             <p:cNvSpPr/>
             <p:nvPr/>
           </p:nvSpPr>
@@ -24751,7 +22317,7 @@
         </p:sp>
         <p:sp>
           <p:nvSpPr>
-            <p:cNvPr id="63" name="TextBox 63"/>
+            <p:cNvPr id="60" name="TextBox 60"/>
             <p:cNvSpPr txBox="1"/>
             <p:nvPr/>
           </p:nvSpPr>
@@ -24791,7 +22357,7 @@
         </p:sp>
         <p:sp>
           <p:nvSpPr>
-            <p:cNvPr id="64" name="Rectangle 64"/>
+            <p:cNvPr id="61" name="Rectangle 61"/>
             <p:cNvSpPr/>
             <p:nvPr/>
           </p:nvSpPr>
@@ -24820,7 +22386,7 @@
         </p:sp>
         <p:sp>
           <p:nvSpPr>
-            <p:cNvPr id="65" name="TextBox 65"/>
+            <p:cNvPr id="62" name="TextBox 62"/>
             <p:cNvSpPr txBox="1"/>
             <p:nvPr/>
           </p:nvSpPr>
@@ -24860,7 +22426,7 @@
         </p:sp>
         <p:sp>
           <p:nvSpPr>
-            <p:cNvPr id="66" name="Line 66"/>
+            <p:cNvPr id="63" name="Line 63"/>
             <p:cNvSpPr/>
             <p:nvPr/>
           </p:nvSpPr>
@@ -24897,7 +22463,7 @@
         </p:sp>
         <p:sp>
           <p:nvSpPr>
-            <p:cNvPr id="67" name="TextBox 67"/>
+            <p:cNvPr id="64" name="TextBox 64"/>
             <p:cNvSpPr txBox="1"/>
             <p:nvPr/>
           </p:nvSpPr>
@@ -24938,7 +22504,7 @@
       </p:grpSp>
       <p:grpSp>
         <p:nvGrpSpPr>
-          <p:cNvPr id="71" name="footer"/>
+          <p:cNvPr id="68" name="footer"/>
           <p:cNvGrpSpPr/>
           <p:nvPr/>
         </p:nvGrpSpPr>
@@ -24952,7 +22518,7 @@
         </p:grpSpPr>
         <p:sp>
           <p:nvSpPr>
-            <p:cNvPr id="69" name="TextBox 69"/>
+            <p:cNvPr id="66" name="TextBox 66"/>
             <p:cNvSpPr txBox="1"/>
             <p:nvPr/>
           </p:nvSpPr>
@@ -24992,7 +22558,7 @@
         </p:sp>
         <p:sp>
           <p:nvSpPr>
-            <p:cNvPr id="70" name="TextBox 70"/>
+            <p:cNvPr id="67" name="TextBox 67"/>
             <p:cNvSpPr txBox="1"/>
             <p:nvPr/>
           </p:nvSpPr>
@@ -25075,10 +22641,10 @@
         </p:nvGrpSpPr>
         <p:grpSpPr>
           <a:xfrm>
-            <a:off x="590550" y="609600"/>
-            <a:ext cx="7991879" cy="1000125"/>
-            <a:chOff x="590550" y="609600"/>
-            <a:chExt cx="7991879" cy="1000125"/>
+            <a:off x="590550" y="571500"/>
+            <a:ext cx="7991879" cy="1038225"/>
+            <a:chOff x="590550" y="571500"/>
+            <a:chExt cx="7991879" cy="1038225"/>
           </a:xfrm>
         </p:grpSpPr>
         <p:sp>
@@ -25089,8 +22655,8 @@
           </p:nvSpPr>
           <p:spPr>
             <a:xfrm>
-              <a:off x="601980" y="609600"/>
-              <a:ext cx="4243498" cy="293370"/>
+              <a:off x="600456" y="571500"/>
+              <a:ext cx="5092197" cy="352044"/>
             </a:xfrm>
             <a:prstGeom prst="rect">
               <a:avLst/>
@@ -25108,7 +22674,7 @@
             <a:p>
               <a:pPr algn="l"/>
               <a:r>
-                <a:rPr lang="en" sz="1500" b="1" dirty="0">
+                <a:rPr lang="en" sz="1800" b="1" dirty="0">
                   <a:solidFill>
                     <a:schemeClr val="accent2"/>
                   </a:solidFill>

--- a/SignalR/presentation/SignalR - More Than WebSocket.pptx
+++ b/SignalR/presentation/SignalR - More Than WebSocket.pptx
@@ -20,6 +20,7 @@
     <p:sldId id="268" r:id="rId19"/>
     <p:sldId id="269" r:id="rId20"/>
     <p:sldId id="270" r:id="rId21"/>
+    <p:sldId id="271" r:id="rId22"/>
   </p:sldIdLst>
   <p:sldSz cx="12192000" cy="6858000" type="screen16x9"/>
   <p:notesSz cx="6858000" cy="9144000"/>
@@ -10210,6 +10211,3026 @@
 </p:sld>
 </file>
 
+<file path=ppt/slides/slide16.xml><?xml version="1.0" encoding="utf-8"?>
+<p:sld xmlns:a="http://schemas.openxmlformats.org/drawingml/2006/main" xmlns:r="http://schemas.openxmlformats.org/officeDocument/2006/relationships" xmlns:p="http://schemas.openxmlformats.org/presentationml/2006/main">
+  <p:cSld>
+    <p:bg>
+      <p:bgPr>
+        <a:solidFill>
+          <a:schemeClr val="lt1"/>
+        </a:solidFill>
+        <a:effectLst/>
+      </p:bgPr>
+    </p:bg>
+    <p:spTree>
+      <p:nvGrpSpPr>
+        <p:cNvPr id="1" name=""/>
+        <p:cNvGrpSpPr/>
+        <p:nvPr/>
+      </p:nvGrpSpPr>
+      <p:grpSpPr>
+        <a:xfrm>
+          <a:off x="0" y="0"/>
+          <a:ext cx="0" cy="0"/>
+          <a:chOff x="0" y="0"/>
+          <a:chExt cx="0" cy="0"/>
+        </a:xfrm>
+      </p:grpSpPr>
+      <p:grpSp>
+        <p:nvGrpSpPr>
+          <p:cNvPr id="8" name="header"/>
+          <p:cNvGrpSpPr/>
+          <p:nvPr/>
+        </p:nvGrpSpPr>
+        <p:grpSpPr>
+          <a:xfrm>
+            <a:off x="590550" y="571500"/>
+            <a:ext cx="10678686" cy="1038225"/>
+            <a:chOff x="590550" y="571500"/>
+            <a:chExt cx="10678686" cy="1038225"/>
+          </a:xfrm>
+        </p:grpSpPr>
+        <p:sp>
+          <p:nvSpPr>
+            <p:cNvPr id="2" name="TextBox 2"/>
+            <p:cNvSpPr txBox="1"/>
+            <p:nvPr/>
+          </p:nvSpPr>
+          <p:spPr>
+            <a:xfrm>
+              <a:off x="600456" y="571500"/>
+              <a:ext cx="2138550" cy="352044"/>
+            </a:xfrm>
+            <a:prstGeom prst="rect">
+              <a:avLst/>
+            </a:prstGeom>
+            <a:noFill/>
+            <a:ln>
+              <a:noFill/>
+            </a:ln>
+          </p:spPr>
+          <p:txBody>
+            <a:bodyPr wrap="none" lIns="0" tIns="0" rIns="0" bIns="0" anchor="t" anchorCtr="0">
+              <a:spAutoFit/>
+            </a:bodyPr>
+            <a:lstStyle/>
+            <a:p>
+              <a:pPr algn="l"/>
+              <a:r>
+                <a:rPr lang="en" sz="1800" b="1" dirty="0">
+                  <a:solidFill>
+                    <a:schemeClr val="accent2"/>
+                  </a:solidFill>
+                  <a:latin typeface="+mn-lt"/>
+                  <a:ea typeface="+mn-ea"/>
+                  <a:cs typeface="+mn-cs"/>
+                </a:rPr>
+                <a:t>Backup · Scale-out</a:t>
+              </a:r>
+            </a:p>
+          </p:txBody>
+        </p:sp>
+        <p:sp>
+          <p:nvSpPr>
+            <p:cNvPr id="3" name="TextBox 3"/>
+            <p:cNvSpPr txBox="1"/>
+            <p:nvPr/>
+          </p:nvSpPr>
+          <p:spPr>
+            <a:xfrm>
+              <a:off x="590550" y="876300"/>
+              <a:ext cx="10054053" cy="733425"/>
+            </a:xfrm>
+            <a:prstGeom prst="rect">
+              <a:avLst/>
+            </a:prstGeom>
+            <a:noFill/>
+            <a:ln>
+              <a:noFill/>
+            </a:ln>
+          </p:spPr>
+          <p:txBody>
+            <a:bodyPr wrap="none" lIns="0" tIns="0" rIns="0" bIns="0" anchor="t" anchorCtr="0">
+              <a:spAutoFit/>
+            </a:bodyPr>
+            <a:lstStyle/>
+            <a:p>
+              <a:pPr algn="l"/>
+              <a:r>
+                <a:rPr lang="en" sz="3750" dirty="0">
+                  <a:solidFill>
+                    <a:schemeClr val="accent1"/>
+                  </a:solidFill>
+                  <a:latin typeface="+mj-lt"/>
+                  <a:ea typeface="+mj-ea"/>
+                  <a:cs typeface="+mj-cs"/>
+                </a:rPr>
+                <a:t>Redis backplane: one message, every server</a:t>
+              </a:r>
+            </a:p>
+          </p:txBody>
+        </p:sp>
+        <p:sp>
+          <p:nvSpPr>
+            <p:cNvPr id="4" name="Rectangle 4"/>
+            <p:cNvSpPr/>
+            <p:nvPr/>
+          </p:nvSpPr>
+          <p:spPr>
+            <a:xfrm>
+              <a:off x="8915400" y="666750"/>
+              <a:ext cx="209550" cy="133350"/>
+            </a:xfrm>
+            <a:prstGeom prst="roundRect">
+              <a:avLst>
+                <a:gd name="adj" fmla="val 14286"/>
+              </a:avLst>
+            </a:prstGeom>
+            <a:solidFill>
+              <a:schemeClr val="lt2"/>
+            </a:solidFill>
+            <a:ln w="14288">
+              <a:solidFill>
+                <a:schemeClr val="accent2"/>
+              </a:solidFill>
+            </a:ln>
+          </p:spPr>
+        </p:sp>
+        <p:sp>
+          <p:nvSpPr>
+            <p:cNvPr id="5" name="TextBox 5"/>
+            <p:cNvSpPr txBox="1"/>
+            <p:nvPr/>
+          </p:nvSpPr>
+          <p:spPr>
+            <a:xfrm>
+              <a:off x="9195054" y="638175"/>
+              <a:ext cx="1120985" cy="234696"/>
+            </a:xfrm>
+            <a:prstGeom prst="rect">
+              <a:avLst/>
+            </a:prstGeom>
+            <a:noFill/>
+            <a:ln>
+              <a:noFill/>
+            </a:ln>
+          </p:spPr>
+          <p:txBody>
+            <a:bodyPr wrap="none" lIns="0" tIns="0" rIns="0" bIns="0" anchor="t" anchorCtr="0">
+              <a:spAutoFit/>
+            </a:bodyPr>
+            <a:lstStyle/>
+            <a:p>
+              <a:pPr algn="l"/>
+              <a:r>
+                <a:rPr lang="en" sz="1200" dirty="0">
+                  <a:solidFill>
+                    <a:schemeClr val="accent5"/>
+                  </a:solidFill>
+                  <a:latin typeface="+mn-lt"/>
+                  <a:ea typeface="+mn-ea"/>
+                  <a:cs typeface="+mn-cs"/>
+                </a:rPr>
+                <a:t>Geronimo code</a:t>
+              </a:r>
+            </a:p>
+          </p:txBody>
+        </p:sp>
+        <p:sp>
+          <p:nvSpPr>
+            <p:cNvPr id="6" name="Rectangle 6"/>
+            <p:cNvSpPr/>
+            <p:nvPr/>
+          </p:nvSpPr>
+          <p:spPr>
+            <a:xfrm>
+              <a:off x="10439400" y="666750"/>
+              <a:ext cx="209550" cy="133350"/>
+            </a:xfrm>
+            <a:prstGeom prst="roundRect">
+              <a:avLst>
+                <a:gd name="adj" fmla="val 14286"/>
+              </a:avLst>
+            </a:prstGeom>
+            <a:solidFill>
+              <a:srgbClr val="F1EBFD"/>
+            </a:solidFill>
+            <a:ln w="14288">
+              <a:solidFill>
+                <a:schemeClr val="accent3"/>
+              </a:solidFill>
+              <a:custDash>
+                <a:ds d="266667" sp="200000"/>
+              </a:custDash>
+            </a:ln>
+          </p:spPr>
+        </p:sp>
+        <p:sp>
+          <p:nvSpPr>
+            <p:cNvPr id="7" name="TextBox 7"/>
+            <p:cNvSpPr txBox="1"/>
+            <p:nvPr/>
+          </p:nvSpPr>
+          <p:spPr>
+            <a:xfrm>
+              <a:off x="10719054" y="638175"/>
+              <a:ext cx="550182" cy="234696"/>
+            </a:xfrm>
+            <a:prstGeom prst="rect">
+              <a:avLst/>
+            </a:prstGeom>
+            <a:noFill/>
+            <a:ln>
+              <a:noFill/>
+            </a:ln>
+          </p:spPr>
+          <p:txBody>
+            <a:bodyPr wrap="none" lIns="0" tIns="0" rIns="0" bIns="0" anchor="t" anchorCtr="0">
+              <a:spAutoFit/>
+            </a:bodyPr>
+            <a:lstStyle/>
+            <a:p>
+              <a:pPr algn="l"/>
+              <a:r>
+                <a:rPr lang="en" sz="1200" dirty="0">
+                  <a:solidFill>
+                    <a:schemeClr val="accent5"/>
+                  </a:solidFill>
+                  <a:latin typeface="+mn-lt"/>
+                  <a:ea typeface="+mn-ea"/>
+                  <a:cs typeface="+mn-cs"/>
+                </a:rPr>
+                <a:t>SignalR</a:t>
+              </a:r>
+            </a:p>
+          </p:txBody>
+        </p:sp>
+      </p:grpSp>
+      <p:grpSp>
+        <p:nvGrpSpPr>
+          <p:cNvPr id="15" name="clients"/>
+          <p:cNvGrpSpPr/>
+          <p:nvPr/>
+        </p:nvGrpSpPr>
+        <p:grpSpPr>
+          <a:xfrm>
+            <a:off x="609600" y="1866900"/>
+            <a:ext cx="7296150" cy="571500"/>
+            <a:chOff x="609600" y="1866900"/>
+            <a:chExt cx="7296150" cy="571500"/>
+          </a:xfrm>
+        </p:grpSpPr>
+        <p:sp>
+          <p:nvSpPr>
+            <p:cNvPr id="9" name="Rectangle 9"/>
+            <p:cNvSpPr/>
+            <p:nvPr/>
+          </p:nvSpPr>
+          <p:spPr>
+            <a:xfrm>
+              <a:off x="609600" y="1866900"/>
+              <a:ext cx="3238500" cy="571500"/>
+            </a:xfrm>
+            <a:prstGeom prst="roundRect">
+              <a:avLst>
+                <a:gd name="adj" fmla="val 6667"/>
+              </a:avLst>
+            </a:prstGeom>
+            <a:solidFill>
+              <a:srgbClr val="FFFFFF"/>
+            </a:solidFill>
+            <a:ln w="14288">
+              <a:solidFill>
+                <a:schemeClr val="accent6"/>
+              </a:solidFill>
+            </a:ln>
+          </p:spPr>
+        </p:sp>
+        <p:sp>
+          <p:nvSpPr>
+            <p:cNvPr id="10" name="TextBox 10"/>
+            <p:cNvSpPr txBox="1"/>
+            <p:nvPr/>
+          </p:nvSpPr>
+          <p:spPr>
+            <a:xfrm>
+              <a:off x="791718" y="1930400"/>
+              <a:ext cx="1436457" cy="322707"/>
+            </a:xfrm>
+            <a:prstGeom prst="rect">
+              <a:avLst/>
+            </a:prstGeom>
+            <a:noFill/>
+            <a:ln>
+              <a:noFill/>
+            </a:ln>
+          </p:spPr>
+          <p:txBody>
+            <a:bodyPr wrap="none" lIns="0" tIns="0" rIns="0" bIns="0" anchor="t" anchorCtr="0">
+              <a:spAutoFit/>
+            </a:bodyPr>
+            <a:lstStyle/>
+            <a:p>
+              <a:pPr algn="l"/>
+              <a:r>
+                <a:rPr lang="en" sz="1650" b="1" dirty="0">
+                  <a:solidFill>
+                    <a:schemeClr val="accent1"/>
+                  </a:solidFill>
+                  <a:latin typeface="+mn-lt"/>
+                  <a:ea typeface="+mn-ea"/>
+                  <a:cs typeface="+mn-cs"/>
+                </a:rPr>
+                <a:t>Anna · bidder</a:t>
+              </a:r>
+            </a:p>
+          </p:txBody>
+        </p:sp>
+        <p:sp>
+          <p:nvSpPr>
+            <p:cNvPr id="11" name="TextBox 11"/>
+            <p:cNvSpPr txBox="1"/>
+            <p:nvPr/>
+          </p:nvSpPr>
+          <p:spPr>
+            <a:xfrm>
+              <a:off x="794004" y="2190750"/>
+              <a:ext cx="1598518" cy="234696"/>
+            </a:xfrm>
+            <a:prstGeom prst="rect">
+              <a:avLst/>
+            </a:prstGeom>
+            <a:noFill/>
+            <a:ln>
+              <a:noFill/>
+            </a:ln>
+          </p:spPr>
+          <p:txBody>
+            <a:bodyPr wrap="none" lIns="0" tIns="0" rIns="0" bIns="0" anchor="t" anchorCtr="0">
+              <a:spAutoFit/>
+            </a:bodyPr>
+            <a:lstStyle/>
+            <a:p>
+              <a:pPr algn="l"/>
+              <a:r>
+                <a:rPr lang="en" sz="1200" dirty="0">
+                  <a:solidFill>
+                    <a:schemeClr val="accent5"/>
+                  </a:solidFill>
+                  <a:latin typeface="+mn-lt"/>
+                  <a:ea typeface="+mn-ea"/>
+                  <a:cs typeface="+mn-cs"/>
+                </a:rPr>
+                <a:t>connected to Server A</a:t>
+              </a:r>
+            </a:p>
+          </p:txBody>
+        </p:sp>
+        <p:sp>
+          <p:nvSpPr>
+            <p:cNvPr id="12" name="Rectangle 12"/>
+            <p:cNvSpPr/>
+            <p:nvPr/>
+          </p:nvSpPr>
+          <p:spPr>
+            <a:xfrm>
+              <a:off x="4667250" y="1866900"/>
+              <a:ext cx="3238500" cy="571500"/>
+            </a:xfrm>
+            <a:prstGeom prst="roundRect">
+              <a:avLst>
+                <a:gd name="adj" fmla="val 6667"/>
+              </a:avLst>
+            </a:prstGeom>
+            <a:solidFill>
+              <a:srgbClr val="FFFFFF"/>
+            </a:solidFill>
+            <a:ln w="14288">
+              <a:solidFill>
+                <a:schemeClr val="accent6"/>
+              </a:solidFill>
+            </a:ln>
+          </p:spPr>
+        </p:sp>
+        <p:sp>
+          <p:nvSpPr>
+            <p:cNvPr id="13" name="TextBox 13"/>
+            <p:cNvSpPr txBox="1"/>
+            <p:nvPr/>
+          </p:nvSpPr>
+          <p:spPr>
+            <a:xfrm>
+              <a:off x="4849368" y="1930400"/>
+              <a:ext cx="1562859" cy="322707"/>
+            </a:xfrm>
+            <a:prstGeom prst="rect">
+              <a:avLst/>
+            </a:prstGeom>
+            <a:noFill/>
+            <a:ln>
+              <a:noFill/>
+            </a:ln>
+          </p:spPr>
+          <p:txBody>
+            <a:bodyPr wrap="none" lIns="0" tIns="0" rIns="0" bIns="0" anchor="t" anchorCtr="0">
+              <a:spAutoFit/>
+            </a:bodyPr>
+            <a:lstStyle/>
+            <a:p>
+              <a:pPr algn="l"/>
+              <a:r>
+                <a:rPr lang="en" sz="1650" b="1" dirty="0">
+                  <a:solidFill>
+                    <a:schemeClr val="accent1"/>
+                  </a:solidFill>
+                  <a:latin typeface="+mn-lt"/>
+                  <a:ea typeface="+mn-ea"/>
+                  <a:cs typeface="+mn-cs"/>
+                </a:rPr>
+                <a:t>Ben · watching</a:t>
+              </a:r>
+            </a:p>
+          </p:txBody>
+        </p:sp>
+        <p:sp>
+          <p:nvSpPr>
+            <p:cNvPr id="14" name="TextBox 14"/>
+            <p:cNvSpPr txBox="1"/>
+            <p:nvPr/>
+          </p:nvSpPr>
+          <p:spPr>
+            <a:xfrm>
+              <a:off x="4851654" y="2190750"/>
+              <a:ext cx="1586862" cy="234696"/>
+            </a:xfrm>
+            <a:prstGeom prst="rect">
+              <a:avLst/>
+            </a:prstGeom>
+            <a:noFill/>
+            <a:ln>
+              <a:noFill/>
+            </a:ln>
+          </p:spPr>
+          <p:txBody>
+            <a:bodyPr wrap="none" lIns="0" tIns="0" rIns="0" bIns="0" anchor="t" anchorCtr="0">
+              <a:spAutoFit/>
+            </a:bodyPr>
+            <a:lstStyle/>
+            <a:p>
+              <a:pPr algn="l"/>
+              <a:r>
+                <a:rPr lang="en" sz="1200" dirty="0">
+                  <a:solidFill>
+                    <a:schemeClr val="accent5"/>
+                  </a:solidFill>
+                  <a:latin typeface="+mn-lt"/>
+                  <a:ea typeface="+mn-ea"/>
+                  <a:cs typeface="+mn-cs"/>
+                </a:rPr>
+                <a:t>connected to Server B</a:t>
+              </a:r>
+            </a:p>
+          </p:txBody>
+        </p:sp>
+      </p:grpSp>
+      <p:grpSp>
+        <p:nvGrpSpPr>
+          <p:cNvPr id="26" name="server-a"/>
+          <p:cNvGrpSpPr/>
+          <p:nvPr/>
+        </p:nvGrpSpPr>
+        <p:grpSpPr>
+          <a:xfrm>
+            <a:off x="609600" y="2857500"/>
+            <a:ext cx="3238500" cy="1924050"/>
+            <a:chOff x="609600" y="2857500"/>
+            <a:chExt cx="3238500" cy="1924050"/>
+          </a:xfrm>
+        </p:grpSpPr>
+        <p:sp>
+          <p:nvSpPr>
+            <p:cNvPr id="16" name="Rectangle 16"/>
+            <p:cNvSpPr/>
+            <p:nvPr/>
+          </p:nvSpPr>
+          <p:spPr>
+            <a:xfrm>
+              <a:off x="609600" y="2857500"/>
+              <a:ext cx="3238500" cy="1924050"/>
+            </a:xfrm>
+            <a:prstGeom prst="roundRect">
+              <a:avLst>
+                <a:gd name="adj" fmla="val 1980"/>
+              </a:avLst>
+            </a:prstGeom>
+            <a:solidFill>
+              <a:srgbClr val="FFFFFF"/>
+            </a:solidFill>
+            <a:ln w="14288">
+              <a:solidFill>
+                <a:schemeClr val="accent6"/>
+              </a:solidFill>
+            </a:ln>
+          </p:spPr>
+        </p:sp>
+        <p:sp>
+          <p:nvSpPr>
+            <p:cNvPr id="17" name="TextBox 17"/>
+            <p:cNvSpPr txBox="1"/>
+            <p:nvPr/>
+          </p:nvSpPr>
+          <p:spPr>
+            <a:xfrm>
+              <a:off x="791718" y="2940050"/>
+              <a:ext cx="910484" cy="322707"/>
+            </a:xfrm>
+            <a:prstGeom prst="rect">
+              <a:avLst/>
+            </a:prstGeom>
+            <a:noFill/>
+            <a:ln>
+              <a:noFill/>
+            </a:ln>
+          </p:spPr>
+          <p:txBody>
+            <a:bodyPr wrap="none" lIns="0" tIns="0" rIns="0" bIns="0" anchor="t" anchorCtr="0">
+              <a:spAutoFit/>
+            </a:bodyPr>
+            <a:lstStyle/>
+            <a:p>
+              <a:pPr algn="l"/>
+              <a:r>
+                <a:rPr lang="en" sz="1650" b="1" dirty="0">
+                  <a:solidFill>
+                    <a:schemeClr val="accent1"/>
+                  </a:solidFill>
+                  <a:latin typeface="+mn-lt"/>
+                  <a:ea typeface="+mn-ea"/>
+                  <a:cs typeface="+mn-cs"/>
+                </a:rPr>
+                <a:t>Server A</a:t>
+              </a:r>
+            </a:p>
+          </p:txBody>
+        </p:sp>
+        <p:sp>
+          <p:nvSpPr>
+            <p:cNvPr id="18" name="TextBox 18"/>
+            <p:cNvSpPr txBox="1"/>
+            <p:nvPr/>
+          </p:nvSpPr>
+          <p:spPr>
+            <a:xfrm>
+              <a:off x="2496546" y="2990850"/>
+              <a:ext cx="1167150" cy="234696"/>
+            </a:xfrm>
+            <a:prstGeom prst="rect">
+              <a:avLst/>
+            </a:prstGeom>
+            <a:noFill/>
+            <a:ln>
+              <a:noFill/>
+            </a:ln>
+          </p:spPr>
+          <p:txBody>
+            <a:bodyPr wrap="none" lIns="0" tIns="0" rIns="0" bIns="0" anchor="t" anchorCtr="0">
+              <a:spAutoFit/>
+            </a:bodyPr>
+            <a:lstStyle/>
+            <a:p>
+              <a:pPr algn="r"/>
+              <a:r>
+                <a:rPr lang="en" sz="1200" dirty="0">
+                  <a:solidFill>
+                    <a:schemeClr val="accent5"/>
+                  </a:solidFill>
+                  <a:latin typeface="+mn-lt"/>
+                  <a:ea typeface="+mn-ea"/>
+                  <a:cs typeface="+mn-cs"/>
+                </a:rPr>
+                <a:t>holds Anna only</a:t>
+              </a:r>
+            </a:p>
+          </p:txBody>
+        </p:sp>
+        <p:sp>
+          <p:nvSpPr>
+            <p:cNvPr id="19" name="Rectangle 19"/>
+            <p:cNvSpPr/>
+            <p:nvPr/>
+          </p:nvSpPr>
+          <p:spPr>
+            <a:xfrm>
+              <a:off x="800100" y="3295650"/>
+              <a:ext cx="2857500" cy="590550"/>
+            </a:xfrm>
+            <a:prstGeom prst="roundRect">
+              <a:avLst>
+                <a:gd name="adj" fmla="val 6452"/>
+              </a:avLst>
+            </a:prstGeom>
+            <a:solidFill>
+              <a:schemeClr val="lt2"/>
+            </a:solidFill>
+            <a:ln w="19050">
+              <a:solidFill>
+                <a:schemeClr val="accent2"/>
+              </a:solidFill>
+            </a:ln>
+          </p:spPr>
+        </p:sp>
+        <p:grpSp>
+          <p:nvGrpSpPr>
+            <p:cNvPr id="22" name="Group 22"/>
+            <p:cNvGrpSpPr/>
+            <p:nvPr/>
+          </p:nvGrpSpPr>
+          <p:grpSpPr>
+            <a:xfrm>
+              <a:off x="926592" y="3378200"/>
+              <a:ext cx="2238938" cy="492633"/>
+              <a:chOff x="926592" y="3378200"/>
+              <a:chExt cx="2238938" cy="492633"/>
+            </a:xfrm>
+          </p:grpSpPr>
+          <p:sp>
+            <p:nvSpPr>
+              <p:cNvPr id="20" name="TextBox 20"/>
+              <p:cNvSpPr txBox="1"/>
+              <p:nvPr/>
+            </p:nvSpPr>
+            <p:spPr>
+              <a:xfrm>
+                <a:off x="926592" y="3378200"/>
+                <a:ext cx="2238938" cy="264033"/>
+              </a:xfrm>
+              <a:prstGeom prst="rect">
+                <a:avLst/>
+              </a:prstGeom>
+              <a:noFill/>
+              <a:ln>
+                <a:noFill/>
+              </a:ln>
+            </p:spPr>
+            <p:txBody>
+              <a:bodyPr wrap="none" lIns="0" tIns="0" rIns="0" bIns="0" anchor="t" anchorCtr="0">
+                <a:spAutoFit/>
+              </a:bodyPr>
+              <a:lstStyle/>
+              <a:p>
+                <a:pPr algn="l"/>
+                <a:r>
+                  <a:rPr lang="en" sz="1350" dirty="0">
+                    <a:solidFill>
+                      <a:schemeClr val="accent1"/>
+                    </a:solidFill>
+                    <a:latin typeface="Consolas"/>
+                    <a:ea typeface="Consolas"/>
+                    <a:cs typeface="Consolas"/>
+                  </a:rPr>
+                  <a:t>Clients.All.SendAsync(</a:t>
+                </a:r>
+              </a:p>
+            </p:txBody>
+          </p:sp>
+          <p:sp>
+            <p:nvSpPr>
+              <p:cNvPr id="21" name="TextBox 21"/>
+              <p:cNvSpPr txBox="1"/>
+              <p:nvPr/>
+            </p:nvSpPr>
+            <p:spPr>
+              <a:xfrm>
+                <a:off x="1117092" y="3606800"/>
+                <a:ext cx="1823096" cy="264033"/>
+              </a:xfrm>
+              <a:prstGeom prst="rect">
+                <a:avLst/>
+              </a:prstGeom>
+              <a:noFill/>
+              <a:ln>
+                <a:noFill/>
+              </a:ln>
+            </p:spPr>
+            <p:txBody>
+              <a:bodyPr wrap="none" lIns="0" tIns="0" rIns="0" bIns="0" anchor="t" anchorCtr="0">
+                <a:spAutoFit/>
+              </a:bodyPr>
+              <a:lstStyle/>
+              <a:p>
+                <a:pPr algn="l"/>
+                <a:r>
+                  <a:rPr lang="en" sz="1350" dirty="0">
+                    <a:solidFill>
+                      <a:schemeClr val="accent1"/>
+                    </a:solidFill>
+                    <a:latin typeface="Consolas"/>
+                    <a:ea typeface="Consolas"/>
+                    <a:cs typeface="Consolas"/>
+                  </a:rPr>
+                  <a:t>"updateItem", ...)</a:t>
+                </a:r>
+              </a:p>
+            </p:txBody>
+          </p:sp>
+        </p:grpSp>
+        <p:sp>
+          <p:nvSpPr>
+            <p:cNvPr id="23" name="Rectangle 23"/>
+            <p:cNvSpPr/>
+            <p:nvPr/>
+          </p:nvSpPr>
+          <p:spPr>
+            <a:xfrm>
+              <a:off x="800100" y="4038600"/>
+              <a:ext cx="2857500" cy="590550"/>
+            </a:xfrm>
+            <a:prstGeom prst="roundRect">
+              <a:avLst>
+                <a:gd name="adj" fmla="val 6452"/>
+              </a:avLst>
+            </a:prstGeom>
+            <a:solidFill>
+              <a:srgbClr val="F1EBFD"/>
+            </a:solidFill>
+            <a:ln w="14288">
+              <a:solidFill>
+                <a:schemeClr val="accent3"/>
+              </a:solidFill>
+              <a:custDash>
+                <a:ds d="400000" sp="266667"/>
+              </a:custDash>
+            </a:ln>
+          </p:spPr>
+        </p:sp>
+        <p:sp>
+          <p:nvSpPr>
+            <p:cNvPr id="24" name="TextBox 24"/>
+            <p:cNvSpPr txBox="1"/>
+            <p:nvPr/>
+          </p:nvSpPr>
+          <p:spPr>
+            <a:xfrm>
+              <a:off x="925830" y="4108450"/>
+              <a:ext cx="2033206" cy="293370"/>
+            </a:xfrm>
+            <a:prstGeom prst="rect">
+              <a:avLst/>
+            </a:prstGeom>
+            <a:noFill/>
+            <a:ln>
+              <a:noFill/>
+            </a:ln>
+          </p:spPr>
+          <p:txBody>
+            <a:bodyPr wrap="none" lIns="0" tIns="0" rIns="0" bIns="0" anchor="t" anchorCtr="0">
+              <a:spAutoFit/>
+            </a:bodyPr>
+            <a:lstStyle/>
+            <a:p>
+              <a:pPr algn="l"/>
+              <a:r>
+                <a:rPr lang="en" sz="1500" dirty="0">
+                  <a:solidFill>
+                    <a:schemeClr val="accent3"/>
+                  </a:solidFill>
+                  <a:latin typeface="Consolas"/>
+                  <a:ea typeface="Consolas"/>
+                  <a:cs typeface="Consolas"/>
+                </a:rPr>
+                <a:t>HubLifetimeManager</a:t>
+              </a:r>
+            </a:p>
+          </p:txBody>
+        </p:sp>
+        <p:sp>
+          <p:nvSpPr>
+            <p:cNvPr id="25" name="TextBox 25"/>
+            <p:cNvSpPr txBox="1"/>
+            <p:nvPr/>
+          </p:nvSpPr>
+          <p:spPr>
+            <a:xfrm>
+              <a:off x="927354" y="4362450"/>
+              <a:ext cx="2468181" cy="234696"/>
+            </a:xfrm>
+            <a:prstGeom prst="rect">
+              <a:avLst/>
+            </a:prstGeom>
+            <a:noFill/>
+            <a:ln>
+              <a:noFill/>
+            </a:ln>
+          </p:spPr>
+          <p:txBody>
+            <a:bodyPr wrap="none" lIns="0" tIns="0" rIns="0" bIns="0" anchor="t" anchorCtr="0">
+              <a:spAutoFit/>
+            </a:bodyPr>
+            <a:lstStyle/>
+            <a:p>
+              <a:pPr algn="l"/>
+              <a:r>
+                <a:rPr lang="en" sz="1200" dirty="0">
+                  <a:solidFill>
+                    <a:schemeClr val="dk1"/>
+                  </a:solidFill>
+                  <a:latin typeface="+mn-lt"/>
+                  <a:ea typeface="+mn-ea"/>
+                  <a:cs typeface="+mn-cs"/>
+                </a:rPr>
+                <a:t>knows only Server A's connections</a:t>
+              </a:r>
+            </a:p>
+          </p:txBody>
+        </p:sp>
+      </p:grpSp>
+      <p:grpSp>
+        <p:nvGrpSpPr>
+          <p:cNvPr id="35" name="server-b"/>
+          <p:cNvGrpSpPr/>
+          <p:nvPr/>
+        </p:nvGrpSpPr>
+        <p:grpSpPr>
+          <a:xfrm>
+            <a:off x="4667250" y="2857500"/>
+            <a:ext cx="3238500" cy="1924050"/>
+            <a:chOff x="4667250" y="2857500"/>
+            <a:chExt cx="3238500" cy="1924050"/>
+          </a:xfrm>
+        </p:grpSpPr>
+        <p:sp>
+          <p:nvSpPr>
+            <p:cNvPr id="27" name="Rectangle 27"/>
+            <p:cNvSpPr/>
+            <p:nvPr/>
+          </p:nvSpPr>
+          <p:spPr>
+            <a:xfrm>
+              <a:off x="4667250" y="2857500"/>
+              <a:ext cx="3238500" cy="1924050"/>
+            </a:xfrm>
+            <a:prstGeom prst="roundRect">
+              <a:avLst>
+                <a:gd name="adj" fmla="val 1980"/>
+              </a:avLst>
+            </a:prstGeom>
+            <a:solidFill>
+              <a:srgbClr val="FFFFFF"/>
+            </a:solidFill>
+            <a:ln w="14288">
+              <a:solidFill>
+                <a:schemeClr val="accent6"/>
+              </a:solidFill>
+            </a:ln>
+          </p:spPr>
+        </p:sp>
+        <p:sp>
+          <p:nvSpPr>
+            <p:cNvPr id="28" name="TextBox 28"/>
+            <p:cNvSpPr txBox="1"/>
+            <p:nvPr/>
+          </p:nvSpPr>
+          <p:spPr>
+            <a:xfrm>
+              <a:off x="4849368" y="2940050"/>
+              <a:ext cx="896489" cy="322707"/>
+            </a:xfrm>
+            <a:prstGeom prst="rect">
+              <a:avLst/>
+            </a:prstGeom>
+            <a:noFill/>
+            <a:ln>
+              <a:noFill/>
+            </a:ln>
+          </p:spPr>
+          <p:txBody>
+            <a:bodyPr wrap="none" lIns="0" tIns="0" rIns="0" bIns="0" anchor="t" anchorCtr="0">
+              <a:spAutoFit/>
+            </a:bodyPr>
+            <a:lstStyle/>
+            <a:p>
+              <a:pPr algn="l"/>
+              <a:r>
+                <a:rPr lang="en" sz="1650" b="1" dirty="0">
+                  <a:solidFill>
+                    <a:schemeClr val="accent1"/>
+                  </a:solidFill>
+                  <a:latin typeface="+mn-lt"/>
+                  <a:ea typeface="+mn-ea"/>
+                  <a:cs typeface="+mn-cs"/>
+                </a:rPr>
+                <a:t>Server B</a:t>
+              </a:r>
+            </a:p>
+          </p:txBody>
+        </p:sp>
+        <p:sp>
+          <p:nvSpPr>
+            <p:cNvPr id="29" name="TextBox 29"/>
+            <p:cNvSpPr txBox="1"/>
+            <p:nvPr/>
+          </p:nvSpPr>
+          <p:spPr>
+            <a:xfrm>
+              <a:off x="6654960" y="2990850"/>
+              <a:ext cx="1066386" cy="234696"/>
+            </a:xfrm>
+            <a:prstGeom prst="rect">
+              <a:avLst/>
+            </a:prstGeom>
+            <a:noFill/>
+            <a:ln>
+              <a:noFill/>
+            </a:ln>
+          </p:spPr>
+          <p:txBody>
+            <a:bodyPr wrap="none" lIns="0" tIns="0" rIns="0" bIns="0" anchor="t" anchorCtr="0">
+              <a:spAutoFit/>
+            </a:bodyPr>
+            <a:lstStyle/>
+            <a:p>
+              <a:pPr algn="r"/>
+              <a:r>
+                <a:rPr lang="en" sz="1200" dirty="0">
+                  <a:solidFill>
+                    <a:schemeClr val="accent5"/>
+                  </a:solidFill>
+                  <a:latin typeface="+mn-lt"/>
+                  <a:ea typeface="+mn-ea"/>
+                  <a:cs typeface="+mn-cs"/>
+                </a:rPr>
+                <a:t>holds Ben only</a:t>
+              </a:r>
+            </a:p>
+          </p:txBody>
+        </p:sp>
+        <p:sp>
+          <p:nvSpPr>
+            <p:cNvPr id="30" name="Rectangle 30"/>
+            <p:cNvSpPr/>
+            <p:nvPr/>
+          </p:nvSpPr>
+          <p:spPr>
+            <a:xfrm>
+              <a:off x="4857750" y="3295650"/>
+              <a:ext cx="2857500" cy="590550"/>
+            </a:xfrm>
+            <a:prstGeom prst="roundRect">
+              <a:avLst>
+                <a:gd name="adj" fmla="val 6452"/>
+              </a:avLst>
+            </a:prstGeom>
+            <a:solidFill>
+              <a:srgbClr val="FFFFFF"/>
+            </a:solidFill>
+            <a:ln w="14288">
+              <a:solidFill>
+                <a:schemeClr val="accent6"/>
+              </a:solidFill>
+              <a:custDash>
+                <a:ds d="400000" sp="266667"/>
+              </a:custDash>
+            </a:ln>
+          </p:spPr>
+        </p:sp>
+        <p:sp>
+          <p:nvSpPr>
+            <p:cNvPr id="31" name="TextBox 31"/>
+            <p:cNvSpPr txBox="1"/>
+            <p:nvPr/>
+          </p:nvSpPr>
+          <p:spPr>
+            <a:xfrm>
+              <a:off x="5022342" y="3482975"/>
+              <a:ext cx="2302143" cy="264033"/>
+            </a:xfrm>
+            <a:prstGeom prst="rect">
+              <a:avLst/>
+            </a:prstGeom>
+            <a:noFill/>
+            <a:ln>
+              <a:noFill/>
+            </a:ln>
+          </p:spPr>
+          <p:txBody>
+            <a:bodyPr wrap="none" lIns="0" tIns="0" rIns="0" bIns="0" anchor="t" anchorCtr="0">
+              <a:spAutoFit/>
+            </a:bodyPr>
+            <a:lstStyle/>
+            <a:p>
+              <a:pPr algn="l"/>
+              <a:r>
+                <a:rPr lang="en" sz="1350" dirty="0">
+                  <a:solidFill>
+                    <a:schemeClr val="accent5"/>
+                  </a:solidFill>
+                  <a:latin typeface="+mn-lt"/>
+                  <a:ea typeface="+mn-ea"/>
+                  <a:cs typeface="+mn-cs"/>
+                </a:rPr>
+                <a:t>BidHub.AddBid not run here</a:t>
+              </a:r>
+            </a:p>
+          </p:txBody>
+        </p:sp>
+        <p:sp>
+          <p:nvSpPr>
+            <p:cNvPr id="32" name="Rectangle 32"/>
+            <p:cNvSpPr/>
+            <p:nvPr/>
+          </p:nvSpPr>
+          <p:spPr>
+            <a:xfrm>
+              <a:off x="4857750" y="4038600"/>
+              <a:ext cx="2857500" cy="590550"/>
+            </a:xfrm>
+            <a:prstGeom prst="roundRect">
+              <a:avLst>
+                <a:gd name="adj" fmla="val 6452"/>
+              </a:avLst>
+            </a:prstGeom>
+            <a:solidFill>
+              <a:srgbClr val="F1EBFD"/>
+            </a:solidFill>
+            <a:ln w="14288">
+              <a:solidFill>
+                <a:schemeClr val="accent3"/>
+              </a:solidFill>
+              <a:custDash>
+                <a:ds d="400000" sp="266667"/>
+              </a:custDash>
+            </a:ln>
+          </p:spPr>
+        </p:sp>
+        <p:sp>
+          <p:nvSpPr>
+            <p:cNvPr id="33" name="TextBox 33"/>
+            <p:cNvSpPr txBox="1"/>
+            <p:nvPr/>
+          </p:nvSpPr>
+          <p:spPr>
+            <a:xfrm>
+              <a:off x="4983480" y="4108450"/>
+              <a:ext cx="2033206" cy="293370"/>
+            </a:xfrm>
+            <a:prstGeom prst="rect">
+              <a:avLst/>
+            </a:prstGeom>
+            <a:noFill/>
+            <a:ln>
+              <a:noFill/>
+            </a:ln>
+          </p:spPr>
+          <p:txBody>
+            <a:bodyPr wrap="none" lIns="0" tIns="0" rIns="0" bIns="0" anchor="t" anchorCtr="0">
+              <a:spAutoFit/>
+            </a:bodyPr>
+            <a:lstStyle/>
+            <a:p>
+              <a:pPr algn="l"/>
+              <a:r>
+                <a:rPr lang="en" sz="1500" dirty="0">
+                  <a:solidFill>
+                    <a:schemeClr val="accent3"/>
+                  </a:solidFill>
+                  <a:latin typeface="Consolas"/>
+                  <a:ea typeface="Consolas"/>
+                  <a:cs typeface="Consolas"/>
+                </a:rPr>
+                <a:t>HubLifetimeManager</a:t>
+              </a:r>
+            </a:p>
+          </p:txBody>
+        </p:sp>
+        <p:sp>
+          <p:nvSpPr>
+            <p:cNvPr id="34" name="TextBox 34"/>
+            <p:cNvSpPr txBox="1"/>
+            <p:nvPr/>
+          </p:nvSpPr>
+          <p:spPr>
+            <a:xfrm>
+              <a:off x="4985004" y="4362450"/>
+              <a:ext cx="2456552" cy="234696"/>
+            </a:xfrm>
+            <a:prstGeom prst="rect">
+              <a:avLst/>
+            </a:prstGeom>
+            <a:noFill/>
+            <a:ln>
+              <a:noFill/>
+            </a:ln>
+          </p:spPr>
+          <p:txBody>
+            <a:bodyPr wrap="none" lIns="0" tIns="0" rIns="0" bIns="0" anchor="t" anchorCtr="0">
+              <a:spAutoFit/>
+            </a:bodyPr>
+            <a:lstStyle/>
+            <a:p>
+              <a:pPr algn="l"/>
+              <a:r>
+                <a:rPr lang="en" sz="1200" dirty="0">
+                  <a:solidFill>
+                    <a:schemeClr val="dk1"/>
+                  </a:solidFill>
+                  <a:latin typeface="+mn-lt"/>
+                  <a:ea typeface="+mn-ea"/>
+                  <a:cs typeface="+mn-cs"/>
+                </a:rPr>
+                <a:t>knows only Server B's connections</a:t>
+              </a:r>
+            </a:p>
+          </p:txBody>
+        </p:sp>
+      </p:grpSp>
+      <p:grpSp>
+        <p:nvGrpSpPr>
+          <p:cNvPr id="48" name="flow-top"/>
+          <p:cNvGrpSpPr/>
+          <p:nvPr/>
+        </p:nvGrpSpPr>
+        <p:grpSpPr>
+          <a:xfrm>
+            <a:off x="885825" y="2457450"/>
+            <a:ext cx="6738442" cy="381000"/>
+            <a:chOff x="885825" y="2457450"/>
+            <a:chExt cx="6738442" cy="381000"/>
+          </a:xfrm>
+        </p:grpSpPr>
+        <p:sp>
+          <p:nvSpPr>
+            <p:cNvPr id="36" name="Line 36"/>
+            <p:cNvSpPr/>
+            <p:nvPr/>
+          </p:nvSpPr>
+          <p:spPr>
+            <a:xfrm>
+              <a:off x="1238250" y="2457450"/>
+              <a:ext cx="1" cy="381000"/>
+            </a:xfrm>
+            <a:prstGeom prst="line">
+              <a:avLst/>
+            </a:prstGeom>
+            <a:noFill/>
+            <a:ln w="19050">
+              <a:solidFill>
+                <a:schemeClr val="accent2"/>
+              </a:solidFill>
+              <a:tailEnd type="triangle" w="lg" len="lg"/>
+            </a:ln>
+          </p:spPr>
+        </p:sp>
+        <p:sp>
+          <p:nvSpPr>
+            <p:cNvPr id="37" name="Ellipse 37"/>
+            <p:cNvSpPr/>
+            <p:nvPr/>
+          </p:nvSpPr>
+          <p:spPr>
+            <a:xfrm>
+              <a:off x="885825" y="2524125"/>
+              <a:ext cx="247650" cy="247650"/>
+            </a:xfrm>
+            <a:prstGeom prst="ellipse">
+              <a:avLst/>
+            </a:prstGeom>
+            <a:solidFill>
+              <a:schemeClr val="accent2"/>
+            </a:solidFill>
+            <a:ln>
+              <a:noFill/>
+            </a:ln>
+          </p:spPr>
+        </p:sp>
+        <p:sp>
+          <p:nvSpPr>
+            <p:cNvPr id="38" name="TextBox 38"/>
+            <p:cNvSpPr txBox="1"/>
+            <p:nvPr/>
+          </p:nvSpPr>
+          <p:spPr>
+            <a:xfrm>
+              <a:off x="957094" y="2552700"/>
+              <a:ext cx="105112" cy="234696"/>
+            </a:xfrm>
+            <a:prstGeom prst="rect">
+              <a:avLst/>
+            </a:prstGeom>
+            <a:noFill/>
+            <a:ln>
+              <a:noFill/>
+            </a:ln>
+          </p:spPr>
+          <p:txBody>
+            <a:bodyPr wrap="none" lIns="0" tIns="0" rIns="0" bIns="0" anchor="t" anchorCtr="0">
+              <a:spAutoFit/>
+            </a:bodyPr>
+            <a:lstStyle/>
+            <a:p>
+              <a:pPr algn="ctr"/>
+              <a:r>
+                <a:rPr lang="en" sz="1200" b="1" dirty="0">
+                  <a:solidFill>
+                    <a:srgbClr val="FFFFFF"/>
+                  </a:solidFill>
+                  <a:latin typeface="+mn-lt"/>
+                  <a:ea typeface="+mn-ea"/>
+                  <a:cs typeface="+mn-cs"/>
+                </a:rPr>
+                <a:t>1</a:t>
+              </a:r>
+            </a:p>
+          </p:txBody>
+        </p:sp>
+        <p:sp>
+          <p:nvSpPr>
+            <p:cNvPr id="39" name="TextBox 39"/>
+            <p:cNvSpPr txBox="1"/>
+            <p:nvPr/>
+          </p:nvSpPr>
+          <p:spPr>
+            <a:xfrm>
+              <a:off x="1384554" y="2565400"/>
+              <a:ext cx="1447190" cy="234696"/>
+            </a:xfrm>
+            <a:prstGeom prst="rect">
+              <a:avLst/>
+            </a:prstGeom>
+            <a:noFill/>
+            <a:ln>
+              <a:noFill/>
+            </a:ln>
+          </p:spPr>
+          <p:txBody>
+            <a:bodyPr wrap="none" lIns="0" tIns="0" rIns="0" bIns="0" anchor="t" anchorCtr="0">
+              <a:spAutoFit/>
+            </a:bodyPr>
+            <a:lstStyle/>
+            <a:p>
+              <a:pPr algn="l"/>
+              <a:r>
+                <a:rPr lang="en" sz="1200" dirty="0">
+                  <a:solidFill>
+                    <a:schemeClr val="accent2"/>
+                  </a:solidFill>
+                  <a:latin typeface="Consolas"/>
+                  <a:ea typeface="Consolas"/>
+                  <a:cs typeface="Consolas"/>
+                </a:rPr>
+                <a:t>invoke("AddBid")</a:t>
+              </a:r>
+            </a:p>
+          </p:txBody>
+        </p:sp>
+        <p:sp>
+          <p:nvSpPr>
+            <p:cNvPr id="40" name="Line 40"/>
+            <p:cNvSpPr/>
+            <p:nvPr/>
+          </p:nvSpPr>
+          <p:spPr>
+            <a:xfrm flipV="1">
+              <a:off x="3333750" y="2457450"/>
+              <a:ext cx="1" cy="381000"/>
+            </a:xfrm>
+            <a:prstGeom prst="line">
+              <a:avLst/>
+            </a:prstGeom>
+            <a:noFill/>
+            <a:ln w="19050">
+              <a:solidFill>
+                <a:schemeClr val="accent3"/>
+              </a:solidFill>
+              <a:prstDash val="dash"/>
+              <a:tailEnd type="triangle" w="lg" len="lg"/>
+            </a:ln>
+          </p:spPr>
+        </p:sp>
+        <p:sp>
+          <p:nvSpPr>
+            <p:cNvPr id="41" name="Ellipse 41"/>
+            <p:cNvSpPr/>
+            <p:nvPr/>
+          </p:nvSpPr>
+          <p:spPr>
+            <a:xfrm>
+              <a:off x="2981325" y="2524125"/>
+              <a:ext cx="247650" cy="247650"/>
+            </a:xfrm>
+            <a:prstGeom prst="ellipse">
+              <a:avLst/>
+            </a:prstGeom>
+            <a:solidFill>
+              <a:schemeClr val="accent3"/>
+            </a:solidFill>
+            <a:ln>
+              <a:noFill/>
+            </a:ln>
+          </p:spPr>
+        </p:sp>
+        <p:sp>
+          <p:nvSpPr>
+            <p:cNvPr id="42" name="TextBox 42"/>
+            <p:cNvSpPr txBox="1"/>
+            <p:nvPr/>
+          </p:nvSpPr>
+          <p:spPr>
+            <a:xfrm>
+              <a:off x="3052594" y="2552700"/>
+              <a:ext cx="105112" cy="234696"/>
+            </a:xfrm>
+            <a:prstGeom prst="rect">
+              <a:avLst/>
+            </a:prstGeom>
+            <a:noFill/>
+            <a:ln>
+              <a:noFill/>
+            </a:ln>
+          </p:spPr>
+          <p:txBody>
+            <a:bodyPr wrap="none" lIns="0" tIns="0" rIns="0" bIns="0" anchor="t" anchorCtr="0">
+              <a:spAutoFit/>
+            </a:bodyPr>
+            <a:lstStyle/>
+            <a:p>
+              <a:pPr algn="ctr"/>
+              <a:r>
+                <a:rPr lang="en" sz="1200" b="1" dirty="0">
+                  <a:solidFill>
+                    <a:srgbClr val="FFFFFF"/>
+                  </a:solidFill>
+                  <a:latin typeface="+mn-lt"/>
+                  <a:ea typeface="+mn-ea"/>
+                  <a:cs typeface="+mn-cs"/>
+                </a:rPr>
+                <a:t>2</a:t>
+              </a:r>
+            </a:p>
+          </p:txBody>
+        </p:sp>
+        <p:sp>
+          <p:nvSpPr>
+            <p:cNvPr id="43" name="TextBox 43"/>
+            <p:cNvSpPr txBox="1"/>
+            <p:nvPr/>
+          </p:nvSpPr>
+          <p:spPr>
+            <a:xfrm>
+              <a:off x="3499104" y="2565400"/>
+              <a:ext cx="905713" cy="234696"/>
+            </a:xfrm>
+            <a:prstGeom prst="rect">
+              <a:avLst/>
+            </a:prstGeom>
+            <a:noFill/>
+            <a:ln>
+              <a:noFill/>
+            </a:ln>
+          </p:spPr>
+          <p:txBody>
+            <a:bodyPr wrap="none" lIns="0" tIns="0" rIns="0" bIns="0" anchor="t" anchorCtr="0">
+              <a:spAutoFit/>
+            </a:bodyPr>
+            <a:lstStyle/>
+            <a:p>
+              <a:pPr algn="l"/>
+              <a:r>
+                <a:rPr lang="en" sz="1200" dirty="0">
+                  <a:solidFill>
+                    <a:schemeClr val="accent3"/>
+                  </a:solidFill>
+                  <a:latin typeface="Consolas"/>
+                  <a:ea typeface="Consolas"/>
+                  <a:cs typeface="Consolas"/>
+                </a:rPr>
+                <a:t>updateItem</a:t>
+              </a:r>
+            </a:p>
+          </p:txBody>
+        </p:sp>
+        <p:sp>
+          <p:nvSpPr>
+            <p:cNvPr id="44" name="Line 44"/>
+            <p:cNvSpPr/>
+            <p:nvPr/>
+          </p:nvSpPr>
+          <p:spPr>
+            <a:xfrm flipV="1">
+              <a:off x="6286500" y="2457450"/>
+              <a:ext cx="1" cy="381000"/>
+            </a:xfrm>
+            <a:prstGeom prst="line">
+              <a:avLst/>
+            </a:prstGeom>
+            <a:noFill/>
+            <a:ln w="19050">
+              <a:solidFill>
+                <a:schemeClr val="accent3"/>
+              </a:solidFill>
+              <a:prstDash val="dash"/>
+              <a:tailEnd type="triangle" w="lg" len="lg"/>
+            </a:ln>
+          </p:spPr>
+        </p:sp>
+        <p:sp>
+          <p:nvSpPr>
+            <p:cNvPr id="45" name="Ellipse 45"/>
+            <p:cNvSpPr/>
+            <p:nvPr/>
+          </p:nvSpPr>
+          <p:spPr>
+            <a:xfrm>
+              <a:off x="6391275" y="2524125"/>
+              <a:ext cx="247650" cy="247650"/>
+            </a:xfrm>
+            <a:prstGeom prst="ellipse">
+              <a:avLst/>
+            </a:prstGeom>
+            <a:solidFill>
+              <a:schemeClr val="accent3"/>
+            </a:solidFill>
+            <a:ln>
+              <a:noFill/>
+            </a:ln>
+          </p:spPr>
+        </p:sp>
+        <p:sp>
+          <p:nvSpPr>
+            <p:cNvPr id="46" name="TextBox 46"/>
+            <p:cNvSpPr txBox="1"/>
+            <p:nvPr/>
+          </p:nvSpPr>
+          <p:spPr>
+            <a:xfrm>
+              <a:off x="6462544" y="2552700"/>
+              <a:ext cx="105112" cy="234696"/>
+            </a:xfrm>
+            <a:prstGeom prst="rect">
+              <a:avLst/>
+            </a:prstGeom>
+            <a:noFill/>
+            <a:ln>
+              <a:noFill/>
+            </a:ln>
+          </p:spPr>
+          <p:txBody>
+            <a:bodyPr wrap="none" lIns="0" tIns="0" rIns="0" bIns="0" anchor="t" anchorCtr="0">
+              <a:spAutoFit/>
+            </a:bodyPr>
+            <a:lstStyle/>
+            <a:p>
+              <a:pPr algn="ctr"/>
+              <a:r>
+                <a:rPr lang="en" sz="1200" b="1" dirty="0">
+                  <a:solidFill>
+                    <a:srgbClr val="FFFFFF"/>
+                  </a:solidFill>
+                  <a:latin typeface="+mn-lt"/>
+                  <a:ea typeface="+mn-ea"/>
+                  <a:cs typeface="+mn-cs"/>
+                </a:rPr>
+                <a:t>5</a:t>
+              </a:r>
+            </a:p>
+          </p:txBody>
+        </p:sp>
+        <p:sp>
+          <p:nvSpPr>
+            <p:cNvPr id="47" name="TextBox 47"/>
+            <p:cNvSpPr txBox="1"/>
+            <p:nvPr/>
+          </p:nvSpPr>
+          <p:spPr>
+            <a:xfrm>
+              <a:off x="6718554" y="2565400"/>
+              <a:ext cx="905713" cy="234696"/>
+            </a:xfrm>
+            <a:prstGeom prst="rect">
+              <a:avLst/>
+            </a:prstGeom>
+            <a:noFill/>
+            <a:ln>
+              <a:noFill/>
+            </a:ln>
+          </p:spPr>
+          <p:txBody>
+            <a:bodyPr wrap="none" lIns="0" tIns="0" rIns="0" bIns="0" anchor="t" anchorCtr="0">
+              <a:spAutoFit/>
+            </a:bodyPr>
+            <a:lstStyle/>
+            <a:p>
+              <a:pPr algn="l"/>
+              <a:r>
+                <a:rPr lang="en" sz="1200" dirty="0">
+                  <a:solidFill>
+                    <a:schemeClr val="accent3"/>
+                  </a:solidFill>
+                  <a:latin typeface="Consolas"/>
+                  <a:ea typeface="Consolas"/>
+                  <a:cs typeface="Consolas"/>
+                </a:rPr>
+                <a:t>updateItem</a:t>
+              </a:r>
+            </a:p>
+          </p:txBody>
+        </p:sp>
+      </p:grpSp>
+      <p:grpSp>
+        <p:nvGrpSpPr>
+          <p:cNvPr id="57" name="flow-bottom"/>
+          <p:cNvGrpSpPr/>
+          <p:nvPr/>
+        </p:nvGrpSpPr>
+        <p:grpSpPr>
+          <a:xfrm>
+            <a:off x="1876425" y="4800600"/>
+            <a:ext cx="5905981" cy="514350"/>
+            <a:chOff x="1876425" y="4800600"/>
+            <a:chExt cx="5905981" cy="514350"/>
+          </a:xfrm>
+        </p:grpSpPr>
+        <p:sp>
+          <p:nvSpPr>
+            <p:cNvPr id="49" name="Line 49"/>
+            <p:cNvSpPr/>
+            <p:nvPr/>
+          </p:nvSpPr>
+          <p:spPr>
+            <a:xfrm>
+              <a:off x="2228850" y="4800600"/>
+              <a:ext cx="1" cy="495300"/>
+            </a:xfrm>
+            <a:prstGeom prst="line">
+              <a:avLst/>
+            </a:prstGeom>
+            <a:noFill/>
+            <a:ln w="19050">
+              <a:solidFill>
+                <a:schemeClr val="accent3"/>
+              </a:solidFill>
+              <a:prstDash val="dash"/>
+              <a:tailEnd type="triangle" w="lg" len="lg"/>
+            </a:ln>
+          </p:spPr>
+        </p:sp>
+        <p:sp>
+          <p:nvSpPr>
+            <p:cNvPr id="50" name="Ellipse 50"/>
+            <p:cNvSpPr/>
+            <p:nvPr/>
+          </p:nvSpPr>
+          <p:spPr>
+            <a:xfrm>
+              <a:off x="1876425" y="4924425"/>
+              <a:ext cx="247650" cy="247650"/>
+            </a:xfrm>
+            <a:prstGeom prst="ellipse">
+              <a:avLst/>
+            </a:prstGeom>
+            <a:solidFill>
+              <a:schemeClr val="accent3"/>
+            </a:solidFill>
+            <a:ln>
+              <a:noFill/>
+            </a:ln>
+          </p:spPr>
+        </p:sp>
+        <p:sp>
+          <p:nvSpPr>
+            <p:cNvPr id="51" name="TextBox 51"/>
+            <p:cNvSpPr txBox="1"/>
+            <p:nvPr/>
+          </p:nvSpPr>
+          <p:spPr>
+            <a:xfrm>
+              <a:off x="1947694" y="4953000"/>
+              <a:ext cx="105112" cy="234696"/>
+            </a:xfrm>
+            <a:prstGeom prst="rect">
+              <a:avLst/>
+            </a:prstGeom>
+            <a:noFill/>
+            <a:ln>
+              <a:noFill/>
+            </a:ln>
+          </p:spPr>
+          <p:txBody>
+            <a:bodyPr wrap="none" lIns="0" tIns="0" rIns="0" bIns="0" anchor="t" anchorCtr="0">
+              <a:spAutoFit/>
+            </a:bodyPr>
+            <a:lstStyle/>
+            <a:p>
+              <a:pPr algn="ctr"/>
+              <a:r>
+                <a:rPr lang="en" sz="1200" b="1" dirty="0">
+                  <a:solidFill>
+                    <a:srgbClr val="FFFFFF"/>
+                  </a:solidFill>
+                  <a:latin typeface="+mn-lt"/>
+                  <a:ea typeface="+mn-ea"/>
+                  <a:cs typeface="+mn-cs"/>
+                </a:rPr>
+                <a:t>3</a:t>
+              </a:r>
+            </a:p>
+          </p:txBody>
+        </p:sp>
+        <p:sp>
+          <p:nvSpPr>
+            <p:cNvPr id="52" name="TextBox 52"/>
+            <p:cNvSpPr txBox="1"/>
+            <p:nvPr/>
+          </p:nvSpPr>
+          <p:spPr>
+            <a:xfrm>
+              <a:off x="2413254" y="4953000"/>
+              <a:ext cx="570407" cy="234696"/>
+            </a:xfrm>
+            <a:prstGeom prst="rect">
+              <a:avLst/>
+            </a:prstGeom>
+            <a:noFill/>
+            <a:ln>
+              <a:noFill/>
+            </a:ln>
+          </p:spPr>
+          <p:txBody>
+            <a:bodyPr wrap="none" lIns="0" tIns="0" rIns="0" bIns="0" anchor="t" anchorCtr="0">
+              <a:spAutoFit/>
+            </a:bodyPr>
+            <a:lstStyle/>
+            <a:p>
+              <a:pPr algn="l"/>
+              <a:r>
+                <a:rPr lang="en" sz="1200" b="1" dirty="0">
+                  <a:solidFill>
+                    <a:schemeClr val="accent3"/>
+                  </a:solidFill>
+                  <a:latin typeface="+mn-lt"/>
+                  <a:ea typeface="+mn-ea"/>
+                  <a:cs typeface="+mn-cs"/>
+                </a:rPr>
+                <a:t>publish</a:t>
+              </a:r>
+            </a:p>
+          </p:txBody>
+        </p:sp>
+        <p:sp>
+          <p:nvSpPr>
+            <p:cNvPr id="53" name="Line 53"/>
+            <p:cNvSpPr/>
+            <p:nvPr/>
+          </p:nvSpPr>
+          <p:spPr>
+            <a:xfrm flipV="1">
+              <a:off x="6286500" y="4819650"/>
+              <a:ext cx="1" cy="495300"/>
+            </a:xfrm>
+            <a:prstGeom prst="line">
+              <a:avLst/>
+            </a:prstGeom>
+            <a:noFill/>
+            <a:ln w="19050">
+              <a:solidFill>
+                <a:schemeClr val="accent3"/>
+              </a:solidFill>
+              <a:prstDash val="dash"/>
+              <a:tailEnd type="triangle" w="lg" len="lg"/>
+            </a:ln>
+          </p:spPr>
+        </p:sp>
+        <p:sp>
+          <p:nvSpPr>
+            <p:cNvPr id="54" name="Ellipse 54"/>
+            <p:cNvSpPr/>
+            <p:nvPr/>
+          </p:nvSpPr>
+          <p:spPr>
+            <a:xfrm>
+              <a:off x="6391275" y="4924425"/>
+              <a:ext cx="247650" cy="247650"/>
+            </a:xfrm>
+            <a:prstGeom prst="ellipse">
+              <a:avLst/>
+            </a:prstGeom>
+            <a:solidFill>
+              <a:schemeClr val="accent3"/>
+            </a:solidFill>
+            <a:ln>
+              <a:noFill/>
+            </a:ln>
+          </p:spPr>
+        </p:sp>
+        <p:sp>
+          <p:nvSpPr>
+            <p:cNvPr id="55" name="TextBox 55"/>
+            <p:cNvSpPr txBox="1"/>
+            <p:nvPr/>
+          </p:nvSpPr>
+          <p:spPr>
+            <a:xfrm>
+              <a:off x="6462544" y="4953000"/>
+              <a:ext cx="105112" cy="234696"/>
+            </a:xfrm>
+            <a:prstGeom prst="rect">
+              <a:avLst/>
+            </a:prstGeom>
+            <a:noFill/>
+            <a:ln>
+              <a:noFill/>
+            </a:ln>
+          </p:spPr>
+          <p:txBody>
+            <a:bodyPr wrap="none" lIns="0" tIns="0" rIns="0" bIns="0" anchor="t" anchorCtr="0">
+              <a:spAutoFit/>
+            </a:bodyPr>
+            <a:lstStyle/>
+            <a:p>
+              <a:pPr algn="ctr"/>
+              <a:r>
+                <a:rPr lang="en" sz="1200" b="1" dirty="0">
+                  <a:solidFill>
+                    <a:srgbClr val="FFFFFF"/>
+                  </a:solidFill>
+                  <a:latin typeface="+mn-lt"/>
+                  <a:ea typeface="+mn-ea"/>
+                  <a:cs typeface="+mn-cs"/>
+                </a:rPr>
+                <a:t>4</a:t>
+              </a:r>
+            </a:p>
+          </p:txBody>
+        </p:sp>
+        <p:sp>
+          <p:nvSpPr>
+            <p:cNvPr id="56" name="TextBox 56"/>
+            <p:cNvSpPr txBox="1"/>
+            <p:nvPr/>
+          </p:nvSpPr>
+          <p:spPr>
+            <a:xfrm>
+              <a:off x="6680454" y="4953000"/>
+              <a:ext cx="1101952" cy="234696"/>
+            </a:xfrm>
+            <a:prstGeom prst="rect">
+              <a:avLst/>
+            </a:prstGeom>
+            <a:noFill/>
+            <a:ln>
+              <a:noFill/>
+            </a:ln>
+          </p:spPr>
+          <p:txBody>
+            <a:bodyPr wrap="none" lIns="0" tIns="0" rIns="0" bIns="0" anchor="t" anchorCtr="0">
+              <a:spAutoFit/>
+            </a:bodyPr>
+            <a:lstStyle/>
+            <a:p>
+              <a:pPr algn="l"/>
+              <a:r>
+                <a:rPr lang="en" sz="1200" b="1" dirty="0">
+                  <a:solidFill>
+                    <a:schemeClr val="accent3"/>
+                  </a:solidFill>
+                  <a:latin typeface="+mn-lt"/>
+                  <a:ea typeface="+mn-ea"/>
+                  <a:cs typeface="+mn-cs"/>
+                </a:rPr>
+                <a:t>same message</a:t>
+              </a:r>
+            </a:p>
+          </p:txBody>
+        </p:sp>
+      </p:grpSp>
+      <p:grpSp>
+        <p:nvGrpSpPr>
+          <p:cNvPr id="67" name="redis"/>
+          <p:cNvGrpSpPr/>
+          <p:nvPr/>
+        </p:nvGrpSpPr>
+        <p:grpSpPr>
+          <a:xfrm>
+            <a:off x="609600" y="5334000"/>
+            <a:ext cx="7296150" cy="838200"/>
+            <a:chOff x="609600" y="5334000"/>
+            <a:chExt cx="7296150" cy="838200"/>
+          </a:xfrm>
+        </p:grpSpPr>
+        <p:sp>
+          <p:nvSpPr>
+            <p:cNvPr id="58" name="Rectangle 58"/>
+            <p:cNvSpPr/>
+            <p:nvPr/>
+          </p:nvSpPr>
+          <p:spPr>
+            <a:xfrm>
+              <a:off x="609600" y="5334000"/>
+              <a:ext cx="7296150" cy="838200"/>
+            </a:xfrm>
+            <a:prstGeom prst="roundRect">
+              <a:avLst>
+                <a:gd name="adj" fmla="val 4545"/>
+              </a:avLst>
+            </a:prstGeom>
+            <a:solidFill>
+              <a:srgbClr val="F1EBFD"/>
+            </a:solidFill>
+            <a:ln w="14288">
+              <a:solidFill>
+                <a:schemeClr val="accent3"/>
+              </a:solidFill>
+              <a:custDash>
+                <a:ds d="466667" sp="333333"/>
+              </a:custDash>
+            </a:ln>
+          </p:spPr>
+        </p:sp>
+        <p:grpSp>
+          <p:nvGrpSpPr>
+            <p:cNvPr id="62" name="Group 62"/>
+            <p:cNvGrpSpPr/>
+            <p:nvPr/>
+          </p:nvGrpSpPr>
+          <p:grpSpPr>
+            <a:xfrm>
+              <a:off x="838200" y="5591175"/>
+              <a:ext cx="152400" cy="171450"/>
+              <a:chOff x="838200" y="5591175"/>
+              <a:chExt cx="152400" cy="171450"/>
+            </a:xfrm>
+          </p:grpSpPr>
+          <p:sp>
+            <p:nvSpPr>
+              <p:cNvPr id="59" name="Freeform 59"/>
+              <p:cNvSpPr/>
+              <p:nvPr/>
+            </p:nvSpPr>
+            <p:spPr>
+              <a:xfrm>
+                <a:off x="838200" y="5591175"/>
+                <a:ext cx="152400" cy="57150"/>
+              </a:xfrm>
+              <a:custGeom>
+                <a:avLst/>
+                <a:gdLst/>
+                <a:ahLst/>
+                <a:cxnLst/>
+                <a:rect l="l" t="t" r="r" b="b"/>
+                <a:pathLst>
+                  <a:path w="152400" h="57150">
+                    <a:moveTo>
+                      <a:pt x="0" y="28575"/>
+                    </a:moveTo>
+                    <a:cubicBezTo>
+                      <a:pt x="0" y="44357"/>
+                      <a:pt x="34116" y="57150"/>
+                      <a:pt x="76200" y="57150"/>
+                    </a:cubicBezTo>
+                    <a:cubicBezTo>
+                      <a:pt x="118284" y="57150"/>
+                      <a:pt x="152400" y="44357"/>
+                      <a:pt x="152400" y="28575"/>
+                    </a:cubicBezTo>
+                    <a:cubicBezTo>
+                      <a:pt x="152400" y="12793"/>
+                      <a:pt x="118284" y="0"/>
+                      <a:pt x="76200" y="0"/>
+                    </a:cubicBezTo>
+                    <a:cubicBezTo>
+                      <a:pt x="34116" y="0"/>
+                      <a:pt x="0" y="12793"/>
+                      <a:pt x="0" y="28575"/>
+                    </a:cubicBezTo>
+                  </a:path>
+                </a:pathLst>
+              </a:custGeom>
+              <a:noFill/>
+              <a:ln w="19050">
+                <a:solidFill>
+                  <a:schemeClr val="accent3"/>
+                </a:solidFill>
+              </a:ln>
+            </p:spPr>
+          </p:sp>
+          <p:sp>
+            <p:nvSpPr>
+              <p:cNvPr id="60" name="Freeform 60"/>
+              <p:cNvSpPr/>
+              <p:nvPr/>
+            </p:nvSpPr>
+            <p:spPr>
+              <a:xfrm>
+                <a:off x="838200" y="5619750"/>
+                <a:ext cx="152400" cy="85725"/>
+              </a:xfrm>
+              <a:custGeom>
+                <a:avLst/>
+                <a:gdLst/>
+                <a:ahLst/>
+                <a:cxnLst/>
+                <a:rect l="l" t="t" r="r" b="b"/>
+                <a:pathLst>
+                  <a:path w="152400" h="85725">
+                    <a:moveTo>
+                      <a:pt x="0" y="0"/>
+                    </a:moveTo>
+                    <a:lnTo>
+                      <a:pt x="0" y="57150"/>
+                    </a:lnTo>
+                    <a:cubicBezTo>
+                      <a:pt x="0" y="72932"/>
+                      <a:pt x="34116" y="85725"/>
+                      <a:pt x="76200" y="85725"/>
+                    </a:cubicBezTo>
+                    <a:cubicBezTo>
+                      <a:pt x="118284" y="85725"/>
+                      <a:pt x="152400" y="72932"/>
+                      <a:pt x="152400" y="57150"/>
+                    </a:cubicBezTo>
+                    <a:lnTo>
+                      <a:pt x="152400" y="0"/>
+                    </a:lnTo>
+                  </a:path>
+                </a:pathLst>
+              </a:custGeom>
+              <a:noFill/>
+              <a:ln w="19050">
+                <a:solidFill>
+                  <a:schemeClr val="accent3"/>
+                </a:solidFill>
+              </a:ln>
+            </p:spPr>
+          </p:sp>
+          <p:sp>
+            <p:nvSpPr>
+              <p:cNvPr id="61" name="Freeform 61"/>
+              <p:cNvSpPr/>
+              <p:nvPr/>
+            </p:nvSpPr>
+            <p:spPr>
+              <a:xfrm>
+                <a:off x="838200" y="5676900"/>
+                <a:ext cx="152400" cy="85725"/>
+              </a:xfrm>
+              <a:custGeom>
+                <a:avLst/>
+                <a:gdLst/>
+                <a:ahLst/>
+                <a:cxnLst/>
+                <a:rect l="l" t="t" r="r" b="b"/>
+                <a:pathLst>
+                  <a:path w="152400" h="85725">
+                    <a:moveTo>
+                      <a:pt x="0" y="0"/>
+                    </a:moveTo>
+                    <a:lnTo>
+                      <a:pt x="0" y="57150"/>
+                    </a:lnTo>
+                    <a:cubicBezTo>
+                      <a:pt x="0" y="72932"/>
+                      <a:pt x="34116" y="85725"/>
+                      <a:pt x="76200" y="85725"/>
+                    </a:cubicBezTo>
+                    <a:cubicBezTo>
+                      <a:pt x="118284" y="85725"/>
+                      <a:pt x="152400" y="72932"/>
+                      <a:pt x="152400" y="57150"/>
+                    </a:cubicBezTo>
+                    <a:lnTo>
+                      <a:pt x="152400" y="0"/>
+                    </a:lnTo>
+                  </a:path>
+                </a:pathLst>
+              </a:custGeom>
+              <a:noFill/>
+              <a:ln w="19050">
+                <a:solidFill>
+                  <a:schemeClr val="accent3"/>
+                </a:solidFill>
+              </a:ln>
+            </p:spPr>
+          </p:sp>
+        </p:grpSp>
+        <p:sp>
+          <p:nvSpPr>
+            <p:cNvPr id="63" name="TextBox 63"/>
+            <p:cNvSpPr txBox="1"/>
+            <p:nvPr/>
+          </p:nvSpPr>
+          <p:spPr>
+            <a:xfrm>
+              <a:off x="1116330" y="5562600"/>
+              <a:ext cx="1555829" cy="293370"/>
+            </a:xfrm>
+            <a:prstGeom prst="rect">
+              <a:avLst/>
+            </a:prstGeom>
+            <a:noFill/>
+            <a:ln>
+              <a:noFill/>
+            </a:ln>
+          </p:spPr>
+          <p:txBody>
+            <a:bodyPr wrap="none" lIns="0" tIns="0" rIns="0" bIns="0" anchor="t" anchorCtr="0">
+              <a:spAutoFit/>
+            </a:bodyPr>
+            <a:lstStyle/>
+            <a:p>
+              <a:pPr algn="l"/>
+              <a:r>
+                <a:rPr lang="en" sz="1500" b="1" dirty="0">
+                  <a:solidFill>
+                    <a:schemeClr val="accent3"/>
+                  </a:solidFill>
+                  <a:latin typeface="+mn-lt"/>
+                  <a:ea typeface="+mn-ea"/>
+                  <a:cs typeface="+mn-cs"/>
+                </a:rPr>
+                <a:t>Redis backplane</a:t>
+              </a:r>
+            </a:p>
+          </p:txBody>
+        </p:sp>
+        <p:sp>
+          <p:nvSpPr>
+            <p:cNvPr id="64" name="TextBox 64"/>
+            <p:cNvSpPr txBox="1"/>
+            <p:nvPr/>
+          </p:nvSpPr>
+          <p:spPr>
+            <a:xfrm>
+              <a:off x="794004" y="5886450"/>
+              <a:ext cx="3576280" cy="234696"/>
+            </a:xfrm>
+            <a:prstGeom prst="rect">
+              <a:avLst/>
+            </a:prstGeom>
+            <a:noFill/>
+            <a:ln>
+              <a:noFill/>
+            </a:ln>
+          </p:spPr>
+          <p:txBody>
+            <a:bodyPr wrap="none" lIns="0" tIns="0" rIns="0" bIns="0" anchor="t" anchorCtr="0">
+              <a:spAutoFit/>
+            </a:bodyPr>
+            <a:lstStyle/>
+            <a:p>
+              <a:pPr algn="l"/>
+              <a:r>
+                <a:rPr lang="en" sz="1200" dirty="0">
+                  <a:solidFill>
+                    <a:schemeClr val="dk1"/>
+                  </a:solidFill>
+                  <a:latin typeface="+mn-lt"/>
+                  <a:ea typeface="+mn-ea"/>
+                  <a:cs typeface="+mn-cs"/>
+                </a:rPr>
+                <a:t>Pub/Sub between servers · SignalR messages only</a:t>
+              </a:r>
+            </a:p>
+          </p:txBody>
+        </p:sp>
+        <p:sp>
+          <p:nvSpPr>
+            <p:cNvPr id="65" name="Rectangle 65"/>
+            <p:cNvSpPr/>
+            <p:nvPr/>
+          </p:nvSpPr>
+          <p:spPr>
+            <a:xfrm>
+              <a:off x="5048250" y="5524500"/>
+              <a:ext cx="2667000" cy="457200"/>
+            </a:xfrm>
+            <a:prstGeom prst="roundRect">
+              <a:avLst>
+                <a:gd name="adj" fmla="val 8333"/>
+              </a:avLst>
+            </a:prstGeom>
+            <a:solidFill>
+              <a:schemeClr val="lt2"/>
+            </a:solidFill>
+            <a:ln w="19050">
+              <a:solidFill>
+                <a:schemeClr val="accent2"/>
+              </a:solidFill>
+            </a:ln>
+          </p:spPr>
+        </p:sp>
+        <p:sp>
+          <p:nvSpPr>
+            <p:cNvPr id="66" name="TextBox 66"/>
+            <p:cNvSpPr txBox="1"/>
+            <p:nvPr/>
+          </p:nvSpPr>
+          <p:spPr>
+            <a:xfrm>
+              <a:off x="5225742" y="5657850"/>
+              <a:ext cx="2312017" cy="250317"/>
+            </a:xfrm>
+            <a:prstGeom prst="rect">
+              <a:avLst/>
+            </a:prstGeom>
+            <a:noFill/>
+            <a:ln>
+              <a:noFill/>
+            </a:ln>
+          </p:spPr>
+          <p:txBody>
+            <a:bodyPr wrap="none" lIns="0" tIns="0" rIns="0" bIns="0" anchor="t" anchorCtr="0">
+              <a:spAutoFit/>
+            </a:bodyPr>
+            <a:lstStyle/>
+            <a:p>
+              <a:pPr algn="ctr"/>
+              <a:r>
+                <a:rPr lang="en" sz="1280" dirty="0">
+                  <a:solidFill>
+                    <a:schemeClr val="accent1"/>
+                  </a:solidFill>
+                  <a:latin typeface="Consolas"/>
+                  <a:ea typeface="Consolas"/>
+                  <a:cs typeface="Consolas"/>
+                </a:rPr>
+                <a:t>.AddStackExchangeRedis()</a:t>
+              </a:r>
+            </a:p>
+          </p:txBody>
+        </p:sp>
+      </p:grpSp>
+      <p:grpSp>
+        <p:nvGrpSpPr>
+          <p:cNvPr id="80" name="does"/>
+          <p:cNvGrpSpPr/>
+          <p:nvPr/>
+        </p:nvGrpSpPr>
+        <p:grpSpPr>
+          <a:xfrm>
+            <a:off x="8191500" y="1866900"/>
+            <a:ext cx="3390900" cy="2209800"/>
+            <a:chOff x="8191500" y="1866900"/>
+            <a:chExt cx="3390900" cy="2209800"/>
+          </a:xfrm>
+        </p:grpSpPr>
+        <p:sp>
+          <p:nvSpPr>
+            <p:cNvPr id="68" name="Rectangle 68"/>
+            <p:cNvSpPr/>
+            <p:nvPr/>
+          </p:nvSpPr>
+          <p:spPr>
+            <a:xfrm>
+              <a:off x="8191500" y="1866900"/>
+              <a:ext cx="3390900" cy="2209800"/>
+            </a:xfrm>
+            <a:prstGeom prst="roundRect">
+              <a:avLst>
+                <a:gd name="adj" fmla="val 1724"/>
+              </a:avLst>
+            </a:prstGeom>
+            <a:solidFill>
+              <a:srgbClr val="F1EBFD"/>
+            </a:solidFill>
+            <a:ln w="14288">
+              <a:solidFill>
+                <a:schemeClr val="accent3"/>
+              </a:solidFill>
+              <a:custDash>
+                <a:ds d="466667" sp="333333"/>
+              </a:custDash>
+            </a:ln>
+          </p:spPr>
+        </p:sp>
+        <p:sp>
+          <p:nvSpPr>
+            <p:cNvPr id="69" name="TextBox 69"/>
+            <p:cNvSpPr txBox="1"/>
+            <p:nvPr/>
+          </p:nvSpPr>
+          <p:spPr>
+            <a:xfrm>
+              <a:off x="8374380" y="1981200"/>
+              <a:ext cx="1227728" cy="293370"/>
+            </a:xfrm>
+            <a:prstGeom prst="rect">
+              <a:avLst/>
+            </a:prstGeom>
+            <a:noFill/>
+            <a:ln>
+              <a:noFill/>
+            </a:ln>
+          </p:spPr>
+          <p:txBody>
+            <a:bodyPr wrap="none" lIns="0" tIns="0" rIns="0" bIns="0" anchor="t" anchorCtr="0">
+              <a:spAutoFit/>
+            </a:bodyPr>
+            <a:lstStyle/>
+            <a:p>
+              <a:pPr algn="l"/>
+              <a:r>
+                <a:rPr lang="en" sz="1500" b="1" dirty="0">
+                  <a:solidFill>
+                    <a:schemeClr val="accent3"/>
+                  </a:solidFill>
+                  <a:latin typeface="+mn-lt"/>
+                  <a:ea typeface="+mn-ea"/>
+                  <a:cs typeface="+mn-cs"/>
+                </a:rPr>
+                <a:t>What it does</a:t>
+              </a:r>
+            </a:p>
+          </p:txBody>
+        </p:sp>
+        <p:grpSp>
+          <p:nvGrpSpPr>
+            <p:cNvPr id="79" name="Group 79"/>
+            <p:cNvGrpSpPr/>
+            <p:nvPr/>
+          </p:nvGrpSpPr>
+          <p:grpSpPr>
+            <a:xfrm>
+              <a:off x="8401050" y="2387600"/>
+              <a:ext cx="2607018" cy="1599946"/>
+              <a:chOff x="8401050" y="2387600"/>
+              <a:chExt cx="2607018" cy="1599946"/>
+            </a:xfrm>
+          </p:grpSpPr>
+          <p:sp>
+            <p:nvSpPr>
+              <p:cNvPr id="70" name="Ellipse 70"/>
+              <p:cNvSpPr/>
+              <p:nvPr/>
+            </p:nvSpPr>
+            <p:spPr>
+              <a:xfrm>
+                <a:off x="8401050" y="2457450"/>
+                <a:ext cx="76200" cy="76200"/>
+              </a:xfrm>
+              <a:prstGeom prst="ellipse">
+                <a:avLst/>
+              </a:prstGeom>
+              <a:solidFill>
+                <a:schemeClr val="accent3"/>
+              </a:solidFill>
+              <a:ln>
+                <a:noFill/>
+              </a:ln>
+            </p:spPr>
+          </p:sp>
+          <p:sp>
+            <p:nvSpPr>
+              <p:cNvPr id="71" name="TextBox 71"/>
+              <p:cNvSpPr txBox="1"/>
+              <p:nvPr/>
+            </p:nvSpPr>
+            <p:spPr>
+              <a:xfrm>
+                <a:off x="8584692" y="2387600"/>
+                <a:ext cx="2007608" cy="264033"/>
+              </a:xfrm>
+              <a:prstGeom prst="rect">
+                <a:avLst/>
+              </a:prstGeom>
+              <a:noFill/>
+              <a:ln>
+                <a:noFill/>
+              </a:ln>
+            </p:spPr>
+            <p:txBody>
+              <a:bodyPr wrap="none" lIns="0" tIns="0" rIns="0" bIns="0" anchor="t" anchorCtr="0">
+                <a:spAutoFit/>
+              </a:bodyPr>
+              <a:lstStyle/>
+              <a:p>
+                <a:pPr algn="l"/>
+                <a:r>
+                  <a:rPr lang="en" sz="1350" dirty="0">
+                    <a:solidFill>
+                      <a:schemeClr val="dk1"/>
+                    </a:solidFill>
+                    <a:latin typeface="+mn-lt"/>
+                    <a:ea typeface="+mn-ea"/>
+                    <a:cs typeface="+mn-cs"/>
+                  </a:rPr>
+                  <a:t>Relays SignalR messages</a:t>
+                </a:r>
+              </a:p>
+            </p:txBody>
+          </p:sp>
+          <p:sp>
+            <p:nvSpPr>
+              <p:cNvPr id="72" name="TextBox 72"/>
+              <p:cNvSpPr txBox="1"/>
+              <p:nvPr/>
+            </p:nvSpPr>
+            <p:spPr>
+              <a:xfrm>
+                <a:off x="8584692" y="2616200"/>
+                <a:ext cx="2169145" cy="264033"/>
+              </a:xfrm>
+              <a:prstGeom prst="rect">
+                <a:avLst/>
+              </a:prstGeom>
+              <a:noFill/>
+              <a:ln>
+                <a:noFill/>
+              </a:ln>
+            </p:spPr>
+            <p:txBody>
+              <a:bodyPr wrap="none" lIns="0" tIns="0" rIns="0" bIns="0" anchor="t" anchorCtr="0">
+                <a:spAutoFit/>
+              </a:bodyPr>
+              <a:lstStyle/>
+              <a:p>
+                <a:pPr algn="l"/>
+                <a:r>
+                  <a:rPr lang="en" sz="1350" dirty="0">
+                    <a:solidFill>
+                      <a:schemeClr val="dk1"/>
+                    </a:solidFill>
+                    <a:latin typeface="+mn-lt"/>
+                    <a:ea typeface="+mn-ea"/>
+                    <a:cs typeface="+mn-cs"/>
+                  </a:rPr>
+                  <a:t>between servers (Pub/Sub)</a:t>
+                </a:r>
+              </a:p>
+            </p:txBody>
+          </p:sp>
+          <p:sp>
+            <p:nvSpPr>
+              <p:cNvPr id="73" name="Ellipse 73"/>
+              <p:cNvSpPr/>
+              <p:nvPr/>
+            </p:nvSpPr>
+            <p:spPr>
+              <a:xfrm>
+                <a:off x="8401050" y="3028950"/>
+                <a:ext cx="76200" cy="76200"/>
+              </a:xfrm>
+              <a:prstGeom prst="ellipse">
+                <a:avLst/>
+              </a:prstGeom>
+              <a:solidFill>
+                <a:schemeClr val="accent3"/>
+              </a:solidFill>
+              <a:ln>
+                <a:noFill/>
+              </a:ln>
+            </p:spPr>
+          </p:sp>
+          <p:sp>
+            <p:nvSpPr>
+              <p:cNvPr id="74" name="TextBox 74"/>
+              <p:cNvSpPr txBox="1"/>
+              <p:nvPr/>
+            </p:nvSpPr>
+            <p:spPr>
+              <a:xfrm>
+                <a:off x="8584692" y="2959100"/>
+                <a:ext cx="1960583" cy="264033"/>
+              </a:xfrm>
+              <a:prstGeom prst="rect">
+                <a:avLst/>
+              </a:prstGeom>
+              <a:noFill/>
+              <a:ln>
+                <a:noFill/>
+              </a:ln>
+            </p:spPr>
+            <p:txBody>
+              <a:bodyPr wrap="none" lIns="0" tIns="0" rIns="0" bIns="0" anchor="t" anchorCtr="0">
+                <a:spAutoFit/>
+              </a:bodyPr>
+              <a:lstStyle/>
+              <a:p>
+                <a:pPr algn="l"/>
+                <a:r>
+                  <a:rPr lang="en" sz="1350" dirty="0">
+                    <a:solidFill>
+                      <a:schemeClr val="dk1"/>
+                    </a:solidFill>
+                    <a:latin typeface="+mn-lt"/>
+                    <a:ea typeface="+mn-ea"/>
+                    <a:cs typeface="+mn-cs"/>
+                  </a:rPr>
+                  <a:t>Clients.All · Group · User</a:t>
+                </a:r>
+              </a:p>
+            </p:txBody>
+          </p:sp>
+          <p:sp>
+            <p:nvSpPr>
+              <p:cNvPr id="75" name="TextBox 75"/>
+              <p:cNvSpPr txBox="1"/>
+              <p:nvPr/>
+            </p:nvSpPr>
+            <p:spPr>
+              <a:xfrm>
+                <a:off x="8584692" y="3187700"/>
+                <a:ext cx="2136949" cy="264033"/>
+              </a:xfrm>
+              <a:prstGeom prst="rect">
+                <a:avLst/>
+              </a:prstGeom>
+              <a:noFill/>
+              <a:ln>
+                <a:noFill/>
+              </a:ln>
+            </p:spPr>
+            <p:txBody>
+              <a:bodyPr wrap="none" lIns="0" tIns="0" rIns="0" bIns="0" anchor="t" anchorCtr="0">
+                <a:spAutoFit/>
+              </a:bodyPr>
+              <a:lstStyle/>
+              <a:p>
+                <a:pPr algn="l"/>
+                <a:r>
+                  <a:rPr lang="en" sz="1350" dirty="0">
+                    <a:solidFill>
+                      <a:schemeClr val="dk1"/>
+                    </a:solidFill>
+                    <a:latin typeface="+mn-lt"/>
+                    <a:ea typeface="+mn-ea"/>
+                    <a:cs typeface="+mn-cs"/>
+                  </a:rPr>
+                  <a:t>reach every server's clients</a:t>
+                </a:r>
+              </a:p>
+            </p:txBody>
+          </p:sp>
+          <p:sp>
+            <p:nvSpPr>
+              <p:cNvPr id="76" name="Ellipse 76"/>
+              <p:cNvSpPr/>
+              <p:nvPr/>
+            </p:nvSpPr>
+            <p:spPr>
+              <a:xfrm>
+                <a:off x="8401050" y="3600450"/>
+                <a:ext cx="76200" cy="76200"/>
+              </a:xfrm>
+              <a:prstGeom prst="ellipse">
+                <a:avLst/>
+              </a:prstGeom>
+              <a:solidFill>
+                <a:schemeClr val="accent3"/>
+              </a:solidFill>
+              <a:ln>
+                <a:noFill/>
+              </a:ln>
+            </p:spPr>
+          </p:sp>
+          <p:sp>
+            <p:nvSpPr>
+              <p:cNvPr id="77" name="TextBox 77"/>
+              <p:cNvSpPr txBox="1"/>
+              <p:nvPr/>
+            </p:nvSpPr>
+            <p:spPr>
+              <a:xfrm>
+                <a:off x="8584692" y="3530600"/>
+                <a:ext cx="2423376" cy="264033"/>
+              </a:xfrm>
+              <a:prstGeom prst="rect">
+                <a:avLst/>
+              </a:prstGeom>
+              <a:noFill/>
+              <a:ln>
+                <a:noFill/>
+              </a:ln>
+            </p:spPr>
+            <p:txBody>
+              <a:bodyPr wrap="none" lIns="0" tIns="0" rIns="0" bIns="0" anchor="t" anchorCtr="0">
+                <a:spAutoFit/>
+              </a:bodyPr>
+              <a:lstStyle/>
+              <a:p>
+                <a:pPr algn="l"/>
+                <a:r>
+                  <a:rPr lang="en" sz="1350" dirty="0">
+                    <a:solidFill>
+                      <a:schemeClr val="dk1"/>
+                    </a:solidFill>
+                    <a:latin typeface="+mn-lt"/>
+                    <a:ea typeface="+mn-ea"/>
+                    <a:cs typeface="+mn-cs"/>
+                  </a:rPr>
+                  <a:t>Your hub code stays the same</a:t>
+                </a:r>
+              </a:p>
+            </p:txBody>
+          </p:sp>
+          <p:sp>
+            <p:nvSpPr>
+              <p:cNvPr id="78" name="TextBox 78"/>
+              <p:cNvSpPr txBox="1"/>
+              <p:nvPr/>
+            </p:nvSpPr>
+            <p:spPr>
+              <a:xfrm>
+                <a:off x="8585454" y="3752850"/>
+                <a:ext cx="2098646" cy="234696"/>
+              </a:xfrm>
+              <a:prstGeom prst="rect">
+                <a:avLst/>
+              </a:prstGeom>
+              <a:noFill/>
+              <a:ln>
+                <a:noFill/>
+              </a:ln>
+            </p:spPr>
+            <p:txBody>
+              <a:bodyPr wrap="none" lIns="0" tIns="0" rIns="0" bIns="0" anchor="t" anchorCtr="0">
+                <a:spAutoFit/>
+              </a:bodyPr>
+              <a:lstStyle/>
+              <a:p>
+                <a:pPr algn="l"/>
+                <a:r>
+                  <a:rPr lang="en" sz="1200" dirty="0">
+                    <a:solidFill>
+                      <a:schemeClr val="accent5"/>
+                    </a:solidFill>
+                    <a:latin typeface="+mn-lt"/>
+                    <a:ea typeface="+mn-ea"/>
+                    <a:cs typeface="+mn-cs"/>
+                  </a:rPr>
+                  <a:t>only the manager is swapped</a:t>
+                </a:r>
+              </a:p>
+            </p:txBody>
+          </p:sp>
+        </p:grpSp>
+      </p:grpSp>
+      <p:grpSp>
+        <p:nvGrpSpPr>
+          <p:cNvPr id="92" name="does-not"/>
+          <p:cNvGrpSpPr/>
+          <p:nvPr/>
+        </p:nvGrpSpPr>
+        <p:grpSpPr>
+          <a:xfrm>
+            <a:off x="8191500" y="4229100"/>
+            <a:ext cx="3390900" cy="1946783"/>
+            <a:chOff x="8191500" y="4229100"/>
+            <a:chExt cx="3390900" cy="1946783"/>
+          </a:xfrm>
+        </p:grpSpPr>
+        <p:sp>
+          <p:nvSpPr>
+            <p:cNvPr id="81" name="Rectangle 81"/>
+            <p:cNvSpPr/>
+            <p:nvPr/>
+          </p:nvSpPr>
+          <p:spPr>
+            <a:xfrm>
+              <a:off x="8191500" y="4229100"/>
+              <a:ext cx="3390900" cy="1943100"/>
+            </a:xfrm>
+            <a:prstGeom prst="roundRect">
+              <a:avLst>
+                <a:gd name="adj" fmla="val 1961"/>
+              </a:avLst>
+            </a:prstGeom>
+            <a:solidFill>
+              <a:srgbClr val="FFFFFF"/>
+            </a:solidFill>
+            <a:ln w="14288">
+              <a:solidFill>
+                <a:schemeClr val="accent6"/>
+              </a:solidFill>
+            </a:ln>
+          </p:spPr>
+        </p:sp>
+        <p:sp>
+          <p:nvSpPr>
+            <p:cNvPr id="82" name="TextBox 82"/>
+            <p:cNvSpPr txBox="1"/>
+            <p:nvPr/>
+          </p:nvSpPr>
+          <p:spPr>
+            <a:xfrm>
+              <a:off x="8374380" y="4343400"/>
+              <a:ext cx="1912113" cy="293370"/>
+            </a:xfrm>
+            <a:prstGeom prst="rect">
+              <a:avLst/>
+            </a:prstGeom>
+            <a:noFill/>
+            <a:ln>
+              <a:noFill/>
+            </a:ln>
+          </p:spPr>
+          <p:txBody>
+            <a:bodyPr wrap="none" lIns="0" tIns="0" rIns="0" bIns="0" anchor="t" anchorCtr="0">
+              <a:spAutoFit/>
+            </a:bodyPr>
+            <a:lstStyle/>
+            <a:p>
+              <a:pPr algn="l"/>
+              <a:r>
+                <a:rPr lang="en" sz="1500" b="1" dirty="0">
+                  <a:solidFill>
+                    <a:srgbClr val="B36A13"/>
+                  </a:solidFill>
+                  <a:latin typeface="+mn-lt"/>
+                  <a:ea typeface="+mn-ea"/>
+                  <a:cs typeface="+mn-cs"/>
+                </a:rPr>
+                <a:t>What it does not do</a:t>
+              </a:r>
+            </a:p>
+          </p:txBody>
+        </p:sp>
+        <p:grpSp>
+          <p:nvGrpSpPr>
+            <p:cNvPr id="91" name="Group 91"/>
+            <p:cNvGrpSpPr/>
+            <p:nvPr/>
+          </p:nvGrpSpPr>
+          <p:grpSpPr>
+            <a:xfrm>
+              <a:off x="8401050" y="4749800"/>
+              <a:ext cx="2171796" cy="1426083"/>
+              <a:chOff x="8401050" y="4749800"/>
+              <a:chExt cx="2171796" cy="1426083"/>
+            </a:xfrm>
+          </p:grpSpPr>
+          <p:sp>
+            <p:nvSpPr>
+              <p:cNvPr id="83" name="Ellipse 83"/>
+              <p:cNvSpPr/>
+              <p:nvPr/>
+            </p:nvSpPr>
+            <p:spPr>
+              <a:xfrm>
+                <a:off x="8401050" y="4819650"/>
+                <a:ext cx="76200" cy="76200"/>
+              </a:xfrm>
+              <a:prstGeom prst="ellipse">
+                <a:avLst/>
+              </a:prstGeom>
+              <a:solidFill>
+                <a:srgbClr val="B36A13"/>
+              </a:solidFill>
+              <a:ln>
+                <a:noFill/>
+              </a:ln>
+            </p:spPr>
+          </p:sp>
+          <p:sp>
+            <p:nvSpPr>
+              <p:cNvPr id="84" name="TextBox 84"/>
+              <p:cNvSpPr txBox="1"/>
+              <p:nvPr/>
+            </p:nvSpPr>
+            <p:spPr>
+              <a:xfrm>
+                <a:off x="8584692" y="4749800"/>
+                <a:ext cx="1527515" cy="264033"/>
+              </a:xfrm>
+              <a:prstGeom prst="rect">
+                <a:avLst/>
+              </a:prstGeom>
+              <a:noFill/>
+              <a:ln>
+                <a:noFill/>
+              </a:ln>
+            </p:spPr>
+            <p:txBody>
+              <a:bodyPr wrap="none" lIns="0" tIns="0" rIns="0" bIns="0" anchor="t" anchorCtr="0">
+                <a:spAutoFit/>
+              </a:bodyPr>
+              <a:lstStyle/>
+              <a:p>
+                <a:pPr algn="l"/>
+                <a:r>
+                  <a:rPr lang="en" sz="1350" dirty="0">
+                    <a:solidFill>
+                      <a:schemeClr val="dk1"/>
+                    </a:solidFill>
+                    <a:latin typeface="+mn-lt"/>
+                    <a:ea typeface="+mn-ea"/>
+                    <a:cs typeface="+mn-cs"/>
+                  </a:rPr>
+                  <a:t>Move connections:</a:t>
+                </a:r>
+              </a:p>
+            </p:txBody>
+          </p:sp>
+          <p:sp>
+            <p:nvSpPr>
+              <p:cNvPr id="85" name="TextBox 85"/>
+              <p:cNvSpPr txBox="1"/>
+              <p:nvPr/>
+            </p:nvSpPr>
+            <p:spPr>
+              <a:xfrm>
+                <a:off x="8584692" y="4978400"/>
+                <a:ext cx="1973695" cy="264033"/>
+              </a:xfrm>
+              <a:prstGeom prst="rect">
+                <a:avLst/>
+              </a:prstGeom>
+              <a:noFill/>
+              <a:ln>
+                <a:noFill/>
+              </a:ln>
+            </p:spPr>
+            <p:txBody>
+              <a:bodyPr wrap="none" lIns="0" tIns="0" rIns="0" bIns="0" anchor="t" anchorCtr="0">
+                <a:spAutoFit/>
+              </a:bodyPr>
+              <a:lstStyle/>
+              <a:p>
+                <a:pPr algn="l"/>
+                <a:r>
+                  <a:rPr lang="en" sz="1350" dirty="0">
+                    <a:solidFill>
+                      <a:schemeClr val="dk1"/>
+                    </a:solidFill>
+                    <a:latin typeface="+mn-lt"/>
+                    <a:ea typeface="+mn-ea"/>
+                    <a:cs typeface="+mn-cs"/>
+                  </a:rPr>
+                  <a:t>sticky sessions still apply</a:t>
+                </a:r>
+              </a:p>
+            </p:txBody>
+          </p:sp>
+          <p:sp>
+            <p:nvSpPr>
+              <p:cNvPr id="86" name="Ellipse 86"/>
+              <p:cNvSpPr/>
+              <p:nvPr/>
+            </p:nvSpPr>
+            <p:spPr>
+              <a:xfrm>
+                <a:off x="8401050" y="5429250"/>
+                <a:ext cx="76200" cy="76200"/>
+              </a:xfrm>
+              <a:prstGeom prst="ellipse">
+                <a:avLst/>
+              </a:prstGeom>
+              <a:solidFill>
+                <a:srgbClr val="B36A13"/>
+              </a:solidFill>
+              <a:ln>
+                <a:noFill/>
+              </a:ln>
+            </p:spPr>
+          </p:sp>
+          <p:sp>
+            <p:nvSpPr>
+              <p:cNvPr id="87" name="TextBox 87"/>
+              <p:cNvSpPr txBox="1"/>
+              <p:nvPr/>
+            </p:nvSpPr>
+            <p:spPr>
+              <a:xfrm>
+                <a:off x="8584692" y="5359400"/>
+                <a:ext cx="1988154" cy="264033"/>
+              </a:xfrm>
+              <a:prstGeom prst="rect">
+                <a:avLst/>
+              </a:prstGeom>
+              <a:noFill/>
+              <a:ln>
+                <a:noFill/>
+              </a:ln>
+            </p:spPr>
+            <p:txBody>
+              <a:bodyPr wrap="none" lIns="0" tIns="0" rIns="0" bIns="0" anchor="t" anchorCtr="0">
+                <a:spAutoFit/>
+              </a:bodyPr>
+              <a:lstStyle/>
+              <a:p>
+                <a:pPr algn="l"/>
+                <a:r>
+                  <a:rPr lang="en" sz="1350" dirty="0">
+                    <a:solidFill>
+                      <a:schemeClr val="dk1"/>
+                    </a:solidFill>
+                    <a:latin typeface="+mn-lt"/>
+                    <a:ea typeface="+mn-ea"/>
+                    <a:cs typeface="+mn-cs"/>
+                  </a:rPr>
+                  <a:t>Replay messages missed</a:t>
+                </a:r>
+              </a:p>
+            </p:txBody>
+          </p:sp>
+          <p:sp>
+            <p:nvSpPr>
+              <p:cNvPr id="88" name="TextBox 88"/>
+              <p:cNvSpPr txBox="1"/>
+              <p:nvPr/>
+            </p:nvSpPr>
+            <p:spPr>
+              <a:xfrm>
+                <a:off x="8584692" y="5588000"/>
+                <a:ext cx="1961119" cy="264033"/>
+              </a:xfrm>
+              <a:prstGeom prst="rect">
+                <a:avLst/>
+              </a:prstGeom>
+              <a:noFill/>
+              <a:ln>
+                <a:noFill/>
+              </a:ln>
+            </p:spPr>
+            <p:txBody>
+              <a:bodyPr wrap="none" lIns="0" tIns="0" rIns="0" bIns="0" anchor="t" anchorCtr="0">
+                <a:spAutoFit/>
+              </a:bodyPr>
+              <a:lstStyle/>
+              <a:p>
+                <a:pPr algn="l"/>
+                <a:r>
+                  <a:rPr lang="en" sz="1350" dirty="0">
+                    <a:solidFill>
+                      <a:schemeClr val="dk1"/>
+                    </a:solidFill>
+                    <a:latin typeface="+mn-lt"/>
+                    <a:ea typeface="+mn-ea"/>
+                    <a:cs typeface="+mn-cs"/>
+                  </a:rPr>
+                  <a:t>while a client was offline</a:t>
+                </a:r>
+              </a:p>
+            </p:txBody>
+          </p:sp>
+          <p:sp>
+            <p:nvSpPr>
+              <p:cNvPr id="89" name="Ellipse 89"/>
+              <p:cNvSpPr/>
+              <p:nvPr/>
+            </p:nvSpPr>
+            <p:spPr>
+              <a:xfrm>
+                <a:off x="8401050" y="5981700"/>
+                <a:ext cx="76200" cy="76200"/>
+              </a:xfrm>
+              <a:prstGeom prst="ellipse">
+                <a:avLst/>
+              </a:prstGeom>
+              <a:solidFill>
+                <a:srgbClr val="B36A13"/>
+              </a:solidFill>
+              <a:ln>
+                <a:noFill/>
+              </a:ln>
+            </p:spPr>
+          </p:sp>
+          <p:sp>
+            <p:nvSpPr>
+              <p:cNvPr id="90" name="TextBox 90"/>
+              <p:cNvSpPr txBox="1"/>
+              <p:nvPr/>
+            </p:nvSpPr>
+            <p:spPr>
+              <a:xfrm>
+                <a:off x="8584692" y="5911850"/>
+                <a:ext cx="1729221" cy="264033"/>
+              </a:xfrm>
+              <a:prstGeom prst="rect">
+                <a:avLst/>
+              </a:prstGeom>
+              <a:noFill/>
+              <a:ln>
+                <a:noFill/>
+              </a:ln>
+            </p:spPr>
+            <p:txBody>
+              <a:bodyPr wrap="none" lIns="0" tIns="0" rIns="0" bIns="0" anchor="t" anchorCtr="0">
+                <a:spAutoFit/>
+              </a:bodyPr>
+              <a:lstStyle/>
+              <a:p>
+                <a:pPr algn="l"/>
+                <a:r>
+                  <a:rPr lang="en" sz="1350" dirty="0">
+                    <a:solidFill>
+                      <a:schemeClr val="dk1"/>
+                    </a:solidFill>
+                    <a:latin typeface="+mn-lt"/>
+                    <a:ea typeface="+mn-ea"/>
+                    <a:cs typeface="+mn-cs"/>
+                  </a:rPr>
+                  <a:t>Replace the database</a:t>
+                </a:r>
+              </a:p>
+            </p:txBody>
+          </p:sp>
+        </p:grpSp>
+      </p:grpSp>
+      <p:grpSp>
+        <p:nvGrpSpPr>
+          <p:cNvPr id="95" name="footer"/>
+          <p:cNvGrpSpPr/>
+          <p:nvPr/>
+        </p:nvGrpSpPr>
+        <p:grpSpPr>
+          <a:xfrm>
+            <a:off x="603504" y="6362700"/>
+            <a:ext cx="10984992" cy="234696"/>
+            <a:chOff x="603504" y="6362700"/>
+            <a:chExt cx="10984992" cy="234696"/>
+          </a:xfrm>
+        </p:grpSpPr>
+        <p:sp>
+          <p:nvSpPr>
+            <p:cNvPr id="93" name="TextBox 93"/>
+            <p:cNvSpPr txBox="1"/>
+            <p:nvPr/>
+          </p:nvSpPr>
+          <p:spPr>
+            <a:xfrm>
+              <a:off x="603504" y="6362700"/>
+              <a:ext cx="2449163" cy="234696"/>
+            </a:xfrm>
+            <a:prstGeom prst="rect">
+              <a:avLst/>
+            </a:prstGeom>
+            <a:noFill/>
+            <a:ln>
+              <a:noFill/>
+            </a:ln>
+          </p:spPr>
+          <p:txBody>
+            <a:bodyPr wrap="none" lIns="0" tIns="0" rIns="0" bIns="0" anchor="t" anchorCtr="0">
+              <a:spAutoFit/>
+            </a:bodyPr>
+            <a:lstStyle/>
+            <a:p>
+              <a:pPr algn="l"/>
+              <a:r>
+                <a:rPr lang="en" sz="1200" dirty="0">
+                  <a:solidFill>
+                    <a:schemeClr val="accent5"/>
+                  </a:solidFill>
+                  <a:latin typeface="+mn-lt"/>
+                  <a:ea typeface="+mn-ea"/>
+                  <a:cs typeface="+mn-cs"/>
+                </a:rPr>
+                <a:t>SignalR — More Than WebSocket</a:t>
+              </a:r>
+            </a:p>
+          </p:txBody>
+        </p:sp>
+        <p:sp>
+          <p:nvSpPr>
+            <p:cNvPr id="94" name="TextBox 94"/>
+            <p:cNvSpPr txBox="1"/>
+            <p:nvPr/>
+          </p:nvSpPr>
+          <p:spPr>
+            <a:xfrm>
+              <a:off x="11402127" y="6362700"/>
+              <a:ext cx="186369" cy="234696"/>
+            </a:xfrm>
+            <a:prstGeom prst="rect">
+              <a:avLst/>
+            </a:prstGeom>
+            <a:noFill/>
+            <a:ln>
+              <a:noFill/>
+            </a:ln>
+          </p:spPr>
+          <p:txBody>
+            <a:bodyPr wrap="none" lIns="0" tIns="0" rIns="0" bIns="0" anchor="t" anchorCtr="0">
+              <a:spAutoFit/>
+            </a:bodyPr>
+            <a:lstStyle/>
+            <a:p>
+              <a:pPr algn="r"/>
+              <a:r>
+                <a:rPr lang="en" sz="1200" dirty="0">
+                  <a:solidFill>
+                    <a:schemeClr val="accent5"/>
+                  </a:solidFill>
+                  <a:latin typeface="+mn-lt"/>
+                  <a:ea typeface="+mn-ea"/>
+                  <a:cs typeface="+mn-cs"/>
+                </a:rPr>
+                <a:t>16</a:t>
+              </a:r>
+            </a:p>
+          </p:txBody>
+        </p:sp>
+      </p:grpSp>
+    </p:spTree>
+  </p:cSld>
+  <p:clrMapOvr>
+    <a:masterClrMapping/>
+  </p:clrMapOvr>
+  <p:transition xmlns:p14="http://schemas.microsoft.com/office/powerpoint/2010/main" p14:dur="400">
+    <p:fade/>
+  </p:transition>
+</p:sld>
+</file>
+
 <file path=ppt/slides/slide2.xml><?xml version="1.0" encoding="utf-8"?>
 <p:sld xmlns:a="http://schemas.openxmlformats.org/drawingml/2006/main" xmlns:r="http://schemas.openxmlformats.org/officeDocument/2006/relationships" xmlns:p="http://schemas.openxmlformats.org/presentationml/2006/main">
   <p:cSld>
